--- a/PRESENTACION.pptx
+++ b/PRESENTACION.pptx
@@ -4,6 +4,9 @@
   <p:sldMasterIdLst>
     <p:sldMasterId id="2147483648" r:id="rId1"/>
   </p:sldMasterIdLst>
+  <p:notesMasterIdLst>
+    <p:notesMasterId r:id="rId20"/>
+  </p:notesMasterIdLst>
   <p:sldIdLst>
     <p:sldId id="256" r:id="rId2"/>
     <p:sldId id="257" r:id="rId3"/>
@@ -24,9 +27,6 @@
     <p:sldId id="272" r:id="rId18"/>
     <p:sldId id="273" r:id="rId19"/>
   </p:sldIdLst>
-  <p:notesMasterIdLst>
-    <p:notesMasterId r:id="rId20"/>
-  </p:notesMasterIdLst>
   <p:sldSz cx="12192000" cy="6858000"/>
   <p:notesSz cx="6858000" cy="12192000"/>
   <p:defaultTextStyle>
@@ -121,13 +121,20 @@
       </a:defRPr>
     </a:lvl9pPr>
   </p:defaultTextStyle>
+  <p:extLst>
+    <p:ext uri="{EFAFB233-063F-42B5-8137-9DF3F51BA10A}">
+      <p15:sldGuideLst xmlns:p15="http://schemas.microsoft.com/office/powerpoint/2012/main"/>
+    </p:ext>
+  </p:extLst>
 </p:presentation>
 </file>
 
 <file path=ppt/charts/chart1.xml><?xml version="1.0" encoding="utf-8"?>
-<c:chartSpace xmlns:c="http://schemas.openxmlformats.org/drawingml/2006/chart" xmlns:a="http://schemas.openxmlformats.org/drawingml/2006/main" xmlns:r="http://schemas.openxmlformats.org/officeDocument/2006/relationships">
+<c:chartSpace xmlns:c="http://schemas.openxmlformats.org/drawingml/2006/chart" xmlns:a="http://schemas.openxmlformats.org/drawingml/2006/main" xmlns:r="http://schemas.openxmlformats.org/officeDocument/2006/relationships" xmlns:c16r2="http://schemas.microsoft.com/office/drawing/2015/06/chart">
   <c:date1904 val="0"/>
+  <c:lang val="es-ES"/>
   <c:roundedCorners val="1"/>
+  <c:style val="2"/>
   <c:chart>
     <c:title>
       <c:tx>
@@ -144,7 +151,7 @@
               </a:defRPr>
             </a:pPr>
             <a:r>
-              <a:rPr sz="1400" b="0" i="0" u="none" strike="noStrike">
+              <a:rPr lang="es-CO" sz="1400" b="0" i="0" u="none" strike="noStrike">
                 <a:solidFill>
                   <a:srgbClr val="1E2761"/>
                 </a:solidFill>
@@ -155,7 +162,6 @@
           </a:p>
         </c:rich>
       </c:tx>
-      <c:layout/>
       <c:overlay val="0"/>
     </c:title>
     <c:autoTitleDeleted val="0"/>
@@ -199,6 +205,11 @@
               </a:solidFill>
               <a:effectLst/>
             </c:spPr>
+            <c:extLst>
+              <c:ext xmlns:c16="http://schemas.microsoft.com/office/drawing/2014/chart" uri="{C3380CC4-5D6E-409C-BE32-E72D297353CC}">
+                <c16:uniqueId val="{00000001-2A58-4B65-9023-DC9A707F2F27}"/>
+              </c:ext>
+            </c:extLst>
           </c:dPt>
           <c:dPt>
             <c:idx val="1"/>
@@ -209,6 +220,11 @@
               </a:solidFill>
               <a:effectLst/>
             </c:spPr>
+            <c:extLst>
+              <c:ext xmlns:c16="http://schemas.microsoft.com/office/drawing/2014/chart" uri="{C3380CC4-5D6E-409C-BE32-E72D297353CC}">
+                <c16:uniqueId val="{00000003-2A58-4B65-9023-DC9A707F2F27}"/>
+              </c:ext>
+            </c:extLst>
           </c:dPt>
           <c:dLbls>
             <c:dLbl>
@@ -227,6 +243,7 @@
                       <a:latin typeface="Calibri"/>
                     </a:defRPr>
                   </a:pPr>
+                  <a:endParaRPr lang="es-CO"/>
                 </a:p>
               </c:txPr>
               <c:showLegendKey val="0"/>
@@ -235,6 +252,12 @@
               <c:showSerName val="0"/>
               <c:showPercent val="0"/>
               <c:showBubbleSize val="0"/>
+              <c:extLst>
+                <c:ext xmlns:c15="http://schemas.microsoft.com/office/drawing/2012/chart" uri="{CE6537A1-D6FC-4f65-9D91-7224C49458BB}"/>
+                <c:ext xmlns:c16="http://schemas.microsoft.com/office/drawing/2014/chart" uri="{C3380CC4-5D6E-409C-BE32-E72D297353CC}">
+                  <c16:uniqueId val="{00000001-2A58-4B65-9023-DC9A707F2F27}"/>
+                </c:ext>
+              </c:extLst>
             </c:dLbl>
             <c:dLbl>
               <c:idx val="1"/>
@@ -252,6 +275,7 @@
                       <a:latin typeface="Calibri"/>
                     </a:defRPr>
                   </a:pPr>
+                  <a:endParaRPr lang="es-CO"/>
                 </a:p>
               </c:txPr>
               <c:showLegendKey val="0"/>
@@ -260,8 +284,21 @@
               <c:showSerName val="0"/>
               <c:showPercent val="0"/>
               <c:showBubbleSize val="0"/>
+              <c:extLst>
+                <c:ext xmlns:c15="http://schemas.microsoft.com/office/drawing/2012/chart" uri="{CE6537A1-D6FC-4f65-9D91-7224C49458BB}"/>
+                <c:ext xmlns:c16="http://schemas.microsoft.com/office/drawing/2014/chart" uri="{C3380CC4-5D6E-409C-BE32-E72D297353CC}">
+                  <c16:uniqueId val="{00000003-2A58-4B65-9023-DC9A707F2F27}"/>
+                </c:ext>
+              </c:extLst>
             </c:dLbl>
             <c:numFmt formatCode="0.0&quot;%&quot;" sourceLinked="0"/>
+            <c:spPr>
+              <a:noFill/>
+              <a:ln>
+                <a:noFill/>
+              </a:ln>
+              <a:effectLst/>
+            </c:spPr>
             <c:txPr>
               <a:bodyPr/>
               <a:lstStyle/>
@@ -274,6 +311,7 @@
                     <a:latin typeface="Arial"/>
                   </a:defRPr>
                 </a:pPr>
+                <a:endParaRPr lang="es-CO"/>
               </a:p>
             </c:txPr>
             <c:dLblPos val="ctr"/>
@@ -284,6 +322,9 @@
             <c:showPercent val="1"/>
             <c:showBubbleSize val="0"/>
             <c:showLeaderLines val="0"/>
+            <c:extLst>
+              <c:ext xmlns:c15="http://schemas.microsoft.com/office/drawing/2012/chart" uri="{CE6537A1-D6FC-4f65-9D91-7224C49458BB}"/>
+            </c:extLst>
           </c:dLbls>
           <c:cat>
             <c:strRef>
@@ -303,6 +344,7 @@
             <c:numRef>
               <c:f>Sheet1!$B$2:$B$3</c:f>
               <c:numCache>
+                <c:formatCode>General</c:formatCode>
                 <c:ptCount val="2"/>
                 <c:pt idx="0">
                   <c:v>95.25</c:v>
@@ -313,7 +355,21 @@
               </c:numCache>
             </c:numRef>
           </c:val>
+          <c:extLst>
+            <c:ext xmlns:c16="http://schemas.microsoft.com/office/drawing/2014/chart" uri="{C3380CC4-5D6E-409C-BE32-E72D297353CC}">
+              <c16:uniqueId val="{00000004-2A58-4B65-9023-DC9A707F2F27}"/>
+            </c:ext>
+          </c:extLst>
         </c:ser>
+        <c:dLbls>
+          <c:showLegendKey val="0"/>
+          <c:showVal val="0"/>
+          <c:showCatName val="0"/>
+          <c:showSerName val="0"/>
+          <c:showPercent val="0"/>
+          <c:showBubbleSize val="0"/>
+          <c:showLeaderLines val="0"/>
+        </c:dLbls>
         <c:firstSliceAng val="0"/>
       </c:pieChart>
       <c:spPr>
@@ -343,6 +399,7 @@
     </c:legend>
     <c:plotVisOnly val="1"/>
     <c:dispBlanksAs val="span"/>
+    <c:showDLblsOverMax val="1"/>
   </c:chart>
   <c:spPr>
     <a:noFill/>
@@ -358,9 +415,11 @@
 </file>
 
 <file path=ppt/charts/chart2.xml><?xml version="1.0" encoding="utf-8"?>
-<c:chartSpace xmlns:c="http://schemas.openxmlformats.org/drawingml/2006/chart" xmlns:a="http://schemas.openxmlformats.org/drawingml/2006/main" xmlns:r="http://schemas.openxmlformats.org/officeDocument/2006/relationships">
+<c:chartSpace xmlns:c="http://schemas.openxmlformats.org/drawingml/2006/chart" xmlns:a="http://schemas.openxmlformats.org/drawingml/2006/main" xmlns:r="http://schemas.openxmlformats.org/officeDocument/2006/relationships" xmlns:c16r2="http://schemas.microsoft.com/office/drawing/2015/06/chart">
   <c:date1904 val="0"/>
+  <c:lang val="es-ES"/>
   <c:roundedCorners val="1"/>
+  <c:style val="2"/>
   <c:chart>
     <c:autoTitleDeleted val="1"/>
     <c:plotArea>
@@ -390,40 +449,15 @@
             <a:effectLst/>
           </c:spPr>
           <c:invertIfNegative val="0"/>
-          <c:dLbls>
-            <c:numFmt formatCode="0.0&quot;%&quot;" sourceLinked="0"/>
-            <c:txPr>
-              <a:bodyPr/>
-              <a:lstStyle/>
-              <a:p>
-                <a:pPr>
-                  <a:defRPr b="0" i="0" strike="noStrike" sz="1400" u="none">
-                    <a:solidFill>
-                      <a:srgbClr val="1E2761"/>
-                    </a:solidFill>
-                    <a:latin typeface="Calibri"/>
-                  </a:defRPr>
-                </a:pPr>
-              </a:p>
-            </c:txPr>
-            <c:showLegendKey val="0"/>
-            <c:showVal val="1"/>
-            <c:showCatName val="0"/>
-            <c:showSerName val="0"/>
-            <c:showPercent val="0"/>
-            <c:showBubbleSize val="0"/>
-            <c:showLeaderLines val="0"/>
-          </c:dLbls>
           <c:dPt>
             <c:idx val="0"/>
             <c:invertIfNegative val="0"/>
             <c:bubble3D val="0"/>
-            <c:spPr>
-              <a:solidFill>
-                <a:srgbClr val="1E2761"/>
-              </a:solidFill>
-              <a:effectLst/>
-            </c:spPr>
+            <c:extLst>
+              <c:ext xmlns:c16="http://schemas.microsoft.com/office/drawing/2014/chart" uri="{C3380CC4-5D6E-409C-BE32-E72D297353CC}">
+                <c16:uniqueId val="{00000001-C7EA-4A60-8A44-719B1FCC74AD}"/>
+              </c:ext>
+            </c:extLst>
           </c:dPt>
           <c:dPt>
             <c:idx val="1"/>
@@ -435,24 +469,64 @@
               </a:solidFill>
               <a:effectLst/>
             </c:spPr>
+            <c:extLst>
+              <c:ext xmlns:c16="http://schemas.microsoft.com/office/drawing/2014/chart" uri="{C3380CC4-5D6E-409C-BE32-E72D297353CC}">
+                <c16:uniqueId val="{00000003-C7EA-4A60-8A44-719B1FCC74AD}"/>
+              </c:ext>
+            </c:extLst>
           </c:dPt>
+          <c:dLbls>
+            <c:numFmt formatCode="0.0&quot;%&quot;" sourceLinked="0"/>
+            <c:spPr>
+              <a:noFill/>
+              <a:ln>
+                <a:noFill/>
+              </a:ln>
+              <a:effectLst/>
+            </c:spPr>
+            <c:txPr>
+              <a:bodyPr/>
+              <a:lstStyle/>
+              <a:p>
+                <a:pPr>
+                  <a:defRPr sz="1400" b="0" i="0" u="none" strike="noStrike">
+                    <a:solidFill>
+                      <a:srgbClr val="1E2761"/>
+                    </a:solidFill>
+                    <a:latin typeface="Calibri"/>
+                  </a:defRPr>
+                </a:pPr>
+                <a:endParaRPr lang="es-CO"/>
+              </a:p>
+            </c:txPr>
+            <c:showLegendKey val="0"/>
+            <c:showVal val="1"/>
+            <c:showCatName val="0"/>
+            <c:showSerName val="0"/>
+            <c:showPercent val="0"/>
+            <c:showBubbleSize val="0"/>
+            <c:showLeaderLines val="0"/>
+            <c:extLst>
+              <c:ext xmlns:c15="http://schemas.microsoft.com/office/drawing/2012/chart" uri="{CE6537A1-D6FC-4f65-9D91-7224C49458BB}">
+                <c15:showLeaderLines val="0"/>
+              </c:ext>
+            </c:extLst>
+          </c:dLbls>
           <c:cat>
-            <c:multiLvlStrRef>
+            <c:strRef>
               <c:f>Sheet1!$A$2:$A$3</c:f>
-              <c:multiLvlStrCache>
+              <c:strCache>
                 <c:ptCount val="2"/>
-                <c:lvl>
-                  <c:pt idx="0">
-                    <c:v>Sin mora previa
+                <c:pt idx="0">
+                  <c:v>Sin mora previa
 (10,708 clientes)</c:v>
-                  </c:pt>
-                  <c:pt idx="1">
-                    <c:v>Con mora previa
+                </c:pt>
+                <c:pt idx="1">
+                  <c:v>Con mora previa
 (55 clientes)</c:v>
-                  </c:pt>
-                </c:lvl>
-              </c:multiLvlStrCache>
-            </c:multiLvlStrRef>
+                </c:pt>
+              </c:strCache>
+            </c:strRef>
           </c:cat>
           <c:val>
             <c:numRef>
@@ -469,36 +543,23 @@
               </c:numCache>
             </c:numRef>
           </c:val>
+          <c:extLst>
+            <c:ext xmlns:c16="http://schemas.microsoft.com/office/drawing/2014/chart" uri="{C3380CC4-5D6E-409C-BE32-E72D297353CC}">
+              <c16:uniqueId val="{00000004-C7EA-4A60-8A44-719B1FCC74AD}"/>
+            </c:ext>
+          </c:extLst>
         </c:ser>
         <c:dLbls>
-          <c:numFmt formatCode="0.0&quot;%&quot;" sourceLinked="0"/>
-          <c:txPr>
-            <a:bodyPr/>
-            <a:lstStyle/>
-            <a:p>
-              <a:pPr>
-                <a:defRPr b="0" i="0" strike="noStrike" sz="1400" u="none">
-                  <a:solidFill>
-                    <a:srgbClr val="1E2761"/>
-                  </a:solidFill>
-                  <a:latin typeface="Calibri"/>
-                </a:defRPr>
-              </a:pPr>
-            </a:p>
-          </c:txPr>
           <c:showLegendKey val="0"/>
           <c:showVal val="1"/>
           <c:showCatName val="0"/>
           <c:showSerName val="0"/>
           <c:showPercent val="0"/>
           <c:showBubbleSize val="0"/>
-          <c:showLeaderLines val="0"/>
         </c:dLbls>
         <c:gapWidth val="150"/>
-        <c:overlap val="0"/>
         <c:axId val="2094734554"/>
         <c:axId val="2094734552"/>
-        <c:axId val="2094734556"/>
       </c:barChart>
       <c:catAx>
         <c:axId val="2094734554"/>
@@ -539,6 +600,7 @@
         <c:crosses val="autoZero"/>
         <c:auto val="1"/>
         <c:lblAlgn val="ctr"/>
+        <c:lblOffset val="100"/>
         <c:noMultiLvlLbl val="1"/>
       </c:catAx>
       <c:valAx>
@@ -553,30 +615,6 @@
         <c:majorTickMark val="out"/>
         <c:minorTickMark val="none"/>
         <c:tickLblPos val="nextTo"/>
-        <c:spPr>
-          <a:ln w="12700" cap="flat">
-            <a:solidFill>
-              <a:srgbClr val="888888"/>
-            </a:solidFill>
-            <a:prstDash val="solid"/>
-            <a:round/>
-          </a:ln>
-        </c:spPr>
-        <c:txPr>
-          <a:bodyPr/>
-          <a:lstStyle/>
-          <a:p>
-            <a:pPr>
-              <a:defRPr sz="1200" b="0" i="0" u="none" strike="noStrike">
-                <a:solidFill>
-                  <a:srgbClr val="000000"/>
-                </a:solidFill>
-                <a:latin typeface="Arial"/>
-              </a:defRPr>
-            </a:pPr>
-            <a:endParaRPr lang="en-US"/>
-          </a:p>
-        </c:txPr>
         <c:crossAx val="2094734554"/>
         <c:crosses val="autoZero"/>
         <c:crossBetween val="between"/>
@@ -591,6 +629,7 @@
     </c:plotArea>
     <c:plotVisOnly val="1"/>
     <c:dispBlanksAs val="span"/>
+    <c:showDLblsOverMax val="1"/>
   </c:chart>
   <c:spPr>
     <a:noFill/>
@@ -606,9 +645,11 @@
 </file>
 
 <file path=ppt/charts/chart3.xml><?xml version="1.0" encoding="utf-8"?>
-<c:chartSpace xmlns:c="http://schemas.openxmlformats.org/drawingml/2006/chart" xmlns:a="http://schemas.openxmlformats.org/drawingml/2006/main" xmlns:r="http://schemas.openxmlformats.org/officeDocument/2006/relationships">
+<c:chartSpace xmlns:c="http://schemas.openxmlformats.org/drawingml/2006/chart" xmlns:a="http://schemas.openxmlformats.org/drawingml/2006/main" xmlns:r="http://schemas.openxmlformats.org/officeDocument/2006/relationships" xmlns:c16r2="http://schemas.microsoft.com/office/drawing/2015/06/chart">
   <c:date1904 val="0"/>
+  <c:lang val="es-ES"/>
   <c:roundedCorners val="1"/>
+  <c:style val="2"/>
   <c:chart>
     <c:title>
       <c:tx>
@@ -625,7 +666,7 @@
               </a:defRPr>
             </a:pPr>
             <a:r>
-              <a:rPr sz="1400" b="0" i="0" u="none" strike="noStrike">
+              <a:rPr lang="es-CO" sz="1400" b="0" i="0" u="none" strike="noStrike">
                 <a:solidFill>
                   <a:srgbClr val="1E2761"/>
                 </a:solidFill>
@@ -636,7 +677,6 @@
           </a:p>
         </c:rich>
       </c:tx>
-      <c:layout/>
       <c:overlay val="0"/>
     </c:title>
     <c:autoTitleDeleted val="0"/>
@@ -667,40 +707,15 @@
             <a:effectLst/>
           </c:spPr>
           <c:invertIfNegative val="0"/>
-          <c:dLbls>
-            <c:numFmt formatCode="0.0&quot;%&quot;" sourceLinked="0"/>
-            <c:txPr>
-              <a:bodyPr/>
-              <a:lstStyle/>
-              <a:p>
-                <a:pPr>
-                  <a:defRPr b="0" i="0" strike="noStrike" sz="1200" u="none">
-                    <a:solidFill>
-                      <a:srgbClr val="1E2761"/>
-                    </a:solidFill>
-                    <a:latin typeface="Calibri"/>
-                  </a:defRPr>
-                </a:pPr>
-              </a:p>
-            </c:txPr>
-            <c:showLegendKey val="0"/>
-            <c:showVal val="1"/>
-            <c:showCatName val="0"/>
-            <c:showSerName val="0"/>
-            <c:showPercent val="0"/>
-            <c:showBubbleSize val="0"/>
-            <c:showLeaderLines val="0"/>
-          </c:dLbls>
           <c:dPt>
             <c:idx val="0"/>
             <c:invertIfNegative val="0"/>
             <c:bubble3D val="0"/>
-            <c:spPr>
-              <a:solidFill>
-                <a:srgbClr val="B33A3A"/>
-              </a:solidFill>
-              <a:effectLst/>
-            </c:spPr>
+            <c:extLst>
+              <c:ext xmlns:c16="http://schemas.microsoft.com/office/drawing/2014/chart" uri="{C3380CC4-5D6E-409C-BE32-E72D297353CC}">
+                <c16:uniqueId val="{00000001-1951-4F8A-9560-E27C3F002B3B}"/>
+              </c:ext>
+            </c:extLst>
           </c:dPt>
           <c:dPt>
             <c:idx val="1"/>
@@ -712,6 +727,11 @@
               </a:solidFill>
               <a:effectLst/>
             </c:spPr>
+            <c:extLst>
+              <c:ext xmlns:c16="http://schemas.microsoft.com/office/drawing/2014/chart" uri="{C3380CC4-5D6E-409C-BE32-E72D297353CC}">
+                <c16:uniqueId val="{00000003-1951-4F8A-9560-E27C3F002B3B}"/>
+              </c:ext>
+            </c:extLst>
           </c:dPt>
           <c:dPt>
             <c:idx val="2"/>
@@ -723,6 +743,11 @@
               </a:solidFill>
               <a:effectLst/>
             </c:spPr>
+            <c:extLst>
+              <c:ext xmlns:c16="http://schemas.microsoft.com/office/drawing/2014/chart" uri="{C3380CC4-5D6E-409C-BE32-E72D297353CC}">
+                <c16:uniqueId val="{00000005-1951-4F8A-9560-E27C3F002B3B}"/>
+              </c:ext>
+            </c:extLst>
           </c:dPt>
           <c:dPt>
             <c:idx val="3"/>
@@ -734,32 +759,72 @@
               </a:solidFill>
               <a:effectLst/>
             </c:spPr>
+            <c:extLst>
+              <c:ext xmlns:c16="http://schemas.microsoft.com/office/drawing/2014/chart" uri="{C3380CC4-5D6E-409C-BE32-E72D297353CC}">
+                <c16:uniqueId val="{00000007-1951-4F8A-9560-E27C3F002B3B}"/>
+              </c:ext>
+            </c:extLst>
           </c:dPt>
+          <c:dLbls>
+            <c:numFmt formatCode="0.0&quot;%&quot;" sourceLinked="0"/>
+            <c:spPr>
+              <a:noFill/>
+              <a:ln>
+                <a:noFill/>
+              </a:ln>
+              <a:effectLst/>
+            </c:spPr>
+            <c:txPr>
+              <a:bodyPr/>
+              <a:lstStyle/>
+              <a:p>
+                <a:pPr>
+                  <a:defRPr sz="1200" b="0" i="0" u="none" strike="noStrike">
+                    <a:solidFill>
+                      <a:srgbClr val="1E2761"/>
+                    </a:solidFill>
+                    <a:latin typeface="Calibri"/>
+                  </a:defRPr>
+                </a:pPr>
+                <a:endParaRPr lang="es-CO"/>
+              </a:p>
+            </c:txPr>
+            <c:showLegendKey val="0"/>
+            <c:showVal val="1"/>
+            <c:showCatName val="0"/>
+            <c:showSerName val="0"/>
+            <c:showPercent val="0"/>
+            <c:showBubbleSize val="0"/>
+            <c:showLeaderLines val="0"/>
+            <c:extLst>
+              <c:ext xmlns:c15="http://schemas.microsoft.com/office/drawing/2012/chart" uri="{CE6537A1-D6FC-4f65-9D91-7224C49458BB}">
+                <c15:showLeaderLines val="0"/>
+              </c:ext>
+            </c:extLst>
+          </c:dLbls>
           <c:cat>
-            <c:multiLvlStrRef>
+            <c:strRef>
               <c:f>Sheet1!$A$2:$A$5</c:f>
-              <c:multiLvlStrCache>
+              <c:strCache>
                 <c:ptCount val="4"/>
-                <c:lvl>
-                  <c:pt idx="0">
-                    <c:v>Tipo 6
+                <c:pt idx="0">
+                  <c:v>Tipo 6
 (n=21)</c:v>
-                  </c:pt>
-                  <c:pt idx="1">
-                    <c:v>Tipo 9
+                </c:pt>
+                <c:pt idx="1">
+                  <c:v>Tipo 9
 (n=2,876)</c:v>
-                  </c:pt>
-                  <c:pt idx="2">
-                    <c:v>Tipo 4
+                </c:pt>
+                <c:pt idx="2">
+                  <c:v>Tipo 4
 (n=7,747)</c:v>
-                  </c:pt>
-                  <c:pt idx="3">
-                    <c:v>Tipo 10
+                </c:pt>
+                <c:pt idx="3">
+                  <c:v>Tipo 10
 (n=116)</c:v>
-                  </c:pt>
-                </c:lvl>
-              </c:multiLvlStrCache>
-            </c:multiLvlStrRef>
+                </c:pt>
+              </c:strCache>
+            </c:strRef>
           </c:cat>
           <c:val>
             <c:numRef>
@@ -771,10 +836,10 @@
                   <c:v>42.86</c:v>
                 </c:pt>
                 <c:pt idx="1">
-                  <c:v>4.73</c:v>
+                  <c:v>4.7300000000000004</c:v>
                 </c:pt>
                 <c:pt idx="2">
-                  <c:v>4.69</c:v>
+                  <c:v>4.6900000000000004</c:v>
                 </c:pt>
                 <c:pt idx="3">
                   <c:v>2.59</c:v>
@@ -782,36 +847,23 @@
               </c:numCache>
             </c:numRef>
           </c:val>
+          <c:extLst>
+            <c:ext xmlns:c16="http://schemas.microsoft.com/office/drawing/2014/chart" uri="{C3380CC4-5D6E-409C-BE32-E72D297353CC}">
+              <c16:uniqueId val="{00000008-1951-4F8A-9560-E27C3F002B3B}"/>
+            </c:ext>
+          </c:extLst>
         </c:ser>
         <c:dLbls>
-          <c:numFmt formatCode="0.0&quot;%&quot;" sourceLinked="0"/>
-          <c:txPr>
-            <a:bodyPr/>
-            <a:lstStyle/>
-            <a:p>
-              <a:pPr>
-                <a:defRPr b="0" i="0" strike="noStrike" sz="1200" u="none">
-                  <a:solidFill>
-                    <a:srgbClr val="1E2761"/>
-                  </a:solidFill>
-                  <a:latin typeface="Calibri"/>
-                </a:defRPr>
-              </a:pPr>
-            </a:p>
-          </c:txPr>
           <c:showLegendKey val="0"/>
           <c:showVal val="1"/>
           <c:showCatName val="0"/>
           <c:showSerName val="0"/>
           <c:showPercent val="0"/>
           <c:showBubbleSize val="0"/>
-          <c:showLeaderLines val="0"/>
         </c:dLbls>
         <c:gapWidth val="150"/>
-        <c:overlap val="0"/>
         <c:axId val="2094734554"/>
         <c:axId val="2094734552"/>
-        <c:axId val="2094734556"/>
       </c:barChart>
       <c:catAx>
         <c:axId val="2094734554"/>
@@ -852,6 +904,7 @@
         <c:crosses val="autoZero"/>
         <c:auto val="1"/>
         <c:lblAlgn val="ctr"/>
+        <c:lblOffset val="100"/>
         <c:noMultiLvlLbl val="1"/>
       </c:catAx>
       <c:valAx>
@@ -865,30 +918,6 @@
         <c:majorTickMark val="out"/>
         <c:minorTickMark val="none"/>
         <c:tickLblPos val="nextTo"/>
-        <c:spPr>
-          <a:ln w="12700" cap="flat">
-            <a:solidFill>
-              <a:srgbClr val="888888"/>
-            </a:solidFill>
-            <a:prstDash val="solid"/>
-            <a:round/>
-          </a:ln>
-        </c:spPr>
-        <c:txPr>
-          <a:bodyPr/>
-          <a:lstStyle/>
-          <a:p>
-            <a:pPr>
-              <a:defRPr sz="1200" b="0" i="0" u="none" strike="noStrike">
-                <a:solidFill>
-                  <a:srgbClr val="000000"/>
-                </a:solidFill>
-                <a:latin typeface="Arial"/>
-              </a:defRPr>
-            </a:pPr>
-            <a:endParaRPr lang="en-US"/>
-          </a:p>
-        </c:txPr>
         <c:crossAx val="2094734554"/>
         <c:crosses val="autoZero"/>
         <c:crossBetween val="between"/>
@@ -903,6 +932,7 @@
     </c:plotArea>
     <c:plotVisOnly val="1"/>
     <c:dispBlanksAs val="span"/>
+    <c:showDLblsOverMax val="1"/>
   </c:chart>
   <c:spPr>
     <a:noFill/>
@@ -918,9 +948,11 @@
 </file>
 
 <file path=ppt/charts/chart4.xml><?xml version="1.0" encoding="utf-8"?>
-<c:chartSpace xmlns:c="http://schemas.openxmlformats.org/drawingml/2006/chart" xmlns:a="http://schemas.openxmlformats.org/drawingml/2006/main" xmlns:r="http://schemas.openxmlformats.org/officeDocument/2006/relationships">
+<c:chartSpace xmlns:c="http://schemas.openxmlformats.org/drawingml/2006/chart" xmlns:a="http://schemas.openxmlformats.org/drawingml/2006/main" xmlns:r="http://schemas.openxmlformats.org/officeDocument/2006/relationships" xmlns:c16r2="http://schemas.microsoft.com/office/drawing/2015/06/chart">
   <c:date1904 val="0"/>
+  <c:lang val="es-ES"/>
   <c:roundedCorners val="1"/>
+  <c:style val="2"/>
   <c:chart>
     <c:autoTitleDeleted val="1"/>
     <c:plotArea>
@@ -950,62 +982,35 @@
             <a:effectLst/>
           </c:spPr>
           <c:invertIfNegative val="0"/>
-          <c:dLbls>
-            <c:numFmt formatCode="0.000" sourceLinked="0"/>
-            <c:txPr>
-              <a:bodyPr/>
-              <a:lstStyle/>
-              <a:p>
-                <a:pPr>
-                  <a:defRPr b="0" i="0" strike="noStrike" sz="1050" u="none">
-                    <a:solidFill>
-                      <a:srgbClr val="1E2761"/>
-                    </a:solidFill>
-                    <a:latin typeface="Calibri"/>
-                  </a:defRPr>
-                </a:pPr>
-              </a:p>
-            </c:txPr>
-            <c:showLegendKey val="0"/>
-            <c:showVal val="1"/>
-            <c:showCatName val="0"/>
-            <c:showSerName val="0"/>
-            <c:showPercent val="0"/>
-            <c:showBubbleSize val="0"/>
-            <c:showLeaderLines val="0"/>
-          </c:dLbls>
           <c:dPt>
             <c:idx val="0"/>
             <c:invertIfNegative val="0"/>
             <c:bubble3D val="0"/>
-            <c:spPr>
-              <a:solidFill>
-                <a:srgbClr val="B33A3A"/>
-              </a:solidFill>
-              <a:effectLst/>
-            </c:spPr>
+            <c:extLst>
+              <c:ext xmlns:c16="http://schemas.microsoft.com/office/drawing/2014/chart" uri="{C3380CC4-5D6E-409C-BE32-E72D297353CC}">
+                <c16:uniqueId val="{00000001-B85E-42BC-87A7-574C5FBD7F09}"/>
+              </c:ext>
+            </c:extLst>
           </c:dPt>
           <c:dPt>
             <c:idx val="1"/>
             <c:invertIfNegative val="0"/>
             <c:bubble3D val="0"/>
-            <c:spPr>
-              <a:solidFill>
-                <a:srgbClr val="B33A3A"/>
-              </a:solidFill>
-              <a:effectLst/>
-            </c:spPr>
+            <c:extLst>
+              <c:ext xmlns:c16="http://schemas.microsoft.com/office/drawing/2014/chart" uri="{C3380CC4-5D6E-409C-BE32-E72D297353CC}">
+                <c16:uniqueId val="{00000003-B85E-42BC-87A7-574C5FBD7F09}"/>
+              </c:ext>
+            </c:extLst>
           </c:dPt>
           <c:dPt>
             <c:idx val="2"/>
             <c:invertIfNegative val="0"/>
             <c:bubble3D val="0"/>
-            <c:spPr>
-              <a:solidFill>
-                <a:srgbClr val="B33A3A"/>
-              </a:solidFill>
-              <a:effectLst/>
-            </c:spPr>
+            <c:extLst>
+              <c:ext xmlns:c16="http://schemas.microsoft.com/office/drawing/2014/chart" uri="{C3380CC4-5D6E-409C-BE32-E72D297353CC}">
+                <c16:uniqueId val="{00000005-B85E-42BC-87A7-574C5FBD7F09}"/>
+              </c:ext>
+            </c:extLst>
           </c:dPt>
           <c:dPt>
             <c:idx val="3"/>
@@ -1017,6 +1022,11 @@
               </a:solidFill>
               <a:effectLst/>
             </c:spPr>
+            <c:extLst>
+              <c:ext xmlns:c16="http://schemas.microsoft.com/office/drawing/2014/chart" uri="{C3380CC4-5D6E-409C-BE32-E72D297353CC}">
+                <c16:uniqueId val="{00000007-B85E-42BC-87A7-574C5FBD7F09}"/>
+              </c:ext>
+            </c:extLst>
           </c:dPt>
           <c:dPt>
             <c:idx val="4"/>
@@ -1028,6 +1038,11 @@
               </a:solidFill>
               <a:effectLst/>
             </c:spPr>
+            <c:extLst>
+              <c:ext xmlns:c16="http://schemas.microsoft.com/office/drawing/2014/chart" uri="{C3380CC4-5D6E-409C-BE32-E72D297353CC}">
+                <c16:uniqueId val="{00000009-B85E-42BC-87A7-574C5FBD7F09}"/>
+              </c:ext>
+            </c:extLst>
           </c:dPt>
           <c:dPt>
             <c:idx val="5"/>
@@ -1039,6 +1054,11 @@
               </a:solidFill>
               <a:effectLst/>
             </c:spPr>
+            <c:extLst>
+              <c:ext xmlns:c16="http://schemas.microsoft.com/office/drawing/2014/chart" uri="{C3380CC4-5D6E-409C-BE32-E72D297353CC}">
+                <c16:uniqueId val="{0000000B-B85E-42BC-87A7-574C5FBD7F09}"/>
+              </c:ext>
+            </c:extLst>
           </c:dPt>
           <c:dPt>
             <c:idx val="6"/>
@@ -1050,6 +1070,11 @@
               </a:solidFill>
               <a:effectLst/>
             </c:spPr>
+            <c:extLst>
+              <c:ext xmlns:c16="http://schemas.microsoft.com/office/drawing/2014/chart" uri="{C3380CC4-5D6E-409C-BE32-E72D297353CC}">
+                <c16:uniqueId val="{0000000D-B85E-42BC-87A7-574C5FBD7F09}"/>
+              </c:ext>
+            </c:extLst>
           </c:dPt>
           <c:dPt>
             <c:idx val="7"/>
@@ -1061,40 +1086,80 @@
               </a:solidFill>
               <a:effectLst/>
             </c:spPr>
+            <c:extLst>
+              <c:ext xmlns:c16="http://schemas.microsoft.com/office/drawing/2014/chart" uri="{C3380CC4-5D6E-409C-BE32-E72D297353CC}">
+                <c16:uniqueId val="{0000000F-B85E-42BC-87A7-574C5FBD7F09}"/>
+              </c:ext>
+            </c:extLst>
           </c:dPt>
+          <c:dLbls>
+            <c:numFmt formatCode="0.000" sourceLinked="0"/>
+            <c:spPr>
+              <a:noFill/>
+              <a:ln>
+                <a:noFill/>
+              </a:ln>
+              <a:effectLst/>
+            </c:spPr>
+            <c:txPr>
+              <a:bodyPr/>
+              <a:lstStyle/>
+              <a:p>
+                <a:pPr>
+                  <a:defRPr sz="1050" b="0" i="0" u="none" strike="noStrike">
+                    <a:solidFill>
+                      <a:srgbClr val="1E2761"/>
+                    </a:solidFill>
+                    <a:latin typeface="Calibri"/>
+                  </a:defRPr>
+                </a:pPr>
+                <a:endParaRPr lang="es-CO"/>
+              </a:p>
+            </c:txPr>
+            <c:showLegendKey val="0"/>
+            <c:showVal val="1"/>
+            <c:showCatName val="0"/>
+            <c:showSerName val="0"/>
+            <c:showPercent val="0"/>
+            <c:showBubbleSize val="0"/>
+            <c:showLeaderLines val="0"/>
+            <c:extLst>
+              <c:ext xmlns:c15="http://schemas.microsoft.com/office/drawing/2012/chart" uri="{CE6537A1-D6FC-4f65-9D91-7224C49458BB}">
+                <c15:showLeaderLines val="0"/>
+              </c:ext>
+            </c:extLst>
+          </c:dLbls>
           <c:cat>
-            <c:multiLvlStrRef>
+            <c:strRef>
               <c:f>Sheet1!$A$2:$A$9</c:f>
-              <c:multiLvlStrCache>
+              <c:strCache>
                 <c:ptCount val="8"/>
-                <c:lvl>
-                  <c:pt idx="0">
-                    <c:v>puntaje_datacredito (depurado)</c:v>
-                  </c:pt>
-                  <c:pt idx="1">
-                    <c:v>tiene_mora_previa</c:v>
-                  </c:pt>
-                  <c:pt idx="2">
-                    <c:v>consultas_por_credito</c:v>
-                  </c:pt>
-                  <c:pt idx="3">
-                    <c:v>huella_consulta</c:v>
-                  </c:pt>
-                  <c:pt idx="4">
-                    <c:v>saldo_mora</c:v>
-                  </c:pt>
-                  <c:pt idx="5">
-                    <c:v>plazo_meses</c:v>
-                  </c:pt>
-                  <c:pt idx="6">
-                    <c:v>edad_cliente</c:v>
-                  </c:pt>
-                  <c:pt idx="7">
-                    <c:v>capital_prestado</c:v>
-                  </c:pt>
-                </c:lvl>
-              </c:multiLvlStrCache>
-            </c:multiLvlStrRef>
+                <c:pt idx="0">
+                  <c:v>puntaje_datacredito (depurado)</c:v>
+                </c:pt>
+                <c:pt idx="1">
+                  <c:v>tiene_mora_previa</c:v>
+                </c:pt>
+                <c:pt idx="2">
+                  <c:v>consultas_por_credito</c:v>
+                </c:pt>
+                <c:pt idx="3">
+                  <c:v>huella_consulta</c:v>
+                </c:pt>
+                <c:pt idx="4">
+                  <c:v>saldo_mora</c:v>
+                </c:pt>
+                <c:pt idx="5">
+                  <c:v>plazo_meses</c:v>
+                </c:pt>
+                <c:pt idx="6">
+                  <c:v>edad_cliente</c:v>
+                </c:pt>
+                <c:pt idx="7">
+                  <c:v>capital_prestado</c:v>
+                </c:pt>
+              </c:strCache>
+            </c:strRef>
           </c:cat>
           <c:val>
             <c:numRef>
@@ -1109,56 +1174,43 @@
                   <c:v>0.107</c:v>
                 </c:pt>
                 <c:pt idx="2">
-                  <c:v>0.077</c:v>
+                  <c:v>7.6999999999999999E-2</c:v>
                 </c:pt>
                 <c:pt idx="3">
-                  <c:v>0.074</c:v>
+                  <c:v>7.3999999999999996E-2</c:v>
                 </c:pt>
                 <c:pt idx="4">
-                  <c:v>0.073</c:v>
+                  <c:v>7.2999999999999995E-2</c:v>
                 </c:pt>
                 <c:pt idx="5">
-                  <c:v>0.063</c:v>
+                  <c:v>6.3E-2</c:v>
                 </c:pt>
                 <c:pt idx="6">
-                  <c:v>0.052</c:v>
+                  <c:v>5.1999999999999998E-2</c:v>
                 </c:pt>
                 <c:pt idx="7">
-                  <c:v>0.041</c:v>
+                  <c:v>4.1000000000000002E-2</c:v>
                 </c:pt>
               </c:numCache>
             </c:numRef>
           </c:val>
+          <c:extLst>
+            <c:ext xmlns:c16="http://schemas.microsoft.com/office/drawing/2014/chart" uri="{C3380CC4-5D6E-409C-BE32-E72D297353CC}">
+              <c16:uniqueId val="{00000010-B85E-42BC-87A7-574C5FBD7F09}"/>
+            </c:ext>
+          </c:extLst>
         </c:ser>
         <c:dLbls>
-          <c:numFmt formatCode="0.000" sourceLinked="0"/>
-          <c:txPr>
-            <a:bodyPr/>
-            <a:lstStyle/>
-            <a:p>
-              <a:pPr>
-                <a:defRPr b="0" i="0" strike="noStrike" sz="1050" u="none">
-                  <a:solidFill>
-                    <a:srgbClr val="1E2761"/>
-                  </a:solidFill>
-                  <a:latin typeface="Calibri"/>
-                </a:defRPr>
-              </a:pPr>
-            </a:p>
-          </c:txPr>
           <c:showLegendKey val="0"/>
           <c:showVal val="1"/>
           <c:showCatName val="0"/>
           <c:showSerName val="0"/>
           <c:showPercent val="0"/>
           <c:showBubbleSize val="0"/>
-          <c:showLeaderLines val="0"/>
         </c:dLbls>
         <c:gapWidth val="150"/>
-        <c:overlap val="0"/>
         <c:axId val="2094734554"/>
         <c:axId val="2094734552"/>
-        <c:axId val="2094734556"/>
       </c:barChart>
       <c:catAx>
         <c:axId val="2094734554"/>
@@ -1199,6 +1251,7 @@
         <c:crosses val="autoZero"/>
         <c:auto val="1"/>
         <c:lblAlgn val="ctr"/>
+        <c:lblOffset val="100"/>
         <c:noMultiLvlLbl val="1"/>
       </c:catAx>
       <c:valAx>
@@ -1212,30 +1265,6 @@
         <c:majorTickMark val="out"/>
         <c:minorTickMark val="none"/>
         <c:tickLblPos val="low"/>
-        <c:spPr>
-          <a:ln w="12700" cap="flat">
-            <a:solidFill>
-              <a:srgbClr val="888888"/>
-            </a:solidFill>
-            <a:prstDash val="solid"/>
-            <a:round/>
-          </a:ln>
-        </c:spPr>
-        <c:txPr>
-          <a:bodyPr/>
-          <a:lstStyle/>
-          <a:p>
-            <a:pPr>
-              <a:defRPr sz="1200" b="0" i="0" u="none" strike="noStrike">
-                <a:solidFill>
-                  <a:srgbClr val="000000"/>
-                </a:solidFill>
-                <a:latin typeface="Arial"/>
-              </a:defRPr>
-            </a:pPr>
-            <a:endParaRPr lang="en-US"/>
-          </a:p>
-        </c:txPr>
         <c:crossAx val="2094734554"/>
         <c:crosses val="autoZero"/>
         <c:crossBetween val="between"/>
@@ -1250,6 +1279,7 @@
     </c:plotArea>
     <c:plotVisOnly val="1"/>
     <c:dispBlanksAs val="span"/>
+    <c:showDLblsOverMax val="1"/>
   </c:chart>
   <c:spPr>
     <a:noFill/>
@@ -1265,9 +1295,11 @@
 </file>
 
 <file path=ppt/charts/chart5.xml><?xml version="1.0" encoding="utf-8"?>
-<c:chartSpace xmlns:c="http://schemas.openxmlformats.org/drawingml/2006/chart" xmlns:a="http://schemas.openxmlformats.org/drawingml/2006/main" xmlns:r="http://schemas.openxmlformats.org/officeDocument/2006/relationships">
+<c:chartSpace xmlns:c="http://schemas.openxmlformats.org/drawingml/2006/chart" xmlns:a="http://schemas.openxmlformats.org/drawingml/2006/main" xmlns:r="http://schemas.openxmlformats.org/officeDocument/2006/relationships" xmlns:c16r2="http://schemas.microsoft.com/office/drawing/2015/06/chart">
   <c:date1904 val="0"/>
+  <c:lang val="es-ES"/>
   <c:roundedCorners val="1"/>
+  <c:style val="2"/>
   <c:chart>
     <c:title>
       <c:tx>
@@ -1284,7 +1316,7 @@
               </a:defRPr>
             </a:pPr>
             <a:r>
-              <a:rPr sz="1300" b="0" i="0" u="none" strike="noStrike">
+              <a:rPr lang="es-CO" sz="1300" b="0" i="0" u="none" strike="noStrike">
                 <a:solidFill>
                   <a:srgbClr val="1E2761"/>
                 </a:solidFill>
@@ -1295,13 +1327,13 @@
           </a:p>
         </c:rich>
       </c:tx>
-      <c:layout/>
       <c:overlay val="0"/>
     </c:title>
     <c:autoTitleDeleted val="0"/>
     <c:plotArea>
       <c:layout/>
       <c:lineChart>
+        <c:grouping val="standard"/>
         <c:varyColors val="0"/>
         <c:ser>
           <c:idx val="0"/>
@@ -1318,9 +1350,6 @@
             </c:strRef>
           </c:tx>
           <c:spPr>
-            <a:solidFill>
-              <a:srgbClr val="1E2761"/>
-            </a:solidFill>
             <a:ln w="38100" cap="flat">
               <a:solidFill>
                 <a:srgbClr val="1E2761"/>
@@ -1330,31 +1359,6 @@
             </a:ln>
             <a:effectLst/>
           </c:spPr>
-          <c:invertIfNegative val="0"/>
-          <c:dLbls>
-            <c:numFmt formatCode="#,##0" sourceLinked="0"/>
-            <c:txPr>
-              <a:bodyPr/>
-              <a:lstStyle/>
-              <a:p>
-                <a:pPr>
-                  <a:defRPr b="0" i="0" strike="noStrike" sz="1200" u="none">
-                    <a:solidFill>
-                      <a:srgbClr val="000000"/>
-                    </a:solidFill>
-                    <a:latin typeface="Arial"/>
-                  </a:defRPr>
-                </a:pPr>
-              </a:p>
-            </c:txPr>
-            <c:showLegendKey val="0"/>
-            <c:showVal val="0"/>
-            <c:showCatName val="0"/>
-            <c:showSerName val="0"/>
-            <c:showPercent val="0"/>
-            <c:showBubbleSize val="0"/>
-            <c:showLeaderLines val="0"/>
-          </c:dLbls>
           <c:marker>
             <c:symbol val="circle"/>
             <c:size val="6"/>
@@ -1373,44 +1377,42 @@
             </c:spPr>
           </c:marker>
           <c:cat>
-            <c:multiLvlStrRef>
+            <c:strRef>
               <c:f>Sheet1!$A$2:$A$11</c:f>
-              <c:multiLvlStrCache>
+              <c:strCache>
                 <c:ptCount val="10"/>
-                <c:lvl>
-                  <c:pt idx="0">
-                    <c:v>PC1</c:v>
-                  </c:pt>
-                  <c:pt idx="1">
-                    <c:v>PC2</c:v>
-                  </c:pt>
-                  <c:pt idx="2">
-                    <c:v>PC3</c:v>
-                  </c:pt>
-                  <c:pt idx="3">
-                    <c:v>PC4</c:v>
-                  </c:pt>
-                  <c:pt idx="4">
-                    <c:v>PC5</c:v>
-                  </c:pt>
-                  <c:pt idx="5">
-                    <c:v>PC6</c:v>
-                  </c:pt>
-                  <c:pt idx="6">
-                    <c:v>PC7</c:v>
-                  </c:pt>
-                  <c:pt idx="7">
-                    <c:v>PC8</c:v>
-                  </c:pt>
-                  <c:pt idx="8">
-                    <c:v>PC9</c:v>
-                  </c:pt>
-                  <c:pt idx="9">
-                    <c:v>PC10</c:v>
-                  </c:pt>
-                </c:lvl>
-              </c:multiLvlStrCache>
-            </c:multiLvlStrRef>
+                <c:pt idx="0">
+                  <c:v>PC1</c:v>
+                </c:pt>
+                <c:pt idx="1">
+                  <c:v>PC2</c:v>
+                </c:pt>
+                <c:pt idx="2">
+                  <c:v>PC3</c:v>
+                </c:pt>
+                <c:pt idx="3">
+                  <c:v>PC4</c:v>
+                </c:pt>
+                <c:pt idx="4">
+                  <c:v>PC5</c:v>
+                </c:pt>
+                <c:pt idx="5">
+                  <c:v>PC6</c:v>
+                </c:pt>
+                <c:pt idx="6">
+                  <c:v>PC7</c:v>
+                </c:pt>
+                <c:pt idx="7">
+                  <c:v>PC8</c:v>
+                </c:pt>
+                <c:pt idx="8">
+                  <c:v>PC9</c:v>
+                </c:pt>
+                <c:pt idx="9">
+                  <c:v>PC10</c:v>
+                </c:pt>
+              </c:strCache>
+            </c:strRef>
           </c:cat>
           <c:val>
             <c:numRef>
@@ -1419,7 +1421,7 @@
                 <c:formatCode>General</c:formatCode>
                 <c:ptCount val="10"/>
                 <c:pt idx="0">
-                  <c:v>20.1</c:v>
+                  <c:v>20.100000000000001</c:v>
                 </c:pt>
                 <c:pt idx="1">
                   <c:v>31.8</c:v>
@@ -1452,35 +1454,24 @@
             </c:numRef>
           </c:val>
           <c:smooth val="0"/>
+          <c:extLst>
+            <c:ext xmlns:c16="http://schemas.microsoft.com/office/drawing/2014/chart" uri="{C3380CC4-5D6E-409C-BE32-E72D297353CC}">
+              <c16:uniqueId val="{00000000-3E6D-4810-AA29-5FBBAB2CFD27}"/>
+            </c:ext>
+          </c:extLst>
         </c:ser>
         <c:dLbls>
-          <c:numFmt formatCode="#,##0" sourceLinked="0"/>
-          <c:txPr>
-            <a:bodyPr/>
-            <a:lstStyle/>
-            <a:p>
-              <a:pPr>
-                <a:defRPr b="0" i="0" strike="noStrike" sz="1200" u="none">
-                  <a:solidFill>
-                    <a:srgbClr val="000000"/>
-                  </a:solidFill>
-                  <a:latin typeface="Arial"/>
-                </a:defRPr>
-              </a:pPr>
-            </a:p>
-          </c:txPr>
           <c:showLegendKey val="0"/>
           <c:showVal val="0"/>
           <c:showCatName val="0"/>
           <c:showSerName val="0"/>
           <c:showPercent val="0"/>
           <c:showBubbleSize val="0"/>
-          <c:showLeaderLines val="0"/>
         </c:dLbls>
         <c:marker val="1"/>
+        <c:smooth val="0"/>
         <c:axId val="2094734554"/>
         <c:axId val="2094734552"/>
-        <c:axId val="2094734556"/>
       </c:lineChart>
       <c:catAx>
         <c:axId val="2094734554"/>
@@ -1521,6 +1512,7 @@
         <c:crosses val="autoZero"/>
         <c:auto val="1"/>
         <c:lblAlgn val="ctr"/>
+        <c:lblOffset val="100"/>
         <c:noMultiLvlLbl val="1"/>
       </c:catAx>
       <c:valAx>
@@ -1585,6 +1577,7 @@
     </c:plotArea>
     <c:plotVisOnly val="1"/>
     <c:dispBlanksAs val="span"/>
+    <c:showDLblsOverMax val="1"/>
   </c:chart>
   <c:spPr>
     <a:noFill/>
@@ -1600,9 +1593,11 @@
 </file>
 
 <file path=ppt/charts/chart6.xml><?xml version="1.0" encoding="utf-8"?>
-<c:chartSpace xmlns:c="http://schemas.openxmlformats.org/drawingml/2006/chart" xmlns:a="http://schemas.openxmlformats.org/drawingml/2006/main" xmlns:r="http://schemas.openxmlformats.org/officeDocument/2006/relationships">
+<c:chartSpace xmlns:c="http://schemas.openxmlformats.org/drawingml/2006/chart" xmlns:a="http://schemas.openxmlformats.org/drawingml/2006/main" xmlns:r="http://schemas.openxmlformats.org/officeDocument/2006/relationships" xmlns:c16r2="http://schemas.microsoft.com/office/drawing/2015/06/chart">
   <c:date1904 val="0"/>
+  <c:lang val="es-ES"/>
   <c:roundedCorners val="1"/>
+  <c:style val="2"/>
   <c:chart>
     <c:title>
       <c:tx>
@@ -1619,7 +1614,7 @@
               </a:defRPr>
             </a:pPr>
             <a:r>
-              <a:rPr sz="1300" b="0" i="0" u="none" strike="noStrike">
+              <a:rPr lang="es-CO" sz="1300" b="0" i="0" u="none" strike="noStrike">
                 <a:solidFill>
                   <a:srgbClr val="1E2761"/>
                 </a:solidFill>
@@ -1630,7 +1625,6 @@
           </a:p>
         </c:rich>
       </c:tx>
-      <c:layout/>
       <c:overlay val="0"/>
     </c:title>
     <c:autoTitleDeleted val="0"/>
@@ -1661,40 +1655,15 @@
             <a:effectLst/>
           </c:spPr>
           <c:invertIfNegative val="0"/>
-          <c:dLbls>
-            <c:numFmt formatCode="0.00&quot;%&quot;" sourceLinked="0"/>
-            <c:txPr>
-              <a:bodyPr/>
-              <a:lstStyle/>
-              <a:p>
-                <a:pPr>
-                  <a:defRPr b="0" i="0" strike="noStrike" sz="1200" u="none">
-                    <a:solidFill>
-                      <a:srgbClr val="1E2761"/>
-                    </a:solidFill>
-                    <a:latin typeface="Calibri"/>
-                  </a:defRPr>
-                </a:pPr>
-              </a:p>
-            </c:txPr>
-            <c:showLegendKey val="0"/>
-            <c:showVal val="1"/>
-            <c:showCatName val="0"/>
-            <c:showSerName val="0"/>
-            <c:showPercent val="0"/>
-            <c:showBubbleSize val="0"/>
-            <c:showLeaderLines val="0"/>
-          </c:dLbls>
           <c:dPt>
             <c:idx val="0"/>
             <c:invertIfNegative val="0"/>
             <c:bubble3D val="0"/>
-            <c:spPr>
-              <a:solidFill>
-                <a:srgbClr val="1E2761"/>
-              </a:solidFill>
-              <a:effectLst/>
-            </c:spPr>
+            <c:extLst>
+              <c:ext xmlns:c16="http://schemas.microsoft.com/office/drawing/2014/chart" uri="{C3380CC4-5D6E-409C-BE32-E72D297353CC}">
+                <c16:uniqueId val="{00000001-8200-4837-83A0-E49E9D63A97E}"/>
+              </c:ext>
+            </c:extLst>
           </c:dPt>
           <c:dPt>
             <c:idx val="1"/>
@@ -1706,22 +1675,62 @@
               </a:solidFill>
               <a:effectLst/>
             </c:spPr>
+            <c:extLst>
+              <c:ext xmlns:c16="http://schemas.microsoft.com/office/drawing/2014/chart" uri="{C3380CC4-5D6E-409C-BE32-E72D297353CC}">
+                <c16:uniqueId val="{00000003-8200-4837-83A0-E49E9D63A97E}"/>
+              </c:ext>
+            </c:extLst>
           </c:dPt>
+          <c:dLbls>
+            <c:numFmt formatCode="0.00&quot;%&quot;" sourceLinked="0"/>
+            <c:spPr>
+              <a:noFill/>
+              <a:ln>
+                <a:noFill/>
+              </a:ln>
+              <a:effectLst/>
+            </c:spPr>
+            <c:txPr>
+              <a:bodyPr/>
+              <a:lstStyle/>
+              <a:p>
+                <a:pPr>
+                  <a:defRPr sz="1200" b="0" i="0" u="none" strike="noStrike">
+                    <a:solidFill>
+                      <a:srgbClr val="1E2761"/>
+                    </a:solidFill>
+                    <a:latin typeface="Calibri"/>
+                  </a:defRPr>
+                </a:pPr>
+                <a:endParaRPr lang="es-CO"/>
+              </a:p>
+            </c:txPr>
+            <c:showLegendKey val="0"/>
+            <c:showVal val="1"/>
+            <c:showCatName val="0"/>
+            <c:showSerName val="0"/>
+            <c:showPercent val="0"/>
+            <c:showBubbleSize val="0"/>
+            <c:showLeaderLines val="0"/>
+            <c:extLst>
+              <c:ext xmlns:c15="http://schemas.microsoft.com/office/drawing/2012/chart" uri="{CE6537A1-D6FC-4f65-9D91-7224C49458BB}">
+                <c15:showLeaderLines val="0"/>
+              </c:ext>
+            </c:extLst>
+          </c:dLbls>
           <c:cat>
-            <c:multiLvlStrRef>
+            <c:strRef>
               <c:f>Sheet1!$A$2:$A$3</c:f>
-              <c:multiLvlStrCache>
+              <c:strCache>
                 <c:ptCount val="2"/>
-                <c:lvl>
-                  <c:pt idx="0">
-                    <c:v>Empleado (n=6,754)</c:v>
-                  </c:pt>
-                  <c:pt idx="1">
-                    <c:v>Independiente (n=4,009)</c:v>
-                  </c:pt>
-                </c:lvl>
-              </c:multiLvlStrCache>
-            </c:multiLvlStrRef>
+                <c:pt idx="0">
+                  <c:v>Empleado (n=6,754)</c:v>
+                </c:pt>
+                <c:pt idx="1">
+                  <c:v>Independiente (n=4,009)</c:v>
+                </c:pt>
+              </c:strCache>
+            </c:strRef>
           </c:cat>
           <c:val>
             <c:numRef>
@@ -1738,36 +1747,23 @@
               </c:numCache>
             </c:numRef>
           </c:val>
+          <c:extLst>
+            <c:ext xmlns:c16="http://schemas.microsoft.com/office/drawing/2014/chart" uri="{C3380CC4-5D6E-409C-BE32-E72D297353CC}">
+              <c16:uniqueId val="{00000004-8200-4837-83A0-E49E9D63A97E}"/>
+            </c:ext>
+          </c:extLst>
         </c:ser>
         <c:dLbls>
-          <c:numFmt formatCode="0.00&quot;%&quot;" sourceLinked="0"/>
-          <c:txPr>
-            <a:bodyPr/>
-            <a:lstStyle/>
-            <a:p>
-              <a:pPr>
-                <a:defRPr b="0" i="0" strike="noStrike" sz="1200" u="none">
-                  <a:solidFill>
-                    <a:srgbClr val="1E2761"/>
-                  </a:solidFill>
-                  <a:latin typeface="Calibri"/>
-                </a:defRPr>
-              </a:pPr>
-            </a:p>
-          </c:txPr>
           <c:showLegendKey val="0"/>
           <c:showVal val="1"/>
           <c:showCatName val="0"/>
           <c:showSerName val="0"/>
           <c:showPercent val="0"/>
           <c:showBubbleSize val="0"/>
-          <c:showLeaderLines val="0"/>
         </c:dLbls>
         <c:gapWidth val="150"/>
-        <c:overlap val="0"/>
         <c:axId val="2094734554"/>
         <c:axId val="2094734552"/>
-        <c:axId val="2094734556"/>
       </c:barChart>
       <c:catAx>
         <c:axId val="2094734554"/>
@@ -1808,6 +1804,7 @@
         <c:crosses val="autoZero"/>
         <c:auto val="1"/>
         <c:lblAlgn val="ctr"/>
+        <c:lblOffset val="100"/>
         <c:noMultiLvlLbl val="1"/>
       </c:catAx>
       <c:valAx>
@@ -1821,30 +1818,6 @@
         <c:majorTickMark val="out"/>
         <c:minorTickMark val="none"/>
         <c:tickLblPos val="nextTo"/>
-        <c:spPr>
-          <a:ln w="12700" cap="flat">
-            <a:solidFill>
-              <a:srgbClr val="888888"/>
-            </a:solidFill>
-            <a:prstDash val="solid"/>
-            <a:round/>
-          </a:ln>
-        </c:spPr>
-        <c:txPr>
-          <a:bodyPr/>
-          <a:lstStyle/>
-          <a:p>
-            <a:pPr>
-              <a:defRPr sz="1200" b="0" i="0" u="none" strike="noStrike">
-                <a:solidFill>
-                  <a:srgbClr val="000000"/>
-                </a:solidFill>
-                <a:latin typeface="Arial"/>
-              </a:defRPr>
-            </a:pPr>
-            <a:endParaRPr lang="en-US"/>
-          </a:p>
-        </c:txPr>
         <c:crossAx val="2094734554"/>
         <c:crosses val="autoZero"/>
         <c:crossBetween val="between"/>
@@ -1859,6 +1832,7 @@
     </c:plotArea>
     <c:plotVisOnly val="1"/>
     <c:dispBlanksAs val="span"/>
+    <c:showDLblsOverMax val="1"/>
   </c:chart>
   <c:spPr>
     <a:noFill/>
@@ -1895,234 +1869,10 @@
           <a:chExt cx="0" cy="0"/>
         </a:xfrm>
       </p:grpSpPr>
-      <p:sp>
-        <p:nvSpPr>
-          <p:cNvPr id="2" name="Header Placeholder 1"/>
-          <p:cNvSpPr>
-            <a:spLocks noGrp="1"/>
-          </p:cNvSpPr>
-          <p:nvPr>
-            <p:ph type="hdr" sz="quarter"/>
-          </p:nvPr>
-        </p:nvSpPr>
-        <p:spPr>
-          <a:xfrm>
-            <a:off x="0" y="0"/>
-            <a:ext cx="2971800" cy="458788"/>
-          </a:xfrm>
-          <a:prstGeom prst="rect">
-            <a:avLst/>
-          </a:prstGeom>
-        </p:spPr>
-        <p:txBody>
-          <a:bodyPr vert="horz" lIns="91440" tIns="45720" rIns="91440" bIns="45720" rtlCol="0"/>
-          <a:lstStyle>
-            <a:lvl1pPr algn="l">
-              <a:defRPr sz="1200"/>
-            </a:lvl1pPr>
-          </a:lstStyle>
-          <a:p>
-            <a:endParaRPr lang="en-US"/>
-          </a:p>
-        </p:txBody>
-      </p:sp>
-      <p:sp>
-        <p:nvSpPr>
-          <p:cNvPr id="3" name="Date Placeholder 2"/>
-          <p:cNvSpPr>
-            <a:spLocks noGrp="1"/>
-          </p:cNvSpPr>
-          <p:nvPr>
-            <p:ph type="dt" idx="1"/>
-          </p:nvPr>
-        </p:nvSpPr>
-        <p:spPr>
-          <a:xfrm>
-            <a:off x="3884613" y="0"/>
-            <a:ext cx="2971800" cy="458788"/>
-          </a:xfrm>
-          <a:prstGeom prst="rect">
-            <a:avLst/>
-          </a:prstGeom>
-        </p:spPr>
-        <p:txBody>
-          <a:bodyPr vert="horz" lIns="91440" tIns="45720" rIns="91440" bIns="45720" rtlCol="0"/>
-          <a:lstStyle>
-            <a:lvl1pPr algn="r">
-              <a:defRPr sz="1200"/>
-            </a:lvl1pPr>
-          </a:lstStyle>
-          <a:p>
-            <a:fld id="{5282F153-3F37-0F45-9E97-73ACFA13230C}" type="datetimeFigureOut">
-              <a:rPr lang="en-US"/>
-              <a:t>7/23/19</a:t>
-            </a:fld>
-            <a:endParaRPr lang="en-US"/>
-          </a:p>
-        </p:txBody>
-      </p:sp>
-      <p:sp>
-        <p:nvSpPr>
-          <p:cNvPr id="4" name="Slide Image Placeholder 3"/>
-          <p:cNvSpPr>
-            <a:spLocks noGrp="1" noRot="1" noChangeAspect="1"/>
-          </p:cNvSpPr>
-          <p:nvPr>
-            <p:ph type="sldImg" idx="2"/>
-          </p:nvPr>
-        </p:nvSpPr>
-        <p:spPr>
-          <a:xfrm>
-            <a:off x="685800" y="1143000"/>
-            <a:ext cx="5486400" cy="3086100"/>
-          </a:xfrm>
-          <a:prstGeom prst="rect">
-            <a:avLst/>
-          </a:prstGeom>
-          <a:noFill/>
-          <a:ln w="12700">
-            <a:solidFill>
-              <a:prstClr val="black"/>
-            </a:solidFill>
-          </a:ln>
-        </p:spPr>
-        <p:txBody>
-          <a:bodyPr vert="horz" lIns="91440" tIns="45720" rIns="91440" bIns="45720" rtlCol="0" anchor="ctr"/>
-          <a:lstStyle/>
-          <a:p>
-            <a:endParaRPr lang="en-US"/>
-          </a:p>
-        </p:txBody>
-      </p:sp>
-      <p:sp>
-        <p:nvSpPr>
-          <p:cNvPr id="5" name="Notes Placeholder 4"/>
-          <p:cNvSpPr>
-            <a:spLocks noGrp="1"/>
-          </p:cNvSpPr>
-          <p:nvPr>
-            <p:ph type="body" sz="quarter" idx="3"/>
-          </p:nvPr>
-        </p:nvSpPr>
-        <p:spPr>
-          <a:xfrm>
-            <a:off x="685800" y="4400550"/>
-            <a:ext cx="5486400" cy="3600450"/>
-          </a:xfrm>
-          <a:prstGeom prst="rect">
-            <a:avLst/>
-          </a:prstGeom>
-        </p:spPr>
-        <p:txBody>
-          <a:bodyPr vert="horz" lIns="91440" tIns="45720" rIns="91440" bIns="45720" rtlCol="0"/>
-          <a:lstStyle/>
-          <a:p>
-            <a:pPr lvl="0"/>
-            <a:r>
-              <a:rPr lang="en-US"/>
-              <a:t>Click to edit Master text styles</a:t>
-            </a:r>
-          </a:p>
-          <a:p>
-            <a:pPr lvl="1"/>
-            <a:r>
-              <a:rPr lang="en-US"/>
-              <a:t>Second level</a:t>
-            </a:r>
-          </a:p>
-          <a:p>
-            <a:pPr lvl="2"/>
-            <a:r>
-              <a:rPr lang="en-US"/>
-              <a:t>Third level</a:t>
-            </a:r>
-          </a:p>
-          <a:p>
-            <a:pPr lvl="3"/>
-            <a:r>
-              <a:rPr lang="en-US"/>
-              <a:t>Fourth level</a:t>
-            </a:r>
-          </a:p>
-          <a:p>
-            <a:pPr lvl="4"/>
-            <a:r>
-              <a:rPr lang="en-US"/>
-              <a:t>Fifth level</a:t>
-            </a:r>
-          </a:p>
-        </p:txBody>
-      </p:sp>
-      <p:sp>
-        <p:nvSpPr>
-          <p:cNvPr id="6" name="Footer Placeholder 5"/>
-          <p:cNvSpPr>
-            <a:spLocks noGrp="1"/>
-          </p:cNvSpPr>
-          <p:nvPr>
-            <p:ph type="ftr" sz="quarter" idx="4"/>
-          </p:nvPr>
-        </p:nvSpPr>
-        <p:spPr>
-          <a:xfrm>
-            <a:off x="0" y="8685213"/>
-            <a:ext cx="2971800" cy="458787"/>
-          </a:xfrm>
-          <a:prstGeom prst="rect">
-            <a:avLst/>
-          </a:prstGeom>
-        </p:spPr>
-        <p:txBody>
-          <a:bodyPr vert="horz" lIns="91440" tIns="45720" rIns="91440" bIns="45720" rtlCol="0" anchor="b"/>
-          <a:lstStyle>
-            <a:lvl1pPr algn="l">
-              <a:defRPr sz="1200"/>
-            </a:lvl1pPr>
-          </a:lstStyle>
-          <a:p>
-            <a:endParaRPr lang="en-US"/>
-          </a:p>
-        </p:txBody>
-      </p:sp>
-      <p:sp>
-        <p:nvSpPr>
-          <p:cNvPr id="7" name="Slide Number Placeholder 6"/>
-          <p:cNvSpPr>
-            <a:spLocks noGrp="1"/>
-          </p:cNvSpPr>
-          <p:nvPr>
-            <p:ph type="sldNum" sz="quarter" idx="5"/>
-          </p:nvPr>
-        </p:nvSpPr>
-        <p:spPr>
-          <a:xfrm>
-            <a:off x="3884613" y="8685213"/>
-            <a:ext cx="2971800" cy="458787"/>
-          </a:xfrm>
-          <a:prstGeom prst="rect">
-            <a:avLst/>
-          </a:prstGeom>
-        </p:spPr>
-        <p:txBody>
-          <a:bodyPr vert="horz" lIns="91440" tIns="45720" rIns="91440" bIns="45720" rtlCol="0" anchor="b"/>
-          <a:lstStyle>
-            <a:lvl1pPr algn="r">
-              <a:defRPr sz="1200"/>
-            </a:lvl1pPr>
-          </a:lstStyle>
-          <a:p>
-            <a:fld id="{CE5E9CC1-C706-0F49-92D6-E571CC5EEA8F}" type="slidenum">
-              <a:rPr lang="en-US"/>
-              <a:t>‹#›</a:t>
-            </a:fld>
-            <a:endParaRPr lang="en-US"/>
-          </a:p>
-        </p:txBody>
-      </p:sp>
     </p:spTree>
     <p:extLst>
       <p:ext uri="{BB962C8B-B14F-4D97-AF65-F5344CB8AC3E}">
-        <p14:creationId xmlns:p14="http://schemas.microsoft.com/office/powerpoint/2010/main" val="1024086991"/>
+        <p14:creationId xmlns:p14="http://schemas.microsoft.com/office/powerpoint/2010/main" val="3400754728"/>
       </p:ext>
     </p:extLst>
   </p:cSld>
@@ -2250,6 +2000,13 @@
           </p:nvPr>
         </p:nvSpPr>
         <p:spPr/>
+        <p:txBody>
+          <a:bodyPr/>
+          <a:lstStyle/>
+          <a:p>
+            <a:endParaRPr lang="es-CO"/>
+          </a:p>
+        </p:txBody>
       </p:sp>
       <p:sp>
         <p:nvSpPr>
@@ -2270,7 +2027,6 @@
               <a:rPr lang="en-US" dirty="0"/>
               <a:t>Bienvenida. Contexto: soy candidato a Científico de Datos Junior, se me entregó una base de datos de créditos sin diccionario de datos, y el objetivo es presentar los insights más valiosos para el negocio en 15 minutos, dirigidos tanto a un perfil técnico como a un perfil de negocio.</a:t>
             </a:r>
-            <a:endParaRPr lang="en-US" dirty="0"/>
           </a:p>
         </p:txBody>
       </p:sp>
@@ -2338,6 +2094,13 @@
           </p:nvPr>
         </p:nvSpPr>
         <p:spPr/>
+        <p:txBody>
+          <a:bodyPr/>
+          <a:lstStyle/>
+          <a:p>
+            <a:endParaRPr lang="es-CO"/>
+          </a:p>
+        </p:txBody>
       </p:sp>
       <p:sp>
         <p:nvSpPr>
@@ -2358,7 +2121,6 @@
               <a:rPr lang="en-US" dirty="0"/>
               <a:t>Para el líder de negocio: vale la pena preguntar qué representa el tipo de crédito 6 y por qué concentra tanto riesgo, antes de invertir en un modelo — puede ser un problema de política de originación.</a:t>
             </a:r>
-            <a:endParaRPr lang="en-US" dirty="0"/>
           </a:p>
         </p:txBody>
       </p:sp>
@@ -2426,6 +2188,13 @@
           </p:nvPr>
         </p:nvSpPr>
         <p:spPr/>
+        <p:txBody>
+          <a:bodyPr/>
+          <a:lstStyle/>
+          <a:p>
+            <a:endParaRPr lang="es-CO"/>
+          </a:p>
+        </p:txBody>
       </p:sp>
       <p:sp>
         <p:nvSpPr>
@@ -2446,7 +2215,6 @@
               <a:rPr lang="en-US" dirty="0"/>
               <a:t>Mensaje para el técnico: esto justifica no intentar reglas de negocio simplistas de una sola variable, y sí invertir en un modelo que capture interacciones entre variables.</a:t>
             </a:r>
-            <a:endParaRPr lang="en-US" dirty="0"/>
           </a:p>
         </p:txBody>
       </p:sp>
@@ -2514,6 +2282,13 @@
           </p:nvPr>
         </p:nvSpPr>
         <p:spPr/>
+        <p:txBody>
+          <a:bodyPr/>
+          <a:lstStyle/>
+          <a:p>
+            <a:endParaRPr lang="es-CO"/>
+          </a:p>
+        </p:txBody>
       </p:sp>
       <p:sp>
         <p:nvSpPr>
@@ -2534,7 +2309,6 @@
               <a:rPr lang="en-US" dirty="0"/>
               <a:t>Valida la inversión en feature engineering: construir variables con lógica de negocio (mora previa, intensidad de consultas) rindió más que los ratios financieros tradicionales en este dataset específico.</a:t>
             </a:r>
-            <a:endParaRPr lang="en-US" dirty="0"/>
           </a:p>
         </p:txBody>
       </p:sp>
@@ -2602,6 +2376,13 @@
           </p:nvPr>
         </p:nvSpPr>
         <p:spPr/>
+        <p:txBody>
+          <a:bodyPr/>
+          <a:lstStyle/>
+          <a:p>
+            <a:endParaRPr lang="es-CO"/>
+          </a:p>
+        </p:txBody>
       </p:sp>
       <p:sp>
         <p:nvSpPr>
@@ -2622,7 +2403,6 @@
               <a:rPr lang="en-US" dirty="0"/>
               <a:t>El PCA aquí tiene valor diagnóstico, no operativo: confirma que no existe estructura lineal simple que separe a los clientes en mora.</a:t>
             </a:r>
-            <a:endParaRPr lang="en-US" dirty="0"/>
           </a:p>
         </p:txBody>
       </p:sp>
@@ -2690,6 +2470,13 @@
           </p:nvPr>
         </p:nvSpPr>
         <p:spPr/>
+        <p:txBody>
+          <a:bodyPr/>
+          <a:lstStyle/>
+          <a:p>
+            <a:endParaRPr lang="es-CO"/>
+          </a:p>
+        </p:txBody>
       </p:sp>
       <p:sp>
         <p:nvSpPr>
@@ -2710,7 +2497,6 @@
               <a:rPr lang="en-US" dirty="0"/>
               <a:t>Estos son hallazgos secundarios pero útiles: la diferencia laboral es moderada, y la bimodalidad del score sugiere segmentar el análisis por historial crediticio en fases futuras.</a:t>
             </a:r>
-            <a:endParaRPr lang="en-US" dirty="0"/>
           </a:p>
         </p:txBody>
       </p:sp>
@@ -2778,6 +2564,13 @@
           </p:nvPr>
         </p:nvSpPr>
         <p:spPr/>
+        <p:txBody>
+          <a:bodyPr/>
+          <a:lstStyle/>
+          <a:p>
+            <a:endParaRPr lang="es-CO"/>
+          </a:p>
+        </p:txBody>
       </p:sp>
       <p:sp>
         <p:nvSpPr>
@@ -2798,7 +2591,6 @@
               <a:rPr lang="en-US" dirty="0"/>
               <a:t>Es importante ser transparente con estas limitaciones frente al líder técnico: ninguna es motivo para descartar los hallazgos, pero sí para validarlos antes de tomar decisiones de alto impacto.</a:t>
             </a:r>
-            <a:endParaRPr lang="en-US" dirty="0"/>
           </a:p>
         </p:txBody>
       </p:sp>
@@ -2866,6 +2658,13 @@
           </p:nvPr>
         </p:nvSpPr>
         <p:spPr/>
+        <p:txBody>
+          <a:bodyPr/>
+          <a:lstStyle/>
+          <a:p>
+            <a:endParaRPr lang="es-CO"/>
+          </a:p>
+        </p:txBody>
       </p:sp>
       <p:sp>
         <p:nvSpPr>
@@ -2886,7 +2685,6 @@
               <a:rPr lang="en-US" dirty="0"/>
               <a:t>Cierro la parte de insights con acciones concretas: no solo 'qué encontramos', sino 'qué hacer con esto'.</a:t>
             </a:r>
-            <a:endParaRPr lang="en-US" dirty="0"/>
           </a:p>
         </p:txBody>
       </p:sp>
@@ -2954,6 +2752,13 @@
           </p:nvPr>
         </p:nvSpPr>
         <p:spPr/>
+        <p:txBody>
+          <a:bodyPr/>
+          <a:lstStyle/>
+          <a:p>
+            <a:endParaRPr lang="es-CO"/>
+          </a:p>
+        </p:txBody>
       </p:sp>
       <p:sp>
         <p:nvSpPr>
@@ -2974,7 +2779,6 @@
               <a:rPr lang="en-US" dirty="0"/>
               <a:t>Este análisis es la base para las siguientes fases del proyecto: feature engineering formal, modelado predictivo, despliegue y monitoreo continuo.</a:t>
             </a:r>
-            <a:endParaRPr lang="en-US" dirty="0"/>
           </a:p>
         </p:txBody>
       </p:sp>
@@ -3042,6 +2846,13 @@
           </p:nvPr>
         </p:nvSpPr>
         <p:spPr/>
+        <p:txBody>
+          <a:bodyPr/>
+          <a:lstStyle/>
+          <a:p>
+            <a:endParaRPr lang="es-CO"/>
+          </a:p>
+        </p:txBody>
       </p:sp>
       <p:sp>
         <p:nvSpPr>
@@ -3062,7 +2873,6 @@
               <a:rPr lang="en-US" dirty="0"/>
               <a:t>Cierro invitando a preguntas, y menciono que todo el proceso (código, commits, decisiones documentadas) está disponible en el repositorio para su revisión.</a:t>
             </a:r>
-            <a:endParaRPr lang="en-US" dirty="0"/>
           </a:p>
         </p:txBody>
       </p:sp>
@@ -3130,6 +2940,13 @@
           </p:nvPr>
         </p:nvSpPr>
         <p:spPr/>
+        <p:txBody>
+          <a:bodyPr/>
+          <a:lstStyle/>
+          <a:p>
+            <a:endParaRPr lang="es-CO"/>
+          </a:p>
+        </p:txBody>
       </p:sp>
       <p:sp>
         <p:nvSpPr>
@@ -3150,7 +2967,6 @@
               <a:rPr lang="en-US" dirty="0"/>
               <a:t>Esta diapositiva resume todo el análisis en 30 segundos, para quien solo se lleve una idea de la reunión. El resto de la presentación desarrolla cada uno de estos puntos con evidencia.</a:t>
             </a:r>
-            <a:endParaRPr lang="en-US" dirty="0"/>
           </a:p>
         </p:txBody>
       </p:sp>
@@ -3218,6 +3034,13 @@
           </p:nvPr>
         </p:nvSpPr>
         <p:spPr/>
+        <p:txBody>
+          <a:bodyPr/>
+          <a:lstStyle/>
+          <a:p>
+            <a:endParaRPr lang="es-CO"/>
+          </a:p>
+        </p:txBody>
       </p:sp>
       <p:sp>
         <p:nvSpPr>
@@ -3238,7 +3061,6 @@
               <a:rPr lang="en-US" dirty="0"/>
               <a:t>Este es un ejercicio real de EDA: nos entregaron el DataFrame crudo, sin diccionario, así que la primera tarea fue investigar el negocio (central de riesgo Datacrédito) para entender cada variable con criterio propio.</a:t>
             </a:r>
-            <a:endParaRPr lang="en-US" dirty="0"/>
           </a:p>
         </p:txBody>
       </p:sp>
@@ -3306,6 +3128,13 @@
           </p:nvPr>
         </p:nvSpPr>
         <p:spPr/>
+        <p:txBody>
+          <a:bodyPr/>
+          <a:lstStyle/>
+          <a:p>
+            <a:endParaRPr lang="es-CO"/>
+          </a:p>
+        </p:txBody>
       </p:sp>
       <p:sp>
         <p:nvSpPr>
@@ -3326,7 +3155,6 @@
               <a:rPr lang="en-US" dirty="0"/>
               <a:t>El diccionario no es documentación decorativa: definirlo formalmente destapó tres errores metodológicos que estaban en el análisis y produjo dos hallazgos nuevos.</a:t>
             </a:r>
-            <a:endParaRPr lang="en-US" dirty="0"/>
           </a:p>
         </p:txBody>
       </p:sp>
@@ -3394,6 +3222,13 @@
           </p:nvPr>
         </p:nvSpPr>
         <p:spPr/>
+        <p:txBody>
+          <a:bodyPr/>
+          <a:lstStyle/>
+          <a:p>
+            <a:endParaRPr lang="es-CO"/>
+          </a:p>
+        </p:txBody>
       </p:sp>
       <p:sp>
         <p:nvSpPr>
@@ -3414,7 +3249,6 @@
               <a:rPr lang="en-US" dirty="0"/>
               <a:t>Los insights principales no cambiaron porque se calcularon con groupby, el método correcto. Lo que falló fueron los análisis numéricos automáticos y las reglas de validación.</a:t>
             </a:r>
-            <a:endParaRPr lang="en-US" dirty="0"/>
           </a:p>
         </p:txBody>
       </p:sp>
@@ -3482,6 +3316,13 @@
           </p:nvPr>
         </p:nvSpPr>
         <p:spPr/>
+        <p:txBody>
+          <a:bodyPr/>
+          <a:lstStyle/>
+          <a:p>
+            <a:endParaRPr lang="es-CO"/>
+          </a:p>
+        </p:txBody>
       </p:sp>
       <p:sp>
         <p:nvSpPr>
@@ -3502,7 +3343,6 @@
               <a:rPr lang="en-US" dirty="0"/>
               <a:t>Seguimos un flujo estándar de ciencia de datos: primero entender antes de limpiar, y limpiar antes de analizar en profundidad. Cada decisión de limpieza se investigó con evidencia antes de aplicarse.</a:t>
             </a:r>
-            <a:endParaRPr lang="en-US" dirty="0"/>
           </a:p>
         </p:txBody>
       </p:sp>
@@ -3570,6 +3410,13 @@
           </p:nvPr>
         </p:nvSpPr>
         <p:spPr/>
+        <p:txBody>
+          <a:bodyPr/>
+          <a:lstStyle/>
+          <a:p>
+            <a:endParaRPr lang="es-CO"/>
+          </a:p>
+        </p:txBody>
       </p:sp>
       <p:sp>
         <p:nvSpPr>
@@ -3590,7 +3437,6 @@
               <a:rPr lang="en-US" dirty="0"/>
               <a:t>Sin estas correcciones, cualquier análisis posterior habría partido de datos falsos: edades de 122 años, salarios de miles de millones, y una variable de tendencia de ingresos parcialmente corrupta.</a:t>
             </a:r>
-            <a:endParaRPr lang="en-US" dirty="0"/>
           </a:p>
         </p:txBody>
       </p:sp>
@@ -3658,6 +3504,13 @@
           </p:nvPr>
         </p:nvSpPr>
         <p:spPr/>
+        <p:txBody>
+          <a:bodyPr/>
+          <a:lstStyle/>
+          <a:p>
+            <a:endParaRPr lang="es-CO"/>
+          </a:p>
+        </p:txBody>
       </p:sp>
       <p:sp>
         <p:nvSpPr>
@@ -3678,7 +3531,6 @@
               <a:rPr lang="en-US" dirty="0"/>
               <a:t>Este punto es crítico para el equipo técnico: cualquier modelo que se entrene después debe manejar este desbalance explícitamente, y cualquier métrica de éxito debe evitar la exactitud simple.</a:t>
             </a:r>
-            <a:endParaRPr lang="en-US" dirty="0"/>
           </a:p>
         </p:txBody>
       </p:sp>
@@ -3746,6 +3598,13 @@
           </p:nvPr>
         </p:nvSpPr>
         <p:spPr/>
+        <p:txBody>
+          <a:bodyPr/>
+          <a:lstStyle/>
+          <a:p>
+            <a:endParaRPr lang="es-CO"/>
+          </a:p>
+        </p:txBody>
       </p:sp>
       <p:sp>
         <p:nvSpPr>
@@ -3766,7 +3625,6 @@
               <a:rPr lang="en-US" dirty="0"/>
               <a:t>Es el hallazgo con mayor valor accionable: un cliente que ya está en mora en otro producto tiene casi 8 veces más probabilidad de incumplir este crédito. Recomendación directa: usarlo como criterio de alerta temprana.</a:t>
             </a:r>
-            <a:endParaRPr lang="en-US" dirty="0"/>
           </a:p>
         </p:txBody>
       </p:sp>
@@ -3839,6 +3697,11 @@
 <file path=ppt/slideMasters/slideMaster1.xml><?xml version="1.0" encoding="utf-8"?>
 <p:sldMaster xmlns:a="http://schemas.openxmlformats.org/drawingml/2006/main" xmlns:r="http://schemas.openxmlformats.org/officeDocument/2006/relationships" xmlns:p="http://schemas.openxmlformats.org/presentationml/2006/main">
   <p:cSld>
+    <p:bg>
+      <p:bgRef idx="1001">
+        <a:schemeClr val="bg1"/>
+      </p:bgRef>
+    </p:bg>
     <p:spTree>
       <p:nvGrpSpPr>
         <p:cNvPr id="1" name=""/>
@@ -4121,6 +3984,7 @@
         <a:solidFill>
           <a:srgbClr val="1E2761"/>
         </a:solidFill>
+        <a:effectLst/>
       </p:bgPr>
     </p:bg>
     <p:spTree>
@@ -4158,11 +4022,11 @@
           <a:bodyPr wrap="square" lIns="0" tIns="0" rIns="0" bIns="0" rtlCol="0" anchor="ctr"/>
           <a:lstStyle/>
           <a:p>
-            <a:pPr indent="0" marL="0">
-              <a:buNone/>
-            </a:pPr>
-            <a:r>
-              <a:rPr lang="en-US" sz="1500" b="1" spc="300" kern="0" dirty="0">
+            <a:pPr marL="0" indent="0">
+              <a:buNone/>
+            </a:pPr>
+            <a:r>
+              <a:rPr lang="en-US" sz="1500" b="1" kern="0" spc="300" dirty="0">
                 <a:solidFill>
                   <a:srgbClr val="CADCFC"/>
                 </a:solidFill>
@@ -4197,7 +4061,7 @@
           <a:bodyPr wrap="square" lIns="0" tIns="0" rIns="0" bIns="0" rtlCol="0" anchor="ctr"/>
           <a:lstStyle/>
           <a:p>
-            <a:pPr indent="0" marL="0">
+            <a:pPr marL="0" indent="0">
               <a:buNone/>
             </a:pPr>
             <a:r>
@@ -4236,7 +4100,7 @@
           <a:bodyPr wrap="square" lIns="0" tIns="0" rIns="0" bIns="0" rtlCol="0" anchor="ctr"/>
           <a:lstStyle/>
           <a:p>
-            <a:pPr indent="0" marL="0">
+            <a:pPr marL="0" indent="0">
               <a:buNone/>
             </a:pPr>
             <a:r>
@@ -4276,6 +4140,13 @@
             <a:prstDash val="solid"/>
           </a:ln>
         </p:spPr>
+        <p:txBody>
+          <a:bodyPr/>
+          <a:lstStyle/>
+          <a:p>
+            <a:endParaRPr lang="es-CO"/>
+          </a:p>
+        </p:txBody>
       </p:sp>
       <p:sp>
         <p:nvSpPr>
@@ -4285,7 +4156,7 @@
         </p:nvSpPr>
         <p:spPr>
           <a:xfrm>
-            <a:off x="822960" y="5989320"/>
+            <a:off x="735874" y="4343400"/>
             <a:ext cx="8229600" cy="365760"/>
           </a:xfrm>
           <a:prstGeom prst="rect">
@@ -4298,7 +4169,7 @@
           <a:bodyPr wrap="square" lIns="0" tIns="0" rIns="0" bIns="0" rtlCol="0" anchor="ctr"/>
           <a:lstStyle/>
           <a:p>
-            <a:pPr indent="0" marL="0">
+            <a:pPr marL="0" indent="0">
               <a:buNone/>
             </a:pPr>
             <a:r>
@@ -4310,48 +4181,9 @@
                 <a:ea typeface="Calibri" pitchFamily="34" charset="-122"/>
                 <a:cs typeface="Calibri" pitchFamily="34" charset="-120"/>
               </a:rPr>
-              <a:t>Candidato a Científico de Datos Junior  ·  Equipo de Datos y Analítica</a:t>
+              <a:t>CAMILO ANDRES ARMENTA PEDROZO</a:t>
             </a:r>
             <a:endParaRPr lang="en-US" sz="1200" dirty="0"/>
-          </a:p>
-        </p:txBody>
-      </p:sp>
-      <p:sp>
-        <p:nvSpPr>
-          <p:cNvPr id="7" name="Text 5"/>
-          <p:cNvSpPr/>
-          <p:nvPr/>
-        </p:nvSpPr>
-        <p:spPr>
-          <a:xfrm>
-            <a:off x="10058400" y="5943600"/>
-            <a:ext cx="1463040" cy="457200"/>
-          </a:xfrm>
-          <a:prstGeom prst="rect">
-            <a:avLst/>
-          </a:prstGeom>
-          <a:noFill/>
-          <a:ln/>
-        </p:spPr>
-        <p:txBody>
-          <a:bodyPr wrap="square" lIns="0" tIns="0" rIns="0" bIns="0" rtlCol="0" anchor="ctr"/>
-          <a:lstStyle/>
-          <a:p>
-            <a:pPr algn="r" indent="0" marL="0">
-              <a:buNone/>
-            </a:pPr>
-            <a:r>
-              <a:rPr lang="en-US" sz="1400" b="1" dirty="0">
-                <a:solidFill>
-                  <a:srgbClr val="FFFFFF"/>
-                </a:solidFill>
-                <a:latin typeface="Calibri" pitchFamily="34" charset="0"/>
-                <a:ea typeface="Calibri" pitchFamily="34" charset="-122"/>
-                <a:cs typeface="Calibri" pitchFamily="34" charset="-120"/>
-              </a:rPr>
-              <a:t>15 min</a:t>
-            </a:r>
-            <a:endParaRPr lang="en-US" sz="1400" dirty="0"/>
           </a:p>
         </p:txBody>
       </p:sp>
@@ -4401,11 +4233,11 @@
           <a:bodyPr wrap="square" lIns="0" tIns="0" rIns="0" bIns="0" rtlCol="0" anchor="ctr"/>
           <a:lstStyle/>
           <a:p>
-            <a:pPr indent="0" marL="0">
-              <a:buNone/>
-            </a:pPr>
-            <a:r>
-              <a:rPr lang="en-US" sz="1300" b="1" spc="200" kern="0" dirty="0">
+            <a:pPr marL="0" indent="0">
+              <a:buNone/>
+            </a:pPr>
+            <a:r>
+              <a:rPr lang="en-US" sz="1300" b="1" kern="0" spc="200" dirty="0">
                 <a:solidFill>
                   <a:srgbClr val="B33A3A"/>
                 </a:solidFill>
@@ -4440,7 +4272,7 @@
           <a:bodyPr wrap="square" lIns="0" tIns="0" rIns="0" bIns="0" rtlCol="0" anchor="ctr"/>
           <a:lstStyle/>
           <a:p>
-            <a:pPr indent="0" marL="0">
+            <a:pPr marL="0" indent="0">
               <a:buNone/>
             </a:pPr>
             <a:r>
@@ -4460,7 +4292,7 @@
       </p:sp>
       <p:graphicFrame>
         <p:nvGraphicFramePr>
-          <p:cNvPr id="4" name="Chart 0" descr=""/>
+          <p:cNvPr id="4" name="Chart 0"/>
           <p:cNvGraphicFramePr/>
           <p:nvPr/>
         </p:nvGraphicFramePr>
@@ -4468,9 +4300,9 @@
           <a:off x="548640" y="1965960"/>
           <a:ext cx="7406640" cy="4114800"/>
         </p:xfrm>
-        <a:graphic xmlns:a="http://schemas.openxmlformats.org/drawingml/2006/main">
+        <a:graphic>
           <a:graphicData uri="http://schemas.openxmlformats.org/drawingml/2006/chart">
-            <c:chart xmlns:c="http://schemas.openxmlformats.org/drawingml/2006/chart" r:id="rId1"/>
+            <c:chart xmlns:c="http://schemas.openxmlformats.org/drawingml/2006/chart" xmlns:r="http://schemas.openxmlformats.org/officeDocument/2006/relationships" r:id="rId3"/>
           </a:graphicData>
         </a:graphic>
       </p:graphicFrame>
@@ -4495,7 +4327,7 @@
           <a:bodyPr wrap="square" lIns="0" tIns="0" rIns="0" bIns="0" rtlCol="0" anchor="ctr"/>
           <a:lstStyle/>
           <a:p>
-            <a:pPr indent="0" marL="0">
+            <a:pPr marL="0" indent="0">
               <a:buNone/>
             </a:pPr>
             <a:r>
@@ -4534,7 +4366,7 @@
           <a:bodyPr wrap="square" lIns="0" tIns="0" rIns="0" bIns="0" rtlCol="0" anchor="ctr"/>
           <a:lstStyle/>
           <a:p>
-            <a:pPr indent="0" marL="0">
+            <a:pPr marL="0" indent="0">
               <a:lnSpc>
                 <a:spcPct val="120000"/>
               </a:lnSpc>
@@ -4576,6 +4408,13 @@
           </a:solidFill>
           <a:ln/>
         </p:spPr>
+        <p:txBody>
+          <a:bodyPr/>
+          <a:lstStyle/>
+          <a:p>
+            <a:endParaRPr lang="es-CO"/>
+          </a:p>
+        </p:txBody>
       </p:sp>
       <p:sp>
         <p:nvSpPr>
@@ -4598,7 +4437,7 @@
           <a:bodyPr wrap="square" lIns="0" tIns="0" rIns="0" bIns="0" rtlCol="0" anchor="t"/>
           <a:lstStyle/>
           <a:p>
-            <a:pPr indent="0" marL="0">
+            <a:pPr marL="0" indent="0">
               <a:lnSpc>
                 <a:spcPct val="120000"/>
               </a:lnSpc>
@@ -4640,7 +4479,7 @@
           <a:bodyPr wrap="square" lIns="0" tIns="0" rIns="0" bIns="0" rtlCol="0" anchor="ctr"/>
           <a:lstStyle/>
           <a:p>
-            <a:pPr indent="0" marL="0">
+            <a:pPr marL="0" indent="0">
               <a:buNone/>
             </a:pPr>
             <a:r>
@@ -4679,7 +4518,7 @@
           <a:bodyPr wrap="square" lIns="0" tIns="0" rIns="0" bIns="0" rtlCol="0" anchor="ctr"/>
           <a:lstStyle/>
           <a:p>
-            <a:pPr algn="r" indent="0" marL="0">
+            <a:pPr marL="0" indent="0" algn="r">
               <a:buNone/>
             </a:pPr>
             <a:r>
@@ -4743,11 +4582,11 @@
           <a:bodyPr wrap="square" lIns="0" tIns="0" rIns="0" bIns="0" rtlCol="0" anchor="ctr"/>
           <a:lstStyle/>
           <a:p>
-            <a:pPr indent="0" marL="0">
-              <a:buNone/>
-            </a:pPr>
-            <a:r>
-              <a:rPr lang="en-US" sz="1300" b="1" spc="200" kern="0" dirty="0">
+            <a:pPr marL="0" indent="0">
+              <a:buNone/>
+            </a:pPr>
+            <a:r>
+              <a:rPr lang="en-US" sz="1300" b="1" kern="0" spc="200" dirty="0">
                 <a:solidFill>
                   <a:srgbClr val="B33A3A"/>
                 </a:solidFill>
@@ -4782,7 +4621,7 @@
           <a:bodyPr wrap="square" lIns="0" tIns="0" rIns="0" bIns="0" rtlCol="0" anchor="ctr"/>
           <a:lstStyle/>
           <a:p>
-            <a:pPr indent="0" marL="0">
+            <a:pPr marL="0" indent="0">
               <a:buNone/>
             </a:pPr>
             <a:r>
@@ -4802,7 +4641,7 @@
       </p:sp>
       <p:graphicFrame>
         <p:nvGraphicFramePr>
-          <p:cNvPr id="4" name="Chart 0" descr=""/>
+          <p:cNvPr id="4" name="Chart 0"/>
           <p:cNvGraphicFramePr/>
           <p:nvPr/>
         </p:nvGraphicFramePr>
@@ -4810,9 +4649,9 @@
           <a:off x="548640" y="1874520"/>
           <a:ext cx="7772400" cy="4343400"/>
         </p:xfrm>
-        <a:graphic xmlns:a="http://schemas.openxmlformats.org/drawingml/2006/main">
+        <a:graphic>
           <a:graphicData uri="http://schemas.openxmlformats.org/drawingml/2006/chart">
-            <c:chart xmlns:c="http://schemas.openxmlformats.org/drawingml/2006/chart" r:id="rId1"/>
+            <c:chart xmlns:c="http://schemas.openxmlformats.org/drawingml/2006/chart" xmlns:r="http://schemas.openxmlformats.org/officeDocument/2006/relationships" r:id="rId3"/>
           </a:graphicData>
         </a:graphic>
       </p:graphicFrame>
@@ -4837,7 +4676,7 @@
           <a:bodyPr wrap="square" lIns="0" tIns="0" rIns="0" bIns="0" rtlCol="0" anchor="ctr"/>
           <a:lstStyle/>
           <a:p>
-            <a:pPr indent="0" marL="0">
+            <a:pPr marL="0" indent="0">
               <a:buNone/>
             </a:pPr>
             <a:r>
@@ -4876,7 +4715,7 @@
           <a:bodyPr wrap="square" lIns="0" tIns="0" rIns="0" bIns="0" rtlCol="0" anchor="ctr"/>
           <a:lstStyle/>
           <a:p>
-            <a:pPr indent="0" marL="0">
+            <a:pPr marL="0" indent="0">
               <a:lnSpc>
                 <a:spcPct val="120000"/>
               </a:lnSpc>
@@ -4918,7 +4757,7 @@
           <a:bodyPr wrap="square" lIns="0" tIns="0" rIns="0" bIns="0" rtlCol="0" anchor="ctr"/>
           <a:lstStyle/>
           <a:p>
-            <a:pPr indent="0" marL="0">
+            <a:pPr marL="0" indent="0">
               <a:lnSpc>
                 <a:spcPct val="125000"/>
               </a:lnSpc>
@@ -4960,7 +4799,7 @@
           <a:bodyPr wrap="square" lIns="0" tIns="0" rIns="0" bIns="0" rtlCol="0" anchor="ctr"/>
           <a:lstStyle/>
           <a:p>
-            <a:pPr indent="0" marL="0">
+            <a:pPr marL="0" indent="0">
               <a:buNone/>
             </a:pPr>
             <a:r>
@@ -4999,7 +4838,7 @@
           <a:bodyPr wrap="square" lIns="0" tIns="0" rIns="0" bIns="0" rtlCol="0" anchor="ctr"/>
           <a:lstStyle/>
           <a:p>
-            <a:pPr algn="r" indent="0" marL="0">
+            <a:pPr marL="0" indent="0" algn="r">
               <a:buNone/>
             </a:pPr>
             <a:r>
@@ -5063,11 +4902,11 @@
           <a:bodyPr wrap="square" lIns="0" tIns="0" rIns="0" bIns="0" rtlCol="0" anchor="ctr"/>
           <a:lstStyle/>
           <a:p>
-            <a:pPr indent="0" marL="0">
-              <a:buNone/>
-            </a:pPr>
-            <a:r>
-              <a:rPr lang="en-US" sz="1300" b="1" spc="200" kern="0" dirty="0">
+            <a:pPr marL="0" indent="0">
+              <a:buNone/>
+            </a:pPr>
+            <a:r>
+              <a:rPr lang="en-US" sz="1300" b="1" kern="0" spc="200" dirty="0">
                 <a:solidFill>
                   <a:srgbClr val="B33A3A"/>
                 </a:solidFill>
@@ -5102,7 +4941,7 @@
           <a:bodyPr wrap="square" lIns="0" tIns="0" rIns="0" bIns="0" rtlCol="0" anchor="ctr"/>
           <a:lstStyle/>
           <a:p>
-            <a:pPr indent="0" marL="0">
+            <a:pPr marL="0" indent="0">
               <a:buNone/>
             </a:pPr>
             <a:r>
@@ -5141,7 +4980,7 @@
           <a:bodyPr wrap="square" lIns="0" tIns="0" rIns="0" bIns="0" rtlCol="0" anchor="ctr"/>
           <a:lstStyle/>
           <a:p>
-            <a:pPr indent="0" marL="0">
+            <a:pPr marL="0" indent="0">
               <a:buNone/>
             </a:pPr>
             <a:r>
@@ -5180,7 +5019,7 @@
           <a:bodyPr wrap="square" lIns="0" tIns="0" rIns="0" bIns="0" rtlCol="0" anchor="ctr"/>
           <a:lstStyle/>
           <a:p>
-            <a:pPr indent="0" marL="0">
+            <a:pPr marL="0" indent="0">
               <a:buNone/>
             </a:pPr>
             <a:r>
@@ -5219,7 +5058,7 @@
           <a:bodyPr wrap="square" lIns="0" tIns="0" rIns="0" bIns="0" rtlCol="0" anchor="ctr"/>
           <a:lstStyle/>
           <a:p>
-            <a:pPr indent="0" marL="0">
+            <a:pPr marL="0" indent="0">
               <a:buNone/>
             </a:pPr>
             <a:r>
@@ -5258,6 +5097,13 @@
           </a:solidFill>
           <a:ln/>
         </p:spPr>
+        <p:txBody>
+          <a:bodyPr/>
+          <a:lstStyle/>
+          <a:p>
+            <a:endParaRPr lang="es-CO"/>
+          </a:p>
+        </p:txBody>
       </p:sp>
       <p:sp>
         <p:nvSpPr>
@@ -5280,7 +5126,7 @@
           <a:bodyPr wrap="square" lIns="0" tIns="0" rIns="0" bIns="0" rtlCol="0" anchor="ctr"/>
           <a:lstStyle/>
           <a:p>
-            <a:pPr indent="0" marL="0">
+            <a:pPr marL="0" indent="0">
               <a:buNone/>
             </a:pPr>
             <a:r>
@@ -5319,7 +5165,7 @@
           <a:bodyPr wrap="square" lIns="0" tIns="0" rIns="0" bIns="0" rtlCol="0" anchor="ctr"/>
           <a:lstStyle/>
           <a:p>
-            <a:pPr indent="0" marL="0">
+            <a:pPr marL="0" indent="0">
               <a:buNone/>
             </a:pPr>
             <a:r>
@@ -5358,7 +5204,7 @@
           <a:bodyPr wrap="square" lIns="0" tIns="0" rIns="0" bIns="0" rtlCol="0" anchor="ctr"/>
           <a:lstStyle/>
           <a:p>
-            <a:pPr indent="0" marL="0">
+            <a:pPr marL="0" indent="0">
               <a:buNone/>
             </a:pPr>
             <a:r>
@@ -5397,6 +5243,13 @@
           </a:solidFill>
           <a:ln/>
         </p:spPr>
+        <p:txBody>
+          <a:bodyPr/>
+          <a:lstStyle/>
+          <a:p>
+            <a:endParaRPr lang="es-CO"/>
+          </a:p>
+        </p:txBody>
       </p:sp>
       <p:sp>
         <p:nvSpPr>
@@ -5419,7 +5272,7 @@
           <a:bodyPr wrap="square" lIns="0" tIns="0" rIns="0" bIns="0" rtlCol="0" anchor="ctr"/>
           <a:lstStyle/>
           <a:p>
-            <a:pPr indent="0" marL="0">
+            <a:pPr marL="0" indent="0">
               <a:buNone/>
             </a:pPr>
             <a:r>
@@ -5458,7 +5311,7 @@
           <a:bodyPr wrap="square" lIns="0" tIns="0" rIns="0" bIns="0" rtlCol="0" anchor="ctr"/>
           <a:lstStyle/>
           <a:p>
-            <a:pPr indent="0" marL="0">
+            <a:pPr marL="0" indent="0">
               <a:buNone/>
             </a:pPr>
             <a:r>
@@ -5497,7 +5350,7 @@
           <a:bodyPr wrap="square" lIns="0" tIns="0" rIns="0" bIns="0" rtlCol="0" anchor="ctr"/>
           <a:lstStyle/>
           <a:p>
-            <a:pPr indent="0" marL="0">
+            <a:pPr marL="0" indent="0">
               <a:buNone/>
             </a:pPr>
             <a:r>
@@ -5536,6 +5389,13 @@
           </a:solidFill>
           <a:ln/>
         </p:spPr>
+        <p:txBody>
+          <a:bodyPr/>
+          <a:lstStyle/>
+          <a:p>
+            <a:endParaRPr lang="es-CO"/>
+          </a:p>
+        </p:txBody>
       </p:sp>
       <p:sp>
         <p:nvSpPr>
@@ -5558,7 +5418,7 @@
           <a:bodyPr wrap="square" lIns="0" tIns="0" rIns="0" bIns="0" rtlCol="0" anchor="ctr"/>
           <a:lstStyle/>
           <a:p>
-            <a:pPr indent="0" marL="0">
+            <a:pPr marL="0" indent="0">
               <a:buNone/>
             </a:pPr>
             <a:r>
@@ -5597,7 +5457,7 @@
           <a:bodyPr wrap="square" lIns="0" tIns="0" rIns="0" bIns="0" rtlCol="0" anchor="ctr"/>
           <a:lstStyle/>
           <a:p>
-            <a:pPr indent="0" marL="0">
+            <a:pPr marL="0" indent="0">
               <a:buNone/>
             </a:pPr>
             <a:r>
@@ -5636,7 +5496,7 @@
           <a:bodyPr wrap="square" lIns="0" tIns="0" rIns="0" bIns="0" rtlCol="0" anchor="ctr"/>
           <a:lstStyle/>
           <a:p>
-            <a:pPr indent="0" marL="0">
+            <a:pPr marL="0" indent="0">
               <a:buNone/>
             </a:pPr>
             <a:r>
@@ -5675,6 +5535,13 @@
           </a:solidFill>
           <a:ln/>
         </p:spPr>
+        <p:txBody>
+          <a:bodyPr/>
+          <a:lstStyle/>
+          <a:p>
+            <a:endParaRPr lang="es-CO"/>
+          </a:p>
+        </p:txBody>
       </p:sp>
       <p:sp>
         <p:nvSpPr>
@@ -5697,7 +5564,7 @@
           <a:bodyPr wrap="square" lIns="0" tIns="0" rIns="0" bIns="0" rtlCol="0" anchor="ctr"/>
           <a:lstStyle/>
           <a:p>
-            <a:pPr indent="0" marL="0">
+            <a:pPr marL="0" indent="0">
               <a:buNone/>
             </a:pPr>
             <a:r>
@@ -5736,7 +5603,7 @@
           <a:bodyPr wrap="square" lIns="0" tIns="0" rIns="0" bIns="0" rtlCol="0" anchor="ctr"/>
           <a:lstStyle/>
           <a:p>
-            <a:pPr indent="0" marL="0">
+            <a:pPr marL="0" indent="0">
               <a:buNone/>
             </a:pPr>
             <a:r>
@@ -5775,7 +5642,7 @@
           <a:bodyPr wrap="square" lIns="0" tIns="0" rIns="0" bIns="0" rtlCol="0" anchor="ctr"/>
           <a:lstStyle/>
           <a:p>
-            <a:pPr indent="0" marL="0">
+            <a:pPr marL="0" indent="0">
               <a:buNone/>
             </a:pPr>
             <a:r>
@@ -5814,6 +5681,13 @@
           </a:solidFill>
           <a:ln/>
         </p:spPr>
+        <p:txBody>
+          <a:bodyPr/>
+          <a:lstStyle/>
+          <a:p>
+            <a:endParaRPr lang="es-CO"/>
+          </a:p>
+        </p:txBody>
       </p:sp>
       <p:sp>
         <p:nvSpPr>
@@ -5836,7 +5710,7 @@
           <a:bodyPr wrap="square" lIns="0" tIns="0" rIns="0" bIns="0" rtlCol="0" anchor="ctr"/>
           <a:lstStyle/>
           <a:p>
-            <a:pPr indent="0" marL="0">
+            <a:pPr marL="0" indent="0">
               <a:buNone/>
             </a:pPr>
             <a:r>
@@ -5875,7 +5749,7 @@
           <a:bodyPr wrap="square" lIns="0" tIns="0" rIns="0" bIns="0" rtlCol="0" anchor="ctr"/>
           <a:lstStyle/>
           <a:p>
-            <a:pPr indent="0" marL="0">
+            <a:pPr marL="0" indent="0">
               <a:lnSpc>
                 <a:spcPct val="120000"/>
               </a:lnSpc>
@@ -5917,7 +5791,7 @@
           <a:bodyPr wrap="square" lIns="0" tIns="0" rIns="0" bIns="0" rtlCol="0" anchor="ctr"/>
           <a:lstStyle/>
           <a:p>
-            <a:pPr indent="0" marL="0">
+            <a:pPr marL="0" indent="0">
               <a:lnSpc>
                 <a:spcPct val="125000"/>
               </a:lnSpc>
@@ -5959,7 +5833,7 @@
           <a:bodyPr wrap="square" lIns="0" tIns="0" rIns="0" bIns="0" rtlCol="0" anchor="ctr"/>
           <a:lstStyle/>
           <a:p>
-            <a:pPr indent="0" marL="0">
+            <a:pPr marL="0" indent="0">
               <a:buNone/>
             </a:pPr>
             <a:r>
@@ -5998,7 +5872,7 @@
           <a:bodyPr wrap="square" lIns="0" tIns="0" rIns="0" bIns="0" rtlCol="0" anchor="ctr"/>
           <a:lstStyle/>
           <a:p>
-            <a:pPr algn="r" indent="0" marL="0">
+            <a:pPr marL="0" indent="0" algn="r">
               <a:buNone/>
             </a:pPr>
             <a:r>
@@ -6062,11 +5936,11 @@
           <a:bodyPr wrap="square" lIns="0" tIns="0" rIns="0" bIns="0" rtlCol="0" anchor="ctr"/>
           <a:lstStyle/>
           <a:p>
-            <a:pPr indent="0" marL="0">
-              <a:buNone/>
-            </a:pPr>
-            <a:r>
-              <a:rPr lang="en-US" sz="1300" b="1" spc="200" kern="0" dirty="0">
+            <a:pPr marL="0" indent="0">
+              <a:buNone/>
+            </a:pPr>
+            <a:r>
+              <a:rPr lang="en-US" sz="1300" b="1" kern="0" spc="200" dirty="0">
                 <a:solidFill>
                   <a:srgbClr val="B33A3A"/>
                 </a:solidFill>
@@ -6101,7 +5975,7 @@
           <a:bodyPr wrap="square" lIns="0" tIns="0" rIns="0" bIns="0" rtlCol="0" anchor="ctr"/>
           <a:lstStyle/>
           <a:p>
-            <a:pPr indent="0" marL="0">
+            <a:pPr marL="0" indent="0">
               <a:buNone/>
             </a:pPr>
             <a:r>
@@ -6121,7 +5995,7 @@
       </p:sp>
       <p:graphicFrame>
         <p:nvGraphicFramePr>
-          <p:cNvPr id="4" name="Chart 0" descr=""/>
+          <p:cNvPr id="4" name="Chart 0"/>
           <p:cNvGraphicFramePr/>
           <p:nvPr/>
         </p:nvGraphicFramePr>
@@ -6129,9 +6003,9 @@
           <a:off x="548640" y="1920240"/>
           <a:ext cx="6035040" cy="4023360"/>
         </p:xfrm>
-        <a:graphic xmlns:a="http://schemas.openxmlformats.org/drawingml/2006/main">
+        <a:graphic>
           <a:graphicData uri="http://schemas.openxmlformats.org/drawingml/2006/chart">
-            <c:chart xmlns:c="http://schemas.openxmlformats.org/drawingml/2006/chart" r:id="rId1"/>
+            <c:chart xmlns:c="http://schemas.openxmlformats.org/drawingml/2006/chart" xmlns:r="http://schemas.openxmlformats.org/officeDocument/2006/relationships" r:id="rId3"/>
           </a:graphicData>
         </a:graphic>
       </p:graphicFrame>
@@ -6156,7 +6030,7 @@
           <a:bodyPr wrap="square" lIns="0" tIns="0" rIns="0" bIns="0" rtlCol="0" anchor="ctr"/>
           <a:lstStyle/>
           <a:p>
-            <a:pPr indent="0" marL="0">
+            <a:pPr marL="0" indent="0">
               <a:buNone/>
             </a:pPr>
             <a:r>
@@ -6195,7 +6069,7 @@
           <a:bodyPr wrap="square" lIns="0" tIns="0" rIns="0" bIns="0" rtlCol="0" anchor="ctr"/>
           <a:lstStyle/>
           <a:p>
-            <a:pPr indent="0" marL="0">
+            <a:pPr marL="0" indent="0">
               <a:lnSpc>
                 <a:spcPct val="120000"/>
               </a:lnSpc>
@@ -6237,6 +6111,13 @@
           </a:solidFill>
           <a:ln/>
         </p:spPr>
+        <p:txBody>
+          <a:bodyPr/>
+          <a:lstStyle/>
+          <a:p>
+            <a:endParaRPr lang="es-CO"/>
+          </a:p>
+        </p:txBody>
       </p:sp>
       <p:sp>
         <p:nvSpPr>
@@ -6259,7 +6140,7 @@
           <a:bodyPr wrap="square" lIns="0" tIns="0" rIns="0" bIns="0" rtlCol="0" anchor="t"/>
           <a:lstStyle/>
           <a:p>
-            <a:pPr indent="0" marL="0">
+            <a:pPr marL="0" indent="0">
               <a:lnSpc>
                 <a:spcPct val="120000"/>
               </a:lnSpc>
@@ -6280,7 +6161,7 @@
             <a:endParaRPr lang="en-US" sz="1150" dirty="0"/>
           </a:p>
           <a:p>
-            <a:pPr indent="0" marL="0">
+            <a:pPr marL="0" indent="0">
               <a:lnSpc>
                 <a:spcPct val="120000"/>
               </a:lnSpc>
@@ -6301,7 +6182,7 @@
             <a:endParaRPr lang="en-US" sz="1150" dirty="0"/>
           </a:p>
           <a:p>
-            <a:pPr indent="0" marL="0">
+            <a:pPr marL="0" indent="0">
               <a:lnSpc>
                 <a:spcPct val="120000"/>
               </a:lnSpc>
@@ -6318,12 +6199,6 @@
               </a:rPr>
               <a:t>Decisión: </a:t>
             </a:r>
-            <a:pPr indent="0" marL="0">
-              <a:lnSpc>
-                <a:spcPct val="120000"/>
-              </a:lnSpc>
-              <a:buNone/>
-            </a:pPr>
             <a:r>
               <a:rPr lang="en-US" sz="1150" dirty="0">
                 <a:solidFill>
@@ -6360,7 +6235,7 @@
           <a:bodyPr wrap="square" lIns="0" tIns="0" rIns="0" bIns="0" rtlCol="0" anchor="ctr"/>
           <a:lstStyle/>
           <a:p>
-            <a:pPr indent="0" marL="0">
+            <a:pPr marL="0" indent="0">
               <a:buNone/>
             </a:pPr>
             <a:r>
@@ -6399,7 +6274,7 @@
           <a:bodyPr wrap="square" lIns="0" tIns="0" rIns="0" bIns="0" rtlCol="0" anchor="ctr"/>
           <a:lstStyle/>
           <a:p>
-            <a:pPr algn="r" indent="0" marL="0">
+            <a:pPr marL="0" indent="0" algn="r">
               <a:buNone/>
             </a:pPr>
             <a:r>
@@ -6463,11 +6338,11 @@
           <a:bodyPr wrap="square" lIns="0" tIns="0" rIns="0" bIns="0" rtlCol="0" anchor="ctr"/>
           <a:lstStyle/>
           <a:p>
-            <a:pPr indent="0" marL="0">
-              <a:buNone/>
-            </a:pPr>
-            <a:r>
-              <a:rPr lang="en-US" sz="1300" b="1" spc="200" kern="0" dirty="0">
+            <a:pPr marL="0" indent="0">
+              <a:buNone/>
+            </a:pPr>
+            <a:r>
+              <a:rPr lang="en-US" sz="1300" b="1" kern="0" spc="200" dirty="0">
                 <a:solidFill>
                   <a:srgbClr val="B33A3A"/>
                 </a:solidFill>
@@ -6502,7 +6377,7 @@
           <a:bodyPr wrap="square" lIns="0" tIns="0" rIns="0" bIns="0" rtlCol="0" anchor="ctr"/>
           <a:lstStyle/>
           <a:p>
-            <a:pPr indent="0" marL="0">
+            <a:pPr marL="0" indent="0">
               <a:buNone/>
             </a:pPr>
             <a:r>
@@ -6522,7 +6397,7 @@
       </p:sp>
       <p:graphicFrame>
         <p:nvGraphicFramePr>
-          <p:cNvPr id="4" name="Chart 0" descr=""/>
+          <p:cNvPr id="4" name="Chart 0"/>
           <p:cNvGraphicFramePr/>
           <p:nvPr/>
         </p:nvGraphicFramePr>
@@ -6530,9 +6405,9 @@
           <a:off x="548640" y="1920240"/>
           <a:ext cx="5394960" cy="4114800"/>
         </p:xfrm>
-        <a:graphic xmlns:a="http://schemas.openxmlformats.org/drawingml/2006/main">
+        <a:graphic>
           <a:graphicData uri="http://schemas.openxmlformats.org/drawingml/2006/chart">
-            <c:chart xmlns:c="http://schemas.openxmlformats.org/drawingml/2006/chart" r:id="rId1"/>
+            <c:chart xmlns:c="http://schemas.openxmlformats.org/drawingml/2006/chart" xmlns:r="http://schemas.openxmlformats.org/officeDocument/2006/relationships" r:id="rId3"/>
           </a:graphicData>
         </a:graphic>
       </p:graphicFrame>
@@ -6557,6 +6432,13 @@
           </a:solidFill>
           <a:ln/>
         </p:spPr>
+        <p:txBody>
+          <a:bodyPr/>
+          <a:lstStyle/>
+          <a:p>
+            <a:endParaRPr lang="es-CO"/>
+          </a:p>
+        </p:txBody>
       </p:sp>
       <p:sp>
         <p:nvSpPr>
@@ -6579,7 +6461,7 @@
           <a:bodyPr wrap="square" lIns="0" tIns="0" rIns="0" bIns="0" rtlCol="0" anchor="t"/>
           <a:lstStyle/>
           <a:p>
-            <a:pPr indent="0" marL="0">
+            <a:pPr marL="0" indent="0">
               <a:lnSpc>
                 <a:spcPct val="120000"/>
               </a:lnSpc>
@@ -6597,7 +6479,7 @@
             <a:endParaRPr lang="en-US" sz="1500" dirty="0"/>
           </a:p>
           <a:p>
-            <a:pPr indent="0" marL="0">
+            <a:pPr marL="0" indent="0">
               <a:lnSpc>
                 <a:spcPct val="120000"/>
               </a:lnSpc>
@@ -6636,6 +6518,13 @@
           </a:solidFill>
           <a:ln/>
         </p:spPr>
+        <p:txBody>
+          <a:bodyPr/>
+          <a:lstStyle/>
+          <a:p>
+            <a:endParaRPr lang="es-CO"/>
+          </a:p>
+        </p:txBody>
       </p:sp>
       <p:sp>
         <p:nvSpPr>
@@ -6658,7 +6547,7 @@
           <a:bodyPr wrap="square" lIns="0" tIns="0" rIns="0" bIns="0" rtlCol="0" anchor="t"/>
           <a:lstStyle/>
           <a:p>
-            <a:pPr indent="0" marL="0">
+            <a:pPr marL="0" indent="0">
               <a:lnSpc>
                 <a:spcPct val="120000"/>
               </a:lnSpc>
@@ -6676,7 +6565,7 @@
             <a:endParaRPr lang="en-US" sz="1500" dirty="0"/>
           </a:p>
           <a:p>
-            <a:pPr indent="0" marL="0">
+            <a:pPr marL="0" indent="0">
               <a:lnSpc>
                 <a:spcPct val="120000"/>
               </a:lnSpc>
@@ -6715,7 +6604,7 @@
           <a:bodyPr wrap="square" lIns="0" tIns="0" rIns="0" bIns="0" rtlCol="0" anchor="ctr"/>
           <a:lstStyle/>
           <a:p>
-            <a:pPr indent="0" marL="0">
+            <a:pPr marL="0" indent="0">
               <a:buNone/>
             </a:pPr>
             <a:r>
@@ -6754,7 +6643,7 @@
           <a:bodyPr wrap="square" lIns="0" tIns="0" rIns="0" bIns="0" rtlCol="0" anchor="ctr"/>
           <a:lstStyle/>
           <a:p>
-            <a:pPr algn="r" indent="0" marL="0">
+            <a:pPr marL="0" indent="0" algn="r">
               <a:buNone/>
             </a:pPr>
             <a:r>
@@ -6818,11 +6707,11 @@
           <a:bodyPr wrap="square" lIns="0" tIns="0" rIns="0" bIns="0" rtlCol="0" anchor="ctr"/>
           <a:lstStyle/>
           <a:p>
-            <a:pPr indent="0" marL="0">
-              <a:buNone/>
-            </a:pPr>
-            <a:r>
-              <a:rPr lang="en-US" sz="1300" b="1" spc="200" kern="0" dirty="0">
+            <a:pPr marL="0" indent="0">
+              <a:buNone/>
+            </a:pPr>
+            <a:r>
+              <a:rPr lang="en-US" sz="1300" b="1" kern="0" spc="200" dirty="0">
                 <a:solidFill>
                   <a:srgbClr val="B33A3A"/>
                 </a:solidFill>
@@ -6857,7 +6746,7 @@
           <a:bodyPr wrap="square" lIns="0" tIns="0" rIns="0" bIns="0" rtlCol="0" anchor="ctr"/>
           <a:lstStyle/>
           <a:p>
-            <a:pPr indent="0" marL="0">
+            <a:pPr marL="0" indent="0">
               <a:buNone/>
             </a:pPr>
             <a:r>
@@ -6896,6 +6785,13 @@
           </a:solidFill>
           <a:ln/>
         </p:spPr>
+        <p:txBody>
+          <a:bodyPr/>
+          <a:lstStyle/>
+          <a:p>
+            <a:endParaRPr lang="es-CO"/>
+          </a:p>
+        </p:txBody>
       </p:sp>
       <p:sp>
         <p:nvSpPr>
@@ -6916,6 +6812,13 @@
           </a:solidFill>
           <a:ln/>
         </p:spPr>
+        <p:txBody>
+          <a:bodyPr/>
+          <a:lstStyle/>
+          <a:p>
+            <a:endParaRPr lang="es-CO"/>
+          </a:p>
+        </p:txBody>
       </p:sp>
       <p:sp>
         <p:nvSpPr>
@@ -6938,7 +6841,7 @@
           <a:bodyPr wrap="square" lIns="0" tIns="0" rIns="0" bIns="0" rtlCol="0" anchor="ctr"/>
           <a:lstStyle/>
           <a:p>
-            <a:pPr indent="0" marL="0">
+            <a:pPr marL="0" indent="0">
               <a:buNone/>
             </a:pPr>
             <a:r>
@@ -6977,7 +6880,7 @@
           <a:bodyPr wrap="square" lIns="0" tIns="0" rIns="0" bIns="0" rtlCol="0" anchor="ctr"/>
           <a:lstStyle/>
           <a:p>
-            <a:pPr indent="0" marL="0">
+            <a:pPr marL="0" indent="0">
               <a:lnSpc>
                 <a:spcPct val="115000"/>
               </a:lnSpc>
@@ -7019,6 +6922,13 @@
           </a:solidFill>
           <a:ln/>
         </p:spPr>
+        <p:txBody>
+          <a:bodyPr/>
+          <a:lstStyle/>
+          <a:p>
+            <a:endParaRPr lang="es-CO"/>
+          </a:p>
+        </p:txBody>
       </p:sp>
       <p:sp>
         <p:nvSpPr>
@@ -7039,6 +6949,13 @@
           </a:solidFill>
           <a:ln/>
         </p:spPr>
+        <p:txBody>
+          <a:bodyPr/>
+          <a:lstStyle/>
+          <a:p>
+            <a:endParaRPr lang="es-CO"/>
+          </a:p>
+        </p:txBody>
       </p:sp>
       <p:sp>
         <p:nvSpPr>
@@ -7061,7 +6978,7 @@
           <a:bodyPr wrap="square" lIns="0" tIns="0" rIns="0" bIns="0" rtlCol="0" anchor="ctr"/>
           <a:lstStyle/>
           <a:p>
-            <a:pPr indent="0" marL="0">
+            <a:pPr marL="0" indent="0">
               <a:buNone/>
             </a:pPr>
             <a:r>
@@ -7100,7 +7017,7 @@
           <a:bodyPr wrap="square" lIns="0" tIns="0" rIns="0" bIns="0" rtlCol="0" anchor="ctr"/>
           <a:lstStyle/>
           <a:p>
-            <a:pPr indent="0" marL="0">
+            <a:pPr marL="0" indent="0">
               <a:lnSpc>
                 <a:spcPct val="115000"/>
               </a:lnSpc>
@@ -7142,6 +7059,13 @@
           </a:solidFill>
           <a:ln/>
         </p:spPr>
+        <p:txBody>
+          <a:bodyPr/>
+          <a:lstStyle/>
+          <a:p>
+            <a:endParaRPr lang="es-CO"/>
+          </a:p>
+        </p:txBody>
       </p:sp>
       <p:sp>
         <p:nvSpPr>
@@ -7162,6 +7086,13 @@
           </a:solidFill>
           <a:ln/>
         </p:spPr>
+        <p:txBody>
+          <a:bodyPr/>
+          <a:lstStyle/>
+          <a:p>
+            <a:endParaRPr lang="es-CO"/>
+          </a:p>
+        </p:txBody>
       </p:sp>
       <p:sp>
         <p:nvSpPr>
@@ -7184,7 +7115,7 @@
           <a:bodyPr wrap="square" lIns="0" tIns="0" rIns="0" bIns="0" rtlCol="0" anchor="ctr"/>
           <a:lstStyle/>
           <a:p>
-            <a:pPr indent="0" marL="0">
+            <a:pPr marL="0" indent="0">
               <a:buNone/>
             </a:pPr>
             <a:r>
@@ -7223,7 +7154,7 @@
           <a:bodyPr wrap="square" lIns="0" tIns="0" rIns="0" bIns="0" rtlCol="0" anchor="ctr"/>
           <a:lstStyle/>
           <a:p>
-            <a:pPr indent="0" marL="0">
+            <a:pPr marL="0" indent="0">
               <a:lnSpc>
                 <a:spcPct val="115000"/>
               </a:lnSpc>
@@ -7265,6 +7196,13 @@
           </a:solidFill>
           <a:ln/>
         </p:spPr>
+        <p:txBody>
+          <a:bodyPr/>
+          <a:lstStyle/>
+          <a:p>
+            <a:endParaRPr lang="es-CO"/>
+          </a:p>
+        </p:txBody>
       </p:sp>
       <p:sp>
         <p:nvSpPr>
@@ -7285,6 +7223,13 @@
           </a:solidFill>
           <a:ln/>
         </p:spPr>
+        <p:txBody>
+          <a:bodyPr/>
+          <a:lstStyle/>
+          <a:p>
+            <a:endParaRPr lang="es-CO"/>
+          </a:p>
+        </p:txBody>
       </p:sp>
       <p:sp>
         <p:nvSpPr>
@@ -7307,7 +7252,7 @@
           <a:bodyPr wrap="square" lIns="0" tIns="0" rIns="0" bIns="0" rtlCol="0" anchor="ctr"/>
           <a:lstStyle/>
           <a:p>
-            <a:pPr indent="0" marL="0">
+            <a:pPr marL="0" indent="0">
               <a:buNone/>
             </a:pPr>
             <a:r>
@@ -7346,7 +7291,7 @@
           <a:bodyPr wrap="square" lIns="0" tIns="0" rIns="0" bIns="0" rtlCol="0" anchor="ctr"/>
           <a:lstStyle/>
           <a:p>
-            <a:pPr indent="0" marL="0">
+            <a:pPr marL="0" indent="0">
               <a:lnSpc>
                 <a:spcPct val="115000"/>
               </a:lnSpc>
@@ -7388,7 +7333,7 @@
           <a:bodyPr wrap="square" lIns="0" tIns="0" rIns="0" bIns="0" rtlCol="0" anchor="ctr"/>
           <a:lstStyle/>
           <a:p>
-            <a:pPr indent="0" marL="0">
+            <a:pPr marL="0" indent="0">
               <a:buNone/>
             </a:pPr>
             <a:r>
@@ -7427,7 +7372,7 @@
           <a:bodyPr wrap="square" lIns="0" tIns="0" rIns="0" bIns="0" rtlCol="0" anchor="ctr"/>
           <a:lstStyle/>
           <a:p>
-            <a:pPr algn="r" indent="0" marL="0">
+            <a:pPr marL="0" indent="0" algn="r">
               <a:buNone/>
             </a:pPr>
             <a:r>
@@ -7491,11 +7436,11 @@
           <a:bodyPr wrap="square" lIns="0" tIns="0" rIns="0" bIns="0" rtlCol="0" anchor="ctr"/>
           <a:lstStyle/>
           <a:p>
-            <a:pPr indent="0" marL="0">
-              <a:buNone/>
-            </a:pPr>
-            <a:r>
-              <a:rPr lang="en-US" sz="1300" b="1" spc="200" kern="0" dirty="0">
+            <a:pPr marL="0" indent="0">
+              <a:buNone/>
+            </a:pPr>
+            <a:r>
+              <a:rPr lang="en-US" sz="1300" b="1" kern="0" spc="200" dirty="0">
                 <a:solidFill>
                   <a:srgbClr val="B33A3A"/>
                 </a:solidFill>
@@ -7530,7 +7475,7 @@
           <a:bodyPr wrap="square" lIns="0" tIns="0" rIns="0" bIns="0" rtlCol="0" anchor="ctr"/>
           <a:lstStyle/>
           <a:p>
-            <a:pPr indent="0" marL="0">
+            <a:pPr marL="0" indent="0">
               <a:buNone/>
             </a:pPr>
             <a:r>
@@ -7569,6 +7514,13 @@
           </a:solidFill>
           <a:ln/>
         </p:spPr>
+        <p:txBody>
+          <a:bodyPr/>
+          <a:lstStyle/>
+          <a:p>
+            <a:endParaRPr lang="es-CO"/>
+          </a:p>
+        </p:txBody>
       </p:sp>
       <p:sp>
         <p:nvSpPr>
@@ -7589,6 +7541,13 @@
           </a:solidFill>
           <a:ln/>
         </p:spPr>
+        <p:txBody>
+          <a:bodyPr/>
+          <a:lstStyle/>
+          <a:p>
+            <a:endParaRPr lang="es-CO"/>
+          </a:p>
+        </p:txBody>
       </p:sp>
       <p:sp>
         <p:nvSpPr>
@@ -7611,7 +7570,7 @@
           <a:bodyPr wrap="square" lIns="0" tIns="0" rIns="0" bIns="0" rtlCol="0" anchor="ctr"/>
           <a:lstStyle/>
           <a:p>
-            <a:pPr algn="ctr" indent="0" marL="0">
+            <a:pPr marL="0" indent="0" algn="ctr">
               <a:buNone/>
             </a:pPr>
             <a:r>
@@ -7650,7 +7609,7 @@
           <a:bodyPr wrap="square" lIns="0" tIns="0" rIns="0" bIns="0" rtlCol="0" anchor="ctr"/>
           <a:lstStyle/>
           <a:p>
-            <a:pPr indent="0" marL="0">
+            <a:pPr marL="0" indent="0">
               <a:buNone/>
             </a:pPr>
             <a:r>
@@ -7689,7 +7648,7 @@
           <a:bodyPr wrap="square" lIns="0" tIns="0" rIns="0" bIns="0" rtlCol="0" anchor="t"/>
           <a:lstStyle/>
           <a:p>
-            <a:pPr indent="0" marL="0">
+            <a:pPr marL="0" indent="0">
               <a:lnSpc>
                 <a:spcPct val="125000"/>
               </a:lnSpc>
@@ -7731,10 +7690,17 @@
           </a:solidFill>
           <a:ln/>
         </p:spPr>
-      </p:sp>
-      <p:sp>
-        <p:nvSpPr>
-          <p:cNvPr id="10" name="Shape 8"/>
+        <p:txBody>
+          <a:bodyPr/>
+          <a:lstStyle/>
+          <a:p>
+            <a:endParaRPr lang="es-CO"/>
+          </a:p>
+        </p:txBody>
+      </p:sp>
+      <p:sp>
+        <p:nvSpPr>
+          <p:cNvPr id="11" name="Text 9"/>
           <p:cNvSpPr/>
           <p:nvPr/>
         </p:nvSpPr>
@@ -7743,37 +7709,17 @@
             <a:off x="4663440" y="2286000"/>
             <a:ext cx="548640" cy="548640"/>
           </a:xfrm>
-          <a:prstGeom prst="ellipse">
-            <a:avLst/>
-          </a:prstGeom>
-          <a:solidFill>
-            <a:srgbClr val="1E2761"/>
-          </a:solidFill>
-          <a:ln/>
-        </p:spPr>
-      </p:sp>
-      <p:sp>
-        <p:nvSpPr>
-          <p:cNvPr id="11" name="Text 9"/>
-          <p:cNvSpPr/>
-          <p:nvPr/>
-        </p:nvSpPr>
-        <p:spPr>
-          <a:xfrm>
-            <a:off x="4663440" y="2286000"/>
-            <a:ext cx="548640" cy="548640"/>
-          </a:xfrm>
-          <a:prstGeom prst="rect">
-            <a:avLst/>
-          </a:prstGeom>
-          <a:noFill/>
-          <a:ln/>
-        </p:spPr>
-        <p:txBody>
-          <a:bodyPr wrap="square" lIns="0" tIns="0" rIns="0" bIns="0" rtlCol="0" anchor="ctr"/>
-          <a:lstStyle/>
-          <a:p>
-            <a:pPr algn="ctr" indent="0" marL="0">
+          <a:prstGeom prst="rect">
+            <a:avLst/>
+          </a:prstGeom>
+          <a:noFill/>
+          <a:ln/>
+        </p:spPr>
+        <p:txBody>
+          <a:bodyPr wrap="square" lIns="0" tIns="0" rIns="0" bIns="0" rtlCol="0" anchor="ctr"/>
+          <a:lstStyle/>
+          <a:p>
+            <a:pPr marL="0" indent="0" algn="ctr">
               <a:buNone/>
             </a:pPr>
             <a:r>
@@ -7788,87 +7734,6 @@
               <a:t>2</a:t>
             </a:r>
             <a:endParaRPr lang="en-US" sz="2000" dirty="0"/>
-          </a:p>
-        </p:txBody>
-      </p:sp>
-      <p:sp>
-        <p:nvSpPr>
-          <p:cNvPr id="12" name="Text 10"/>
-          <p:cNvSpPr/>
-          <p:nvPr/>
-        </p:nvSpPr>
-        <p:spPr>
-          <a:xfrm>
-            <a:off x="4663440" y="3063240"/>
-            <a:ext cx="2926080" cy="640080"/>
-          </a:xfrm>
-          <a:prstGeom prst="rect">
-            <a:avLst/>
-          </a:prstGeom>
-          <a:noFill/>
-          <a:ln/>
-        </p:spPr>
-        <p:txBody>
-          <a:bodyPr wrap="square" lIns="0" tIns="0" rIns="0" bIns="0" rtlCol="0" anchor="ctr"/>
-          <a:lstStyle/>
-          <a:p>
-            <a:pPr indent="0" marL="0">
-              <a:buNone/>
-            </a:pPr>
-            <a:r>
-              <a:rPr lang="en-US" sz="1800" b="1" dirty="0">
-                <a:solidFill>
-                  <a:srgbClr val="1E2761"/>
-                </a:solidFill>
-                <a:latin typeface="Cambria" pitchFamily="34" charset="0"/>
-                <a:ea typeface="Cambria" pitchFamily="34" charset="-122"/>
-                <a:cs typeface="Cambria" pitchFamily="34" charset="-120"/>
-              </a:rPr>
-              <a:t>Auditoría de origen</a:t>
-            </a:r>
-            <a:endParaRPr lang="en-US" sz="1800" dirty="0"/>
-          </a:p>
-        </p:txBody>
-      </p:sp>
-      <p:sp>
-        <p:nvSpPr>
-          <p:cNvPr id="13" name="Text 11"/>
-          <p:cNvSpPr/>
-          <p:nvPr/>
-        </p:nvSpPr>
-        <p:spPr>
-          <a:xfrm>
-            <a:off x="4663440" y="3794760"/>
-            <a:ext cx="2926080" cy="2011680"/>
-          </a:xfrm>
-          <a:prstGeom prst="rect">
-            <a:avLst/>
-          </a:prstGeom>
-          <a:noFill/>
-          <a:ln/>
-        </p:spPr>
-        <p:txBody>
-          <a:bodyPr wrap="square" lIns="0" tIns="0" rIns="0" bIns="0" rtlCol="0" anchor="t"/>
-          <a:lstStyle/>
-          <a:p>
-            <a:pPr indent="0" marL="0">
-              <a:lnSpc>
-                <a:spcPct val="125000"/>
-              </a:lnSpc>
-              <a:buNone/>
-            </a:pPr>
-            <a:r>
-              <a:rPr lang="en-US" sz="1300" dirty="0">
-                <a:solidFill>
-                  <a:srgbClr val="5A5F73"/>
-                </a:solidFill>
-                <a:latin typeface="Calibri" pitchFamily="34" charset="0"/>
-                <a:ea typeface="Calibri" pitchFamily="34" charset="-122"/>
-                <a:cs typeface="Calibri" pitchFamily="34" charset="-120"/>
-              </a:rPr>
-              <a:t>Corregir en la fuente los errores de captura (edades, salarios, categorías) que hoy se corrigen en el análisis.</a:t>
-            </a:r>
-            <a:endParaRPr lang="en-US" sz="1300" dirty="0"/>
           </a:p>
         </p:txBody>
       </p:sp>
@@ -7893,6 +7758,13 @@
           </a:solidFill>
           <a:ln/>
         </p:spPr>
+        <p:txBody>
+          <a:bodyPr/>
+          <a:lstStyle/>
+          <a:p>
+            <a:endParaRPr lang="es-CO"/>
+          </a:p>
+        </p:txBody>
       </p:sp>
       <p:sp>
         <p:nvSpPr>
@@ -7913,6 +7785,13 @@
           </a:solidFill>
           <a:ln/>
         </p:spPr>
+        <p:txBody>
+          <a:bodyPr/>
+          <a:lstStyle/>
+          <a:p>
+            <a:endParaRPr lang="es-CO"/>
+          </a:p>
+        </p:txBody>
       </p:sp>
       <p:sp>
         <p:nvSpPr>
@@ -7935,7 +7814,7 @@
           <a:bodyPr wrap="square" lIns="0" tIns="0" rIns="0" bIns="0" rtlCol="0" anchor="ctr"/>
           <a:lstStyle/>
           <a:p>
-            <a:pPr algn="ctr" indent="0" marL="0">
+            <a:pPr marL="0" indent="0" algn="ctr">
               <a:buNone/>
             </a:pPr>
             <a:r>
@@ -7974,7 +7853,7 @@
           <a:bodyPr wrap="square" lIns="0" tIns="0" rIns="0" bIns="0" rtlCol="0" anchor="ctr"/>
           <a:lstStyle/>
           <a:p>
-            <a:pPr indent="0" marL="0">
+            <a:pPr marL="0" indent="0">
               <a:buNone/>
             </a:pPr>
             <a:r>
@@ -8013,7 +7892,7 @@
           <a:bodyPr wrap="square" lIns="0" tIns="0" rIns="0" bIns="0" rtlCol="0" anchor="t"/>
           <a:lstStyle/>
           <a:p>
-            <a:pPr indent="0" marL="0">
+            <a:pPr marL="0" indent="0">
               <a:lnSpc>
                 <a:spcPct val="125000"/>
               </a:lnSpc>
@@ -8055,7 +7934,7 @@
           <a:bodyPr wrap="square" lIns="0" tIns="0" rIns="0" bIns="0" rtlCol="0" anchor="ctr"/>
           <a:lstStyle/>
           <a:p>
-            <a:pPr indent="0" marL="0">
+            <a:pPr marL="0" indent="0">
               <a:buNone/>
             </a:pPr>
             <a:r>
@@ -8094,7 +7973,7 @@
           <a:bodyPr wrap="square" lIns="0" tIns="0" rIns="0" bIns="0" rtlCol="0" anchor="ctr"/>
           <a:lstStyle/>
           <a:p>
-            <a:pPr algn="r" indent="0" marL="0">
+            <a:pPr marL="0" indent="0" algn="r">
               <a:buNone/>
             </a:pPr>
             <a:r>
@@ -8158,11 +8037,11 @@
           <a:bodyPr wrap="square" lIns="0" tIns="0" rIns="0" bIns="0" rtlCol="0" anchor="ctr"/>
           <a:lstStyle/>
           <a:p>
-            <a:pPr indent="0" marL="0">
-              <a:buNone/>
-            </a:pPr>
-            <a:r>
-              <a:rPr lang="en-US" sz="1300" b="1" spc="200" kern="0" dirty="0">
+            <a:pPr marL="0" indent="0">
+              <a:buNone/>
+            </a:pPr>
+            <a:r>
+              <a:rPr lang="en-US" sz="1300" b="1" kern="0" spc="200" dirty="0">
                 <a:solidFill>
                   <a:srgbClr val="B33A3A"/>
                 </a:solidFill>
@@ -8197,7 +8076,7 @@
           <a:bodyPr wrap="square" lIns="0" tIns="0" rIns="0" bIns="0" rtlCol="0" anchor="ctr"/>
           <a:lstStyle/>
           <a:p>
-            <a:pPr indent="0" marL="0">
+            <a:pPr marL="0" indent="0">
               <a:buNone/>
             </a:pPr>
             <a:r>
@@ -8207,9 +8086,38 @@
                 </a:solidFill>
                 <a:latin typeface="Cambria" pitchFamily="34" charset="0"/>
                 <a:ea typeface="Cambria" pitchFamily="34" charset="-122"/>
-                <a:cs typeface="Cambria" pitchFamily="34" charset="-120"/>
-              </a:rPr>
-              <a:t>Un pipeline, cinco fases, un semestre</a:t>
+              </a:rPr>
+              <a:t>Proyecto </a:t>
+            </a:r>
+            <a:r>
+              <a:rPr lang="en-US" sz="3000" b="1" dirty="0" err="1">
+                <a:solidFill>
+                  <a:srgbClr val="1E2761"/>
+                </a:solidFill>
+                <a:latin typeface="Cambria" pitchFamily="34" charset="0"/>
+                <a:ea typeface="Cambria" pitchFamily="34" charset="-122"/>
+              </a:rPr>
+              <a:t>durante</a:t>
+            </a:r>
+            <a:r>
+              <a:rPr lang="en-US" sz="3000" b="1" dirty="0">
+                <a:solidFill>
+                  <a:srgbClr val="1E2761"/>
+                </a:solidFill>
+                <a:latin typeface="Cambria" pitchFamily="34" charset="0"/>
+                <a:ea typeface="Cambria" pitchFamily="34" charset="-122"/>
+              </a:rPr>
+              <a:t> el </a:t>
+            </a:r>
+            <a:r>
+              <a:rPr lang="en-US" sz="3000" b="1" dirty="0" err="1">
+                <a:solidFill>
+                  <a:srgbClr val="1E2761"/>
+                </a:solidFill>
+                <a:latin typeface="Cambria" pitchFamily="34" charset="0"/>
+                <a:ea typeface="Cambria" pitchFamily="34" charset="-122"/>
+              </a:rPr>
+              <a:t>semestre</a:t>
             </a:r>
             <a:endParaRPr lang="en-US" sz="3000" dirty="0"/>
           </a:p>
@@ -8234,6 +8142,13 @@
           </a:solidFill>
           <a:ln/>
         </p:spPr>
+        <p:txBody>
+          <a:bodyPr/>
+          <a:lstStyle/>
+          <a:p>
+            <a:endParaRPr lang="es-CO"/>
+          </a:p>
+        </p:txBody>
       </p:sp>
       <p:sp>
         <p:nvSpPr>
@@ -8256,7 +8171,7 @@
           <a:bodyPr wrap="square" lIns="0" tIns="0" rIns="0" bIns="0" rtlCol="0" anchor="ctr"/>
           <a:lstStyle/>
           <a:p>
-            <a:pPr algn="ctr" indent="0" marL="0">
+            <a:pPr marL="0" indent="0" algn="ctr">
               <a:buNone/>
             </a:pPr>
             <a:r>
@@ -8295,7 +8210,7 @@
           <a:bodyPr wrap="square" lIns="0" tIns="0" rIns="0" bIns="0" rtlCol="0" anchor="t"/>
           <a:lstStyle/>
           <a:p>
-            <a:pPr indent="0" marL="0">
+            <a:pPr marL="0" indent="0">
               <a:buNone/>
             </a:pPr>
             <a:r>
@@ -8334,7 +8249,7 @@
           <a:bodyPr wrap="square" lIns="0" tIns="0" rIns="0" bIns="0" rtlCol="0" anchor="t"/>
           <a:lstStyle/>
           <a:p>
-            <a:pPr indent="0" marL="0">
+            <a:pPr marL="0" indent="0">
               <a:lnSpc>
                 <a:spcPct val="115000"/>
               </a:lnSpc>
@@ -8376,7 +8291,7 @@
           <a:bodyPr wrap="square" lIns="0" tIns="0" rIns="0" bIns="0" rtlCol="0" anchor="ctr"/>
           <a:lstStyle/>
           <a:p>
-            <a:pPr indent="0" marL="0">
+            <a:pPr marL="0" indent="0">
               <a:buNone/>
             </a:pPr>
             <a:r>
@@ -8416,6 +8331,13 @@
             <a:prstDash val="solid"/>
           </a:ln>
         </p:spPr>
+        <p:txBody>
+          <a:bodyPr/>
+          <a:lstStyle/>
+          <a:p>
+            <a:endParaRPr lang="es-CO"/>
+          </a:p>
+        </p:txBody>
       </p:sp>
       <p:sp>
         <p:nvSpPr>
@@ -8436,6 +8358,13 @@
           </a:solidFill>
           <a:ln/>
         </p:spPr>
+        <p:txBody>
+          <a:bodyPr/>
+          <a:lstStyle/>
+          <a:p>
+            <a:endParaRPr lang="es-CO"/>
+          </a:p>
+        </p:txBody>
       </p:sp>
       <p:sp>
         <p:nvSpPr>
@@ -8458,7 +8387,7 @@
           <a:bodyPr wrap="square" lIns="0" tIns="0" rIns="0" bIns="0" rtlCol="0" anchor="ctr"/>
           <a:lstStyle/>
           <a:p>
-            <a:pPr algn="ctr" indent="0" marL="0">
+            <a:pPr marL="0" indent="0" algn="ctr">
               <a:buNone/>
             </a:pPr>
             <a:r>
@@ -8497,7 +8426,7 @@
           <a:bodyPr wrap="square" lIns="0" tIns="0" rIns="0" bIns="0" rtlCol="0" anchor="t"/>
           <a:lstStyle/>
           <a:p>
-            <a:pPr indent="0" marL="0">
+            <a:pPr marL="0" indent="0">
               <a:buNone/>
             </a:pPr>
             <a:r>
@@ -8536,7 +8465,7 @@
           <a:bodyPr wrap="square" lIns="0" tIns="0" rIns="0" bIns="0" rtlCol="0" anchor="t"/>
           <a:lstStyle/>
           <a:p>
-            <a:pPr indent="0" marL="0">
+            <a:pPr marL="0" indent="0">
               <a:lnSpc>
                 <a:spcPct val="115000"/>
               </a:lnSpc>
@@ -8578,7 +8507,7 @@
           <a:bodyPr wrap="square" lIns="0" tIns="0" rIns="0" bIns="0" rtlCol="0" anchor="ctr"/>
           <a:lstStyle/>
           <a:p>
-            <a:pPr indent="0" marL="0">
+            <a:pPr marL="0" indent="0">
               <a:buNone/>
             </a:pPr>
             <a:r>
@@ -8618,6 +8547,13 @@
             <a:prstDash val="solid"/>
           </a:ln>
         </p:spPr>
+        <p:txBody>
+          <a:bodyPr/>
+          <a:lstStyle/>
+          <a:p>
+            <a:endParaRPr lang="es-CO"/>
+          </a:p>
+        </p:txBody>
       </p:sp>
       <p:sp>
         <p:nvSpPr>
@@ -8638,6 +8574,13 @@
           </a:solidFill>
           <a:ln/>
         </p:spPr>
+        <p:txBody>
+          <a:bodyPr/>
+          <a:lstStyle/>
+          <a:p>
+            <a:endParaRPr lang="es-CO"/>
+          </a:p>
+        </p:txBody>
       </p:sp>
       <p:sp>
         <p:nvSpPr>
@@ -8660,7 +8603,7 @@
           <a:bodyPr wrap="square" lIns="0" tIns="0" rIns="0" bIns="0" rtlCol="0" anchor="ctr"/>
           <a:lstStyle/>
           <a:p>
-            <a:pPr algn="ctr" indent="0" marL="0">
+            <a:pPr marL="0" indent="0" algn="ctr">
               <a:buNone/>
             </a:pPr>
             <a:r>
@@ -8699,7 +8642,7 @@
           <a:bodyPr wrap="square" lIns="0" tIns="0" rIns="0" bIns="0" rtlCol="0" anchor="t"/>
           <a:lstStyle/>
           <a:p>
-            <a:pPr indent="0" marL="0">
+            <a:pPr marL="0" indent="0">
               <a:buNone/>
             </a:pPr>
             <a:r>
@@ -8738,7 +8681,7 @@
           <a:bodyPr wrap="square" lIns="0" tIns="0" rIns="0" bIns="0" rtlCol="0" anchor="t"/>
           <a:lstStyle/>
           <a:p>
-            <a:pPr indent="0" marL="0">
+            <a:pPr marL="0" indent="0">
               <a:lnSpc>
                 <a:spcPct val="115000"/>
               </a:lnSpc>
@@ -8780,7 +8723,7 @@
           <a:bodyPr wrap="square" lIns="0" tIns="0" rIns="0" bIns="0" rtlCol="0" anchor="ctr"/>
           <a:lstStyle/>
           <a:p>
-            <a:pPr indent="0" marL="0">
+            <a:pPr marL="0" indent="0">
               <a:buNone/>
             </a:pPr>
             <a:r>
@@ -8820,6 +8763,13 @@
             <a:prstDash val="solid"/>
           </a:ln>
         </p:spPr>
+        <p:txBody>
+          <a:bodyPr/>
+          <a:lstStyle/>
+          <a:p>
+            <a:endParaRPr lang="es-CO"/>
+          </a:p>
+        </p:txBody>
       </p:sp>
       <p:sp>
         <p:nvSpPr>
@@ -8840,6 +8790,13 @@
           </a:solidFill>
           <a:ln/>
         </p:spPr>
+        <p:txBody>
+          <a:bodyPr/>
+          <a:lstStyle/>
+          <a:p>
+            <a:endParaRPr lang="es-CO"/>
+          </a:p>
+        </p:txBody>
       </p:sp>
       <p:sp>
         <p:nvSpPr>
@@ -8862,7 +8819,7 @@
           <a:bodyPr wrap="square" lIns="0" tIns="0" rIns="0" bIns="0" rtlCol="0" anchor="ctr"/>
           <a:lstStyle/>
           <a:p>
-            <a:pPr algn="ctr" indent="0" marL="0">
+            <a:pPr marL="0" indent="0" algn="ctr">
               <a:buNone/>
             </a:pPr>
             <a:r>
@@ -8901,7 +8858,7 @@
           <a:bodyPr wrap="square" lIns="0" tIns="0" rIns="0" bIns="0" rtlCol="0" anchor="t"/>
           <a:lstStyle/>
           <a:p>
-            <a:pPr indent="0" marL="0">
+            <a:pPr marL="0" indent="0">
               <a:buNone/>
             </a:pPr>
             <a:r>
@@ -8940,7 +8897,7 @@
           <a:bodyPr wrap="square" lIns="0" tIns="0" rIns="0" bIns="0" rtlCol="0" anchor="t"/>
           <a:lstStyle/>
           <a:p>
-            <a:pPr indent="0" marL="0">
+            <a:pPr marL="0" indent="0">
               <a:lnSpc>
                 <a:spcPct val="115000"/>
               </a:lnSpc>
@@ -8982,7 +8939,7 @@
           <a:bodyPr wrap="square" lIns="0" tIns="0" rIns="0" bIns="0" rtlCol="0" anchor="ctr"/>
           <a:lstStyle/>
           <a:p>
-            <a:pPr indent="0" marL="0">
+            <a:pPr marL="0" indent="0">
               <a:buNone/>
             </a:pPr>
             <a:r>
@@ -9022,6 +8979,13 @@
             <a:prstDash val="solid"/>
           </a:ln>
         </p:spPr>
+        <p:txBody>
+          <a:bodyPr/>
+          <a:lstStyle/>
+          <a:p>
+            <a:endParaRPr lang="es-CO"/>
+          </a:p>
+        </p:txBody>
       </p:sp>
       <p:sp>
         <p:nvSpPr>
@@ -9042,6 +9006,13 @@
           </a:solidFill>
           <a:ln/>
         </p:spPr>
+        <p:txBody>
+          <a:bodyPr/>
+          <a:lstStyle/>
+          <a:p>
+            <a:endParaRPr lang="es-CO"/>
+          </a:p>
+        </p:txBody>
       </p:sp>
       <p:sp>
         <p:nvSpPr>
@@ -9064,7 +9035,7 @@
           <a:bodyPr wrap="square" lIns="0" tIns="0" rIns="0" bIns="0" rtlCol="0" anchor="ctr"/>
           <a:lstStyle/>
           <a:p>
-            <a:pPr algn="ctr" indent="0" marL="0">
+            <a:pPr marL="0" indent="0" algn="ctr">
               <a:buNone/>
             </a:pPr>
             <a:r>
@@ -9103,7 +9074,7 @@
           <a:bodyPr wrap="square" lIns="0" tIns="0" rIns="0" bIns="0" rtlCol="0" anchor="t"/>
           <a:lstStyle/>
           <a:p>
-            <a:pPr indent="0" marL="0">
+            <a:pPr marL="0" indent="0">
               <a:buNone/>
             </a:pPr>
             <a:r>
@@ -9142,7 +9113,7 @@
           <a:bodyPr wrap="square" lIns="0" tIns="0" rIns="0" bIns="0" rtlCol="0" anchor="t"/>
           <a:lstStyle/>
           <a:p>
-            <a:pPr indent="0" marL="0">
+            <a:pPr marL="0" indent="0">
               <a:lnSpc>
                 <a:spcPct val="115000"/>
               </a:lnSpc>
@@ -9184,7 +9155,7 @@
           <a:bodyPr wrap="square" lIns="0" tIns="0" rIns="0" bIns="0" rtlCol="0" anchor="ctr"/>
           <a:lstStyle/>
           <a:p>
-            <a:pPr indent="0" marL="0">
+            <a:pPr marL="0" indent="0">
               <a:buNone/>
             </a:pPr>
             <a:r>
@@ -9204,45 +9175,6 @@
       </p:sp>
       <p:sp>
         <p:nvSpPr>
-          <p:cNvPr id="33" name="Text 31"/>
-          <p:cNvSpPr/>
-          <p:nvPr/>
-        </p:nvSpPr>
-        <p:spPr>
-          <a:xfrm>
-            <a:off x="548640" y="5349240"/>
-            <a:ext cx="11064240" cy="457200"/>
-          </a:xfrm>
-          <a:prstGeom prst="rect">
-            <a:avLst/>
-          </a:prstGeom>
-          <a:noFill/>
-          <a:ln/>
-        </p:spPr>
-        <p:txBody>
-          <a:bodyPr wrap="square" lIns="0" tIns="0" rIns="0" bIns="0" rtlCol="0" anchor="ctr"/>
-          <a:lstStyle/>
-          <a:p>
-            <a:pPr indent="0" marL="0">
-              <a:buNone/>
-            </a:pPr>
-            <a:r>
-              <a:rPr lang="en-US" sz="1250" i="1" dirty="0">
-                <a:solidFill>
-                  <a:srgbClr val="B33A3A"/>
-                </a:solidFill>
-                <a:latin typeface="Calibri" pitchFamily="34" charset="0"/>
-                <a:ea typeface="Calibri" pitchFamily="34" charset="-122"/>
-                <a:cs typeface="Calibri" pitchFamily="34" charset="-120"/>
-              </a:rPr>
-              <a:t>Hoy completamos la fase 1 — la base sobre la que se construye todo lo demás</a:t>
-            </a:r>
-            <a:endParaRPr lang="en-US" sz="1250" dirty="0"/>
-          </a:p>
-        </p:txBody>
-      </p:sp>
-      <p:sp>
-        <p:nvSpPr>
           <p:cNvPr id="34" name="Text 32"/>
           <p:cNvSpPr/>
           <p:nvPr/>
@@ -9262,7 +9194,7 @@
           <a:bodyPr wrap="square" lIns="0" tIns="0" rIns="0" bIns="0" rtlCol="0" anchor="ctr"/>
           <a:lstStyle/>
           <a:p>
-            <a:pPr indent="0" marL="0">
+            <a:pPr marL="0" indent="0">
               <a:buNone/>
             </a:pPr>
             <a:r>
@@ -9301,7 +9233,7 @@
           <a:bodyPr wrap="square" lIns="0" tIns="0" rIns="0" bIns="0" rtlCol="0" anchor="ctr"/>
           <a:lstStyle/>
           <a:p>
-            <a:pPr algn="r" indent="0" marL="0">
+            <a:pPr marL="0" indent="0" algn="r">
               <a:buNone/>
             </a:pPr>
             <a:r>
@@ -9335,6 +9267,7 @@
         <a:solidFill>
           <a:srgbClr val="1E2761"/>
         </a:solidFill>
+        <a:effectLst/>
       </p:bgPr>
     </p:bg>
     <p:spTree>
@@ -9372,7 +9305,7 @@
           <a:bodyPr wrap="square" lIns="0" tIns="0" rIns="0" bIns="0" rtlCol="0" anchor="ctr"/>
           <a:lstStyle/>
           <a:p>
-            <a:pPr indent="0" marL="0">
+            <a:pPr marL="0" indent="0">
               <a:buNone/>
             </a:pPr>
             <a:r>
@@ -9411,7 +9344,7 @@
           <a:bodyPr wrap="square" lIns="0" tIns="0" rIns="0" bIns="0" rtlCol="0" anchor="ctr"/>
           <a:lstStyle/>
           <a:p>
-            <a:pPr indent="0" marL="0">
+            <a:pPr marL="0" indent="0">
               <a:buNone/>
             </a:pPr>
             <a:r>
@@ -9451,6 +9384,13 @@
             <a:prstDash val="solid"/>
           </a:ln>
         </p:spPr>
+        <p:txBody>
+          <a:bodyPr/>
+          <a:lstStyle/>
+          <a:p>
+            <a:endParaRPr lang="es-CO"/>
+          </a:p>
+        </p:txBody>
       </p:sp>
       <p:sp>
         <p:nvSpPr>
@@ -9473,7 +9413,7 @@
           <a:bodyPr wrap="square" lIns="0" tIns="0" rIns="0" bIns="0" rtlCol="0" anchor="ctr"/>
           <a:lstStyle/>
           <a:p>
-            <a:pPr indent="0" marL="0">
+            <a:pPr marL="0" indent="0">
               <a:buNone/>
             </a:pPr>
             <a:r>
@@ -9518,45 +9458,6 @@
       </p:grpSpPr>
       <p:sp>
         <p:nvSpPr>
-          <p:cNvPr id="2" name="Text 0"/>
-          <p:cNvSpPr/>
-          <p:nvPr/>
-        </p:nvSpPr>
-        <p:spPr>
-          <a:xfrm>
-            <a:off x="548640" y="411480"/>
-            <a:ext cx="9144000" cy="320040"/>
-          </a:xfrm>
-          <a:prstGeom prst="rect">
-            <a:avLst/>
-          </a:prstGeom>
-          <a:noFill/>
-          <a:ln/>
-        </p:spPr>
-        <p:txBody>
-          <a:bodyPr wrap="square" lIns="0" tIns="0" rIns="0" bIns="0" rtlCol="0" anchor="ctr"/>
-          <a:lstStyle/>
-          <a:p>
-            <a:pPr indent="0" marL="0">
-              <a:buNone/>
-            </a:pPr>
-            <a:r>
-              <a:rPr lang="en-US" sz="1300" b="1" spc="200" kern="0" dirty="0">
-                <a:solidFill>
-                  <a:srgbClr val="B33A3A"/>
-                </a:solidFill>
-                <a:latin typeface="Calibri" pitchFamily="34" charset="0"/>
-                <a:ea typeface="Calibri" pitchFamily="34" charset="-122"/>
-                <a:cs typeface="Calibri" pitchFamily="34" charset="-120"/>
-              </a:rPr>
-              <a:t>EN UNA VISTA</a:t>
-            </a:r>
-            <a:endParaRPr lang="en-US" sz="1300" dirty="0"/>
-          </a:p>
-        </p:txBody>
-      </p:sp>
-      <p:sp>
-        <p:nvSpPr>
           <p:cNvPr id="3" name="Text 1"/>
           <p:cNvSpPr/>
           <p:nvPr/>
@@ -9576,11 +9477,11 @@
           <a:bodyPr wrap="square" lIns="0" tIns="0" rIns="0" bIns="0" rtlCol="0" anchor="ctr"/>
           <a:lstStyle/>
           <a:p>
-            <a:pPr indent="0" marL="0">
-              <a:buNone/>
-            </a:pPr>
-            <a:r>
-              <a:rPr lang="en-US" sz="3000" b="1" dirty="0">
+            <a:pPr marL="0" indent="0">
+              <a:buNone/>
+            </a:pPr>
+            <a:r>
+              <a:rPr lang="en-US" sz="3000" b="1" dirty="0" err="1">
                 <a:solidFill>
                   <a:srgbClr val="1E2761"/>
                 </a:solidFill>
@@ -9588,7 +9489,29 @@
                 <a:ea typeface="Cambria" pitchFamily="34" charset="-122"/>
                 <a:cs typeface="Cambria" pitchFamily="34" charset="-120"/>
               </a:rPr>
-              <a:t>Resumen ejecutivo</a:t>
+              <a:t>Resumen</a:t>
+            </a:r>
+            <a:r>
+              <a:rPr lang="en-US" sz="3000" b="1" dirty="0">
+                <a:solidFill>
+                  <a:srgbClr val="1E2761"/>
+                </a:solidFill>
+                <a:latin typeface="Cambria" pitchFamily="34" charset="0"/>
+                <a:ea typeface="Cambria" pitchFamily="34" charset="-122"/>
+                <a:cs typeface="Cambria" pitchFamily="34" charset="-120"/>
+              </a:rPr>
+              <a:t> </a:t>
+            </a:r>
+            <a:r>
+              <a:rPr lang="en-US" sz="3000" b="1" dirty="0" err="1">
+                <a:solidFill>
+                  <a:srgbClr val="1E2761"/>
+                </a:solidFill>
+                <a:latin typeface="Cambria" pitchFamily="34" charset="0"/>
+                <a:ea typeface="Cambria" pitchFamily="34" charset="-122"/>
+                <a:cs typeface="Cambria" pitchFamily="34" charset="-120"/>
+              </a:rPr>
+              <a:t>Obtenido</a:t>
             </a:r>
             <a:endParaRPr lang="en-US" sz="3000" dirty="0"/>
           </a:p>
@@ -9615,13 +9538,20 @@
           </a:solidFill>
           <a:ln/>
           <a:effectLst>
-            <a:outerShdw sx="100000" sy="100000" kx="0" ky="0" algn="bl" rotWithShape="0" blurRad="76200" dist="25400" dir="5400000">
+            <a:outerShdw blurRad="76200" dist="25400" dir="5400000" algn="bl" rotWithShape="0">
               <a:srgbClr val="000000">
                 <a:alpha val="10000"/>
               </a:srgbClr>
             </a:outerShdw>
           </a:effectLst>
         </p:spPr>
+        <p:txBody>
+          <a:bodyPr/>
+          <a:lstStyle/>
+          <a:p>
+            <a:endParaRPr lang="es-CO"/>
+          </a:p>
+        </p:txBody>
       </p:sp>
       <p:sp>
         <p:nvSpPr>
@@ -9644,7 +9574,7 @@
           <a:bodyPr wrap="square" lIns="0" tIns="0" rIns="0" bIns="0" rtlCol="0" anchor="ctr"/>
           <a:lstStyle/>
           <a:p>
-            <a:pPr indent="0" marL="0">
+            <a:pPr marL="0" indent="0">
               <a:buNone/>
             </a:pPr>
             <a:r>
@@ -9683,7 +9613,7 @@
           <a:bodyPr wrap="square" lIns="0" tIns="0" rIns="0" bIns="0" rtlCol="0" anchor="t"/>
           <a:lstStyle/>
           <a:p>
-            <a:pPr indent="0" marL="0">
+            <a:pPr marL="0" indent="0">
               <a:lnSpc>
                 <a:spcPct val="120000"/>
               </a:lnSpc>
@@ -9725,13 +9655,20 @@
           </a:solidFill>
           <a:ln/>
           <a:effectLst>
-            <a:outerShdw sx="100000" sy="100000" kx="0" ky="0" algn="bl" rotWithShape="0" blurRad="76200" dist="25400" dir="5400000">
+            <a:outerShdw blurRad="76200" dist="25400" dir="5400000" algn="bl" rotWithShape="0">
               <a:srgbClr val="000000">
                 <a:alpha val="10000"/>
               </a:srgbClr>
             </a:outerShdw>
           </a:effectLst>
         </p:spPr>
+        <p:txBody>
+          <a:bodyPr/>
+          <a:lstStyle/>
+          <a:p>
+            <a:endParaRPr lang="es-CO"/>
+          </a:p>
+        </p:txBody>
       </p:sp>
       <p:sp>
         <p:nvSpPr>
@@ -9754,7 +9691,7 @@
           <a:bodyPr wrap="square" lIns="0" tIns="0" rIns="0" bIns="0" rtlCol="0" anchor="ctr"/>
           <a:lstStyle/>
           <a:p>
-            <a:pPr indent="0" marL="0">
+            <a:pPr marL="0" indent="0">
               <a:buNone/>
             </a:pPr>
             <a:r>
@@ -9793,7 +9730,7 @@
           <a:bodyPr wrap="square" lIns="0" tIns="0" rIns="0" bIns="0" rtlCol="0" anchor="t"/>
           <a:lstStyle/>
           <a:p>
-            <a:pPr indent="0" marL="0">
+            <a:pPr marL="0" indent="0">
               <a:lnSpc>
                 <a:spcPct val="120000"/>
               </a:lnSpc>
@@ -9835,13 +9772,20 @@
           </a:solidFill>
           <a:ln/>
           <a:effectLst>
-            <a:outerShdw sx="100000" sy="100000" kx="0" ky="0" algn="bl" rotWithShape="0" blurRad="76200" dist="25400" dir="5400000">
+            <a:outerShdw blurRad="76200" dist="25400" dir="5400000" algn="bl" rotWithShape="0">
               <a:srgbClr val="000000">
                 <a:alpha val="10000"/>
               </a:srgbClr>
             </a:outerShdw>
           </a:effectLst>
         </p:spPr>
+        <p:txBody>
+          <a:bodyPr/>
+          <a:lstStyle/>
+          <a:p>
+            <a:endParaRPr lang="es-CO"/>
+          </a:p>
+        </p:txBody>
       </p:sp>
       <p:sp>
         <p:nvSpPr>
@@ -9864,7 +9808,7 @@
           <a:bodyPr wrap="square" lIns="0" tIns="0" rIns="0" bIns="0" rtlCol="0" anchor="ctr"/>
           <a:lstStyle/>
           <a:p>
-            <a:pPr indent="0" marL="0">
+            <a:pPr marL="0" indent="0">
               <a:buNone/>
             </a:pPr>
             <a:r>
@@ -9903,7 +9847,7 @@
           <a:bodyPr wrap="square" lIns="0" tIns="0" rIns="0" bIns="0" rtlCol="0" anchor="t"/>
           <a:lstStyle/>
           <a:p>
-            <a:pPr indent="0" marL="0">
+            <a:pPr marL="0" indent="0">
               <a:lnSpc>
                 <a:spcPct val="120000"/>
               </a:lnSpc>
@@ -9945,6 +9889,13 @@
           </a:solidFill>
           <a:ln/>
         </p:spPr>
+        <p:txBody>
+          <a:bodyPr/>
+          <a:lstStyle/>
+          <a:p>
+            <a:endParaRPr lang="es-CO"/>
+          </a:p>
+        </p:txBody>
       </p:sp>
       <p:sp>
         <p:nvSpPr>
@@ -9967,7 +9918,7 @@
           <a:bodyPr wrap="square" lIns="0" tIns="0" rIns="0" bIns="0" rtlCol="0" anchor="ctr"/>
           <a:lstStyle/>
           <a:p>
-            <a:pPr indent="0" marL="0">
+            <a:pPr marL="0" indent="0">
               <a:lnSpc>
                 <a:spcPct val="120000"/>
               </a:lnSpc>
@@ -9984,12 +9935,6 @@
               </a:rPr>
               <a:t>El mensaje central: </a:t>
             </a:r>
-            <a:pPr indent="0" marL="0">
-              <a:lnSpc>
-                <a:spcPct val="120000"/>
-              </a:lnSpc>
-              <a:buNone/>
-            </a:pPr>
             <a:r>
               <a:rPr lang="en-US" sz="1300" dirty="0">
                 <a:solidFill>
@@ -10026,7 +9971,7 @@
           <a:bodyPr wrap="square" lIns="0" tIns="0" rIns="0" bIns="0" rtlCol="0" anchor="ctr"/>
           <a:lstStyle/>
           <a:p>
-            <a:pPr indent="0" marL="0">
+            <a:pPr marL="0" indent="0">
               <a:buNone/>
             </a:pPr>
             <a:r>
@@ -10065,7 +10010,7 @@
           <a:bodyPr wrap="square" lIns="0" tIns="0" rIns="0" bIns="0" rtlCol="0" anchor="ctr"/>
           <a:lstStyle/>
           <a:p>
-            <a:pPr algn="r" indent="0" marL="0">
+            <a:pPr marL="0" indent="0" algn="r">
               <a:buNone/>
             </a:pPr>
             <a:r>
@@ -10129,11 +10074,11 @@
           <a:bodyPr wrap="square" lIns="0" tIns="0" rIns="0" bIns="0" rtlCol="0" anchor="ctr"/>
           <a:lstStyle/>
           <a:p>
-            <a:pPr indent="0" marL="0">
-              <a:buNone/>
-            </a:pPr>
-            <a:r>
-              <a:rPr lang="en-US" sz="1300" b="1" spc="200" kern="0" dirty="0">
+            <a:pPr marL="0" indent="0">
+              <a:buNone/>
+            </a:pPr>
+            <a:r>
+              <a:rPr lang="en-US" sz="1300" b="1" kern="0" spc="200" dirty="0">
                 <a:solidFill>
                   <a:srgbClr val="B33A3A"/>
                 </a:solidFill>
@@ -10168,7 +10113,7 @@
           <a:bodyPr wrap="square" lIns="0" tIns="0" rIns="0" bIns="0" rtlCol="0" anchor="ctr"/>
           <a:lstStyle/>
           <a:p>
-            <a:pPr indent="0" marL="0">
+            <a:pPr marL="0" indent="0">
               <a:buNone/>
             </a:pPr>
             <a:r>
@@ -10207,7 +10152,7 @@
           <a:bodyPr wrap="square" lIns="0" tIns="0" rIns="0" bIns="0" rtlCol="0" anchor="t"/>
           <a:lstStyle/>
           <a:p>
-            <a:pPr indent="0" marL="0">
+            <a:pPr marL="0" indent="0">
               <a:lnSpc>
                 <a:spcPct val="125000"/>
               </a:lnSpc>
@@ -10222,8 +10167,308 @@
                 <a:ea typeface="Calibri" pitchFamily="34" charset="-122"/>
                 <a:cs typeface="Calibri" pitchFamily="34" charset="-120"/>
               </a:rPr>
-              <a:t>Una empresa financiera entrega una base de datos con información del crédito, del cliente y del comportamiento de pago (a tiempo o en mora). El objetivo: generar insights valiosos para la organización y comunicarlos de forma clara — sin contar con un diccionario de datos.</a:t>
-            </a:r>
+              <a:t>Una empresa financiera entrega una base de datos con información del crédito, del cliente y del comportamiento de pago (a tiempo o en mora). El objetivo: generar insights valiosos para la organización y comunicarlos de forma </a:t>
+            </a:r>
+            <a:r>
+              <a:rPr lang="en-US" sz="1600" dirty="0" err="1">
+                <a:solidFill>
+                  <a:srgbClr val="5A5F73"/>
+                </a:solidFill>
+                <a:latin typeface="Calibri" pitchFamily="34" charset="0"/>
+                <a:ea typeface="Calibri" pitchFamily="34" charset="-122"/>
+                <a:cs typeface="Calibri" pitchFamily="34" charset="-120"/>
+              </a:rPr>
+              <a:t>clara</a:t>
+            </a:r>
+            <a:r>
+              <a:rPr lang="en-US" sz="1600" dirty="0">
+                <a:solidFill>
+                  <a:srgbClr val="5A5F73"/>
+                </a:solidFill>
+                <a:latin typeface="Calibri" pitchFamily="34" charset="0"/>
+                <a:ea typeface="Calibri" pitchFamily="34" charset="-122"/>
+                <a:cs typeface="Calibri" pitchFamily="34" charset="-120"/>
+              </a:rPr>
+              <a:t> para la </a:t>
+            </a:r>
+            <a:r>
+              <a:rPr lang="en-US" sz="1600" dirty="0" err="1">
+                <a:solidFill>
+                  <a:srgbClr val="5A5F73"/>
+                </a:solidFill>
+                <a:latin typeface="Calibri" pitchFamily="34" charset="0"/>
+                <a:ea typeface="Calibri" pitchFamily="34" charset="-122"/>
+                <a:cs typeface="Calibri" pitchFamily="34" charset="-120"/>
+              </a:rPr>
+              <a:t>toma</a:t>
+            </a:r>
+            <a:r>
+              <a:rPr lang="en-US" sz="1600" dirty="0">
+                <a:solidFill>
+                  <a:srgbClr val="5A5F73"/>
+                </a:solidFill>
+                <a:latin typeface="Calibri" pitchFamily="34" charset="0"/>
+                <a:ea typeface="Calibri" pitchFamily="34" charset="-122"/>
+                <a:cs typeface="Calibri" pitchFamily="34" charset="-120"/>
+              </a:rPr>
+              <a:t> de decisiones</a:t>
+            </a:r>
+          </a:p>
+          <a:p>
+            <a:pPr marL="0" indent="0">
+              <a:lnSpc>
+                <a:spcPct val="125000"/>
+              </a:lnSpc>
+              <a:buNone/>
+            </a:pPr>
+            <a:endParaRPr lang="en-US" sz="1600" dirty="0">
+              <a:solidFill>
+                <a:srgbClr val="5A5F73"/>
+              </a:solidFill>
+              <a:latin typeface="Calibri" pitchFamily="34" charset="0"/>
+              <a:ea typeface="Calibri" pitchFamily="34" charset="-122"/>
+              <a:cs typeface="Calibri" pitchFamily="34" charset="-120"/>
+            </a:endParaRPr>
+          </a:p>
+          <a:p>
+            <a:pPr marL="0" indent="0">
+              <a:lnSpc>
+                <a:spcPct val="125000"/>
+              </a:lnSpc>
+              <a:buNone/>
+            </a:pPr>
+            <a:r>
+              <a:rPr lang="en-US" sz="1600" dirty="0">
+                <a:solidFill>
+                  <a:srgbClr val="5A5F73"/>
+                </a:solidFill>
+                <a:latin typeface="Calibri" pitchFamily="34" charset="0"/>
+                <a:ea typeface="Calibri" pitchFamily="34" charset="-122"/>
+                <a:cs typeface="Calibri" pitchFamily="34" charset="-120"/>
+              </a:rPr>
+              <a:t>Los </a:t>
+            </a:r>
+            <a:r>
+              <a:rPr lang="en-US" sz="1600" dirty="0" err="1">
+                <a:solidFill>
+                  <a:srgbClr val="5A5F73"/>
+                </a:solidFill>
+                <a:latin typeface="Calibri" pitchFamily="34" charset="0"/>
+                <a:ea typeface="Calibri" pitchFamily="34" charset="-122"/>
+                <a:cs typeface="Calibri" pitchFamily="34" charset="-120"/>
+              </a:rPr>
+              <a:t>datos</a:t>
+            </a:r>
+            <a:r>
+              <a:rPr lang="en-US" sz="1600" dirty="0">
+                <a:solidFill>
+                  <a:srgbClr val="5A5F73"/>
+                </a:solidFill>
+                <a:latin typeface="Calibri" pitchFamily="34" charset="0"/>
+                <a:ea typeface="Calibri" pitchFamily="34" charset="-122"/>
+                <a:cs typeface="Calibri" pitchFamily="34" charset="-120"/>
+              </a:rPr>
+              <a:t> </a:t>
+            </a:r>
+            <a:r>
+              <a:rPr lang="en-US" sz="1600" dirty="0" err="1">
+                <a:solidFill>
+                  <a:srgbClr val="5A5F73"/>
+                </a:solidFill>
+                <a:latin typeface="Calibri" pitchFamily="34" charset="0"/>
+                <a:ea typeface="Calibri" pitchFamily="34" charset="-122"/>
+                <a:cs typeface="Calibri" pitchFamily="34" charset="-120"/>
+              </a:rPr>
+              <a:t>crediticios</a:t>
+            </a:r>
+            <a:r>
+              <a:rPr lang="en-US" sz="1600" dirty="0">
+                <a:solidFill>
+                  <a:srgbClr val="5A5F73"/>
+                </a:solidFill>
+                <a:latin typeface="Calibri" pitchFamily="34" charset="0"/>
+                <a:ea typeface="Calibri" pitchFamily="34" charset="-122"/>
+                <a:cs typeface="Calibri" pitchFamily="34" charset="-120"/>
+              </a:rPr>
+              <a:t> van </a:t>
+            </a:r>
+            <a:r>
+              <a:rPr lang="en-US" sz="1600" dirty="0" err="1">
+                <a:solidFill>
+                  <a:srgbClr val="5A5F73"/>
+                </a:solidFill>
+                <a:latin typeface="Calibri" pitchFamily="34" charset="0"/>
+                <a:ea typeface="Calibri" pitchFamily="34" charset="-122"/>
+                <a:cs typeface="Calibri" pitchFamily="34" charset="-120"/>
+              </a:rPr>
+              <a:t>desde</a:t>
+            </a:r>
+            <a:r>
+              <a:rPr lang="en-US" sz="1600" dirty="0">
+                <a:solidFill>
+                  <a:srgbClr val="5A5F73"/>
+                </a:solidFill>
+                <a:latin typeface="Calibri" pitchFamily="34" charset="0"/>
+                <a:ea typeface="Calibri" pitchFamily="34" charset="-122"/>
+                <a:cs typeface="Calibri" pitchFamily="34" charset="-120"/>
+              </a:rPr>
+              <a:t> </a:t>
+            </a:r>
+            <a:r>
+              <a:rPr lang="en-US" sz="1600" dirty="0" err="1">
+                <a:solidFill>
+                  <a:srgbClr val="5A5F73"/>
+                </a:solidFill>
+                <a:latin typeface="Calibri" pitchFamily="34" charset="0"/>
+                <a:ea typeface="Calibri" pitchFamily="34" charset="-122"/>
+                <a:cs typeface="Calibri" pitchFamily="34" charset="-120"/>
+              </a:rPr>
+              <a:t>noviembre</a:t>
+            </a:r>
+            <a:r>
+              <a:rPr lang="en-US" sz="1600" dirty="0">
+                <a:solidFill>
+                  <a:srgbClr val="5A5F73"/>
+                </a:solidFill>
+                <a:latin typeface="Calibri" pitchFamily="34" charset="0"/>
+                <a:ea typeface="Calibri" pitchFamily="34" charset="-122"/>
+                <a:cs typeface="Calibri" pitchFamily="34" charset="-120"/>
+              </a:rPr>
+              <a:t> del 2024 hasta </a:t>
+            </a:r>
+            <a:r>
+              <a:rPr lang="en-US" sz="1600" dirty="0" err="1">
+                <a:solidFill>
+                  <a:srgbClr val="5A5F73"/>
+                </a:solidFill>
+                <a:latin typeface="Calibri" pitchFamily="34" charset="0"/>
+                <a:ea typeface="Calibri" pitchFamily="34" charset="-122"/>
+                <a:cs typeface="Calibri" pitchFamily="34" charset="-120"/>
+              </a:rPr>
+              <a:t>abril</a:t>
+            </a:r>
+            <a:r>
+              <a:rPr lang="en-US" sz="1600" dirty="0">
+                <a:solidFill>
+                  <a:srgbClr val="5A5F73"/>
+                </a:solidFill>
+                <a:latin typeface="Calibri" pitchFamily="34" charset="0"/>
+                <a:ea typeface="Calibri" pitchFamily="34" charset="-122"/>
+                <a:cs typeface="Calibri" pitchFamily="34" charset="-120"/>
+              </a:rPr>
+              <a:t> 2026</a:t>
+            </a:r>
+          </a:p>
+          <a:p>
+            <a:pPr marL="0" indent="0">
+              <a:lnSpc>
+                <a:spcPct val="125000"/>
+              </a:lnSpc>
+              <a:buNone/>
+            </a:pPr>
+            <a:endParaRPr lang="en-US" sz="1600" dirty="0">
+              <a:solidFill>
+                <a:srgbClr val="5A5F73"/>
+              </a:solidFill>
+              <a:latin typeface="Calibri" pitchFamily="34" charset="0"/>
+              <a:ea typeface="Calibri" pitchFamily="34" charset="-122"/>
+              <a:cs typeface="Calibri" pitchFamily="34" charset="-120"/>
+            </a:endParaRPr>
+          </a:p>
+          <a:p>
+            <a:pPr marL="0" indent="0">
+              <a:lnSpc>
+                <a:spcPct val="125000"/>
+              </a:lnSpc>
+              <a:buNone/>
+            </a:pPr>
+            <a:r>
+              <a:rPr lang="en-US" sz="1600" dirty="0" err="1">
+                <a:solidFill>
+                  <a:srgbClr val="5A5F73"/>
+                </a:solidFill>
+                <a:latin typeface="Calibri" pitchFamily="34" charset="0"/>
+                <a:ea typeface="Calibri" pitchFamily="34" charset="-122"/>
+                <a:cs typeface="Calibri" pitchFamily="34" charset="-120"/>
+              </a:rPr>
+              <a:t>Además</a:t>
+            </a:r>
+            <a:r>
+              <a:rPr lang="en-US" sz="1600" dirty="0">
+                <a:solidFill>
+                  <a:srgbClr val="5A5F73"/>
+                </a:solidFill>
+                <a:latin typeface="Calibri" pitchFamily="34" charset="0"/>
+                <a:ea typeface="Calibri" pitchFamily="34" charset="-122"/>
+                <a:cs typeface="Calibri" pitchFamily="34" charset="-120"/>
+              </a:rPr>
+              <a:t> se propone la </a:t>
+            </a:r>
+            <a:r>
+              <a:rPr lang="en-US" sz="1600" dirty="0" err="1">
+                <a:solidFill>
+                  <a:srgbClr val="5A5F73"/>
+                </a:solidFill>
+                <a:latin typeface="Calibri" pitchFamily="34" charset="0"/>
+                <a:ea typeface="Calibri" pitchFamily="34" charset="-122"/>
+                <a:cs typeface="Calibri" pitchFamily="34" charset="-120"/>
+              </a:rPr>
+              <a:t>construcción</a:t>
+            </a:r>
+            <a:r>
+              <a:rPr lang="en-US" sz="1600" dirty="0">
+                <a:solidFill>
+                  <a:srgbClr val="5A5F73"/>
+                </a:solidFill>
+                <a:latin typeface="Calibri" pitchFamily="34" charset="0"/>
+                <a:ea typeface="Calibri" pitchFamily="34" charset="-122"/>
+                <a:cs typeface="Calibri" pitchFamily="34" charset="-120"/>
+              </a:rPr>
+              <a:t> de un diccionario de </a:t>
+            </a:r>
+            <a:r>
+              <a:rPr lang="en-US" sz="1600" dirty="0" err="1">
+                <a:solidFill>
+                  <a:srgbClr val="5A5F73"/>
+                </a:solidFill>
+                <a:latin typeface="Calibri" pitchFamily="34" charset="0"/>
+                <a:ea typeface="Calibri" pitchFamily="34" charset="-122"/>
+                <a:cs typeface="Calibri" pitchFamily="34" charset="-120"/>
+              </a:rPr>
+              <a:t>datos</a:t>
+            </a:r>
+            <a:endParaRPr lang="en-US" sz="1600" dirty="0">
+              <a:solidFill>
+                <a:srgbClr val="5A5F73"/>
+              </a:solidFill>
+              <a:latin typeface="Calibri" pitchFamily="34" charset="0"/>
+              <a:ea typeface="Calibri" pitchFamily="34" charset="-122"/>
+              <a:cs typeface="Calibri" pitchFamily="34" charset="-120"/>
+            </a:endParaRPr>
+          </a:p>
+          <a:p>
+            <a:pPr marL="0" indent="0">
+              <a:lnSpc>
+                <a:spcPct val="125000"/>
+              </a:lnSpc>
+              <a:buNone/>
+            </a:pPr>
+            <a:endParaRPr lang="en-US" sz="1600" dirty="0">
+              <a:solidFill>
+                <a:srgbClr val="5A5F73"/>
+              </a:solidFill>
+              <a:latin typeface="Calibri" pitchFamily="34" charset="0"/>
+              <a:ea typeface="Calibri" pitchFamily="34" charset="-122"/>
+              <a:cs typeface="Calibri" pitchFamily="34" charset="-120"/>
+            </a:endParaRPr>
+          </a:p>
+          <a:p>
+            <a:pPr marL="0" indent="0">
+              <a:lnSpc>
+                <a:spcPct val="125000"/>
+              </a:lnSpc>
+              <a:buNone/>
+            </a:pPr>
             <a:endParaRPr lang="en-US" sz="1600" dirty="0"/>
           </a:p>
         </p:txBody>
@@ -10249,13 +10494,20 @@
           </a:solidFill>
           <a:ln/>
           <a:effectLst>
-            <a:outerShdw sx="100000" sy="100000" kx="0" ky="0" algn="bl" rotWithShape="0" blurRad="76200" dist="25400" dir="5400000">
+            <a:outerShdw blurRad="76200" dist="25400" dir="5400000" algn="bl" rotWithShape="0">
               <a:srgbClr val="000000">
                 <a:alpha val="12000"/>
               </a:srgbClr>
             </a:outerShdw>
           </a:effectLst>
         </p:spPr>
+        <p:txBody>
+          <a:bodyPr/>
+          <a:lstStyle/>
+          <a:p>
+            <a:endParaRPr lang="es-CO"/>
+          </a:p>
+        </p:txBody>
       </p:sp>
       <p:sp>
         <p:nvSpPr>
@@ -10278,7 +10530,7 @@
           <a:bodyPr wrap="square" lIns="0" tIns="0" rIns="0" bIns="0" rtlCol="0" anchor="ctr"/>
           <a:lstStyle/>
           <a:p>
-            <a:pPr indent="0" marL="0">
+            <a:pPr marL="0" indent="0">
               <a:buNone/>
             </a:pPr>
             <a:r>
@@ -10317,7 +10569,7 @@
           <a:bodyPr wrap="square" lIns="0" tIns="0" rIns="0" bIns="0" rtlCol="0" anchor="ctr"/>
           <a:lstStyle/>
           <a:p>
-            <a:pPr indent="0" marL="0">
+            <a:pPr marL="0" indent="0">
               <a:buNone/>
             </a:pPr>
             <a:r>
@@ -10356,13 +10608,20 @@
           </a:solidFill>
           <a:ln/>
           <a:effectLst>
-            <a:outerShdw sx="100000" sy="100000" kx="0" ky="0" algn="bl" rotWithShape="0" blurRad="76200" dist="25400" dir="5400000">
+            <a:outerShdw blurRad="76200" dist="25400" dir="5400000" algn="bl" rotWithShape="0">
               <a:srgbClr val="000000">
                 <a:alpha val="12000"/>
               </a:srgbClr>
             </a:outerShdw>
           </a:effectLst>
         </p:spPr>
+        <p:txBody>
+          <a:bodyPr/>
+          <a:lstStyle/>
+          <a:p>
+            <a:endParaRPr lang="es-CO"/>
+          </a:p>
+        </p:txBody>
       </p:sp>
       <p:sp>
         <p:nvSpPr>
@@ -10385,7 +10644,7 @@
           <a:bodyPr wrap="square" lIns="0" tIns="0" rIns="0" bIns="0" rtlCol="0" anchor="ctr"/>
           <a:lstStyle/>
           <a:p>
-            <a:pPr indent="0" marL="0">
+            <a:pPr marL="0" indent="0">
               <a:buNone/>
             </a:pPr>
             <a:r>
@@ -10424,7 +10683,7 @@
           <a:bodyPr wrap="square" lIns="0" tIns="0" rIns="0" bIns="0" rtlCol="0" anchor="ctr"/>
           <a:lstStyle/>
           <a:p>
-            <a:pPr indent="0" marL="0">
+            <a:pPr marL="0" indent="0">
               <a:buNone/>
             </a:pPr>
             <a:r>
@@ -10463,13 +10722,20 @@
           </a:solidFill>
           <a:ln/>
           <a:effectLst>
-            <a:outerShdw sx="100000" sy="100000" kx="0" ky="0" algn="bl" rotWithShape="0" blurRad="76200" dist="25400" dir="5400000">
+            <a:outerShdw blurRad="76200" dist="25400" dir="5400000" algn="bl" rotWithShape="0">
               <a:srgbClr val="000000">
                 <a:alpha val="12000"/>
               </a:srgbClr>
             </a:outerShdw>
           </a:effectLst>
         </p:spPr>
+        <p:txBody>
+          <a:bodyPr/>
+          <a:lstStyle/>
+          <a:p>
+            <a:endParaRPr lang="es-CO"/>
+          </a:p>
+        </p:txBody>
       </p:sp>
       <p:sp>
         <p:nvSpPr>
@@ -10492,20 +10758,9 @@
           <a:bodyPr wrap="square" lIns="0" tIns="0" rIns="0" bIns="0" rtlCol="0" anchor="ctr"/>
           <a:lstStyle/>
           <a:p>
-            <a:pPr indent="0" marL="0">
-              <a:buNone/>
-            </a:pPr>
-            <a:r>
-              <a:rPr lang="en-US" sz="3400" b="1" dirty="0">
-                <a:solidFill>
-                  <a:srgbClr val="1E2761"/>
-                </a:solidFill>
-                <a:latin typeface="Cambria" pitchFamily="34" charset="0"/>
-                <a:ea typeface="Cambria" pitchFamily="34" charset="-122"/>
-                <a:cs typeface="Cambria" pitchFamily="34" charset="-120"/>
-              </a:rPr>
-              <a:t>0</a:t>
-            </a:r>
+            <a:pPr marL="0" indent="0">
+              <a:buNone/>
+            </a:pPr>
             <a:endParaRPr lang="en-US" sz="3400" dirty="0"/>
           </a:p>
         </p:txBody>
@@ -10531,7 +10786,7 @@
           <a:bodyPr wrap="square" lIns="0" tIns="0" rIns="0" bIns="0" rtlCol="0" anchor="ctr"/>
           <a:lstStyle/>
           <a:p>
-            <a:pPr indent="0" marL="0">
+            <a:pPr marL="0" indent="0">
               <a:buNone/>
             </a:pPr>
             <a:r>
@@ -10570,7 +10825,7 @@
           <a:bodyPr wrap="square" lIns="0" tIns="0" rIns="0" bIns="0" rtlCol="0" anchor="ctr"/>
           <a:lstStyle/>
           <a:p>
-            <a:pPr indent="0" marL="0">
+            <a:pPr marL="0" indent="0">
               <a:buNone/>
             </a:pPr>
             <a:r>
@@ -10609,7 +10864,7 @@
           <a:bodyPr wrap="square" lIns="0" tIns="0" rIns="0" bIns="0" rtlCol="0" anchor="ctr"/>
           <a:lstStyle/>
           <a:p>
-            <a:pPr algn="r" indent="0" marL="0">
+            <a:pPr marL="0" indent="0" algn="r">
               <a:buNone/>
             </a:pPr>
             <a:r>
@@ -10660,7 +10915,7 @@
         </p:nvSpPr>
         <p:spPr>
           <a:xfrm>
-            <a:off x="548640" y="411480"/>
+            <a:off x="548640" y="402336"/>
             <a:ext cx="9144000" cy="320040"/>
           </a:xfrm>
           <a:prstGeom prst="rect">
@@ -10673,11 +10928,11 @@
           <a:bodyPr wrap="square" lIns="0" tIns="0" rIns="0" bIns="0" rtlCol="0" anchor="ctr"/>
           <a:lstStyle/>
           <a:p>
-            <a:pPr indent="0" marL="0">
-              <a:buNone/>
-            </a:pPr>
-            <a:r>
-              <a:rPr lang="en-US" sz="1300" b="1" spc="200" kern="0" dirty="0">
+            <a:pPr marL="0" indent="0">
+              <a:buNone/>
+            </a:pPr>
+            <a:r>
+              <a:rPr lang="en-US" sz="1300" b="1" kern="0" spc="200" dirty="0">
                 <a:solidFill>
                   <a:srgbClr val="B33A3A"/>
                 </a:solidFill>
@@ -10685,7 +10940,7 @@
                 <a:ea typeface="Calibri" pitchFamily="34" charset="-122"/>
                 <a:cs typeface="Calibri" pitchFamily="34" charset="-120"/>
               </a:rPr>
-              <a:t>BASE METODOLÓGICA</a:t>
+              <a:t>INVESTIGACION SECTOR BANCARIO COLOMBIANO</a:t>
             </a:r>
             <a:endParaRPr lang="en-US" sz="1300" dirty="0"/>
           </a:p>
@@ -10712,7 +10967,7 @@
           <a:bodyPr wrap="square" lIns="0" tIns="0" rIns="0" bIns="0" rtlCol="0" anchor="ctr"/>
           <a:lstStyle/>
           <a:p>
-            <a:pPr indent="0" marL="0">
+            <a:pPr marL="0" indent="0">
               <a:buNone/>
             </a:pPr>
             <a:r>
@@ -10751,7 +11006,7 @@
           <a:bodyPr wrap="square" lIns="0" tIns="0" rIns="0" bIns="0" rtlCol="0" anchor="ctr"/>
           <a:lstStyle/>
           <a:p>
-            <a:pPr indent="0" marL="0">
+            <a:pPr marL="0" indent="0">
               <a:buNone/>
             </a:pPr>
             <a:r>
@@ -10763,7 +11018,95 @@
                 <a:ea typeface="Calibri" pitchFamily="34" charset="-122"/>
                 <a:cs typeface="Calibri" pitchFamily="34" charset="-120"/>
               </a:rPr>
-              <a:t>No se entregó diccionario. Construirlo reveló tres errores metodológicos reales.</a:t>
+              <a:t>No se </a:t>
+            </a:r>
+            <a:r>
+              <a:rPr lang="en-US" sz="1400" i="1" dirty="0" err="1">
+                <a:solidFill>
+                  <a:srgbClr val="5A5F73"/>
+                </a:solidFill>
+                <a:latin typeface="Calibri" pitchFamily="34" charset="0"/>
+                <a:ea typeface="Calibri" pitchFamily="34" charset="-122"/>
+                <a:cs typeface="Calibri" pitchFamily="34" charset="-120"/>
+              </a:rPr>
+              <a:t>entregó</a:t>
+            </a:r>
+            <a:r>
+              <a:rPr lang="en-US" sz="1400" i="1" dirty="0">
+                <a:solidFill>
+                  <a:srgbClr val="5A5F73"/>
+                </a:solidFill>
+                <a:latin typeface="Calibri" pitchFamily="34" charset="0"/>
+                <a:ea typeface="Calibri" pitchFamily="34" charset="-122"/>
+                <a:cs typeface="Calibri" pitchFamily="34" charset="-120"/>
+              </a:rPr>
+              <a:t> diccionario , </a:t>
+            </a:r>
+            <a:r>
+              <a:rPr lang="en-US" sz="1400" i="1" dirty="0" err="1">
+                <a:solidFill>
+                  <a:srgbClr val="5A5F73"/>
+                </a:solidFill>
+                <a:latin typeface="Calibri" pitchFamily="34" charset="0"/>
+                <a:ea typeface="Calibri" pitchFamily="34" charset="-122"/>
+                <a:cs typeface="Calibri" pitchFamily="34" charset="-120"/>
+              </a:rPr>
+              <a:t>entonces</a:t>
+            </a:r>
+            <a:r>
+              <a:rPr lang="en-US" sz="1400" i="1" dirty="0">
+                <a:solidFill>
+                  <a:srgbClr val="5A5F73"/>
+                </a:solidFill>
+                <a:latin typeface="Calibri" pitchFamily="34" charset="0"/>
+                <a:ea typeface="Calibri" pitchFamily="34" charset="-122"/>
+                <a:cs typeface="Calibri" pitchFamily="34" charset="-120"/>
+              </a:rPr>
+              <a:t> se </a:t>
+            </a:r>
+            <a:r>
+              <a:rPr lang="en-US" sz="1400" i="1" dirty="0" err="1">
+                <a:solidFill>
+                  <a:srgbClr val="5A5F73"/>
+                </a:solidFill>
+                <a:latin typeface="Calibri" pitchFamily="34" charset="0"/>
+                <a:ea typeface="Calibri" pitchFamily="34" charset="-122"/>
+                <a:cs typeface="Calibri" pitchFamily="34" charset="-120"/>
+              </a:rPr>
+              <a:t>implementa</a:t>
+            </a:r>
+            <a:r>
+              <a:rPr lang="en-US" sz="1400" i="1" dirty="0">
+                <a:solidFill>
+                  <a:srgbClr val="5A5F73"/>
+                </a:solidFill>
+                <a:latin typeface="Calibri" pitchFamily="34" charset="0"/>
+                <a:ea typeface="Calibri" pitchFamily="34" charset="-122"/>
+                <a:cs typeface="Calibri" pitchFamily="34" charset="-120"/>
+              </a:rPr>
+              <a:t> un diccionario de </a:t>
+            </a:r>
+            <a:r>
+              <a:rPr lang="en-US" sz="1400" i="1" dirty="0" err="1">
+                <a:solidFill>
+                  <a:srgbClr val="5A5F73"/>
+                </a:solidFill>
+                <a:latin typeface="Calibri" pitchFamily="34" charset="0"/>
+                <a:ea typeface="Calibri" pitchFamily="34" charset="-122"/>
+                <a:cs typeface="Calibri" pitchFamily="34" charset="-120"/>
+              </a:rPr>
+              <a:t>datos</a:t>
+            </a:r>
+            <a:r>
+              <a:rPr lang="en-US" sz="1400" i="1" dirty="0">
+                <a:solidFill>
+                  <a:srgbClr val="5A5F73"/>
+                </a:solidFill>
+                <a:latin typeface="Calibri" pitchFamily="34" charset="0"/>
+                <a:ea typeface="Calibri" pitchFamily="34" charset="-122"/>
+                <a:cs typeface="Calibri" pitchFamily="34" charset="-120"/>
+              </a:rPr>
+              <a:t>.</a:t>
             </a:r>
             <a:endParaRPr lang="en-US" sz="1400" dirty="0"/>
           </a:p>
@@ -10790,6 +11133,13 @@
           </a:solidFill>
           <a:ln/>
         </p:spPr>
+        <p:txBody>
+          <a:bodyPr/>
+          <a:lstStyle/>
+          <a:p>
+            <a:endParaRPr lang="es-CO"/>
+          </a:p>
+        </p:txBody>
       </p:sp>
       <p:sp>
         <p:nvSpPr>
@@ -10812,7 +11162,7 @@
           <a:bodyPr wrap="square" lIns="0" tIns="0" rIns="0" bIns="0" rtlCol="0" anchor="ctr"/>
           <a:lstStyle/>
           <a:p>
-            <a:pPr indent="0" marL="0">
+            <a:pPr marL="0" indent="0">
               <a:buNone/>
             </a:pPr>
             <a:r>
@@ -10851,7 +11201,7 @@
           <a:bodyPr wrap="square" lIns="0" tIns="0" rIns="0" bIns="0" rtlCol="0" anchor="t"/>
           <a:lstStyle/>
           <a:p>
-            <a:pPr indent="0" marL="0">
+            <a:pPr marL="0" indent="0">
               <a:buNone/>
             </a:pPr>
             <a:r>
@@ -10868,7 +11218,7 @@
             <a:endParaRPr lang="en-US" sz="1250" dirty="0"/>
           </a:p>
           <a:p>
-            <a:pPr indent="0" marL="0">
+            <a:pPr marL="0" indent="0">
               <a:buNone/>
             </a:pPr>
             <a:r>
@@ -10907,7 +11257,7 @@
           <a:bodyPr wrap="square" lIns="0" tIns="0" rIns="0" bIns="0" rtlCol="0" anchor="t"/>
           <a:lstStyle/>
           <a:p>
-            <a:pPr indent="0" marL="0">
+            <a:pPr marL="0" indent="0">
               <a:buNone/>
             </a:pPr>
             <a:r>
@@ -10924,7 +11274,7 @@
             <a:endParaRPr lang="en-US" sz="950" dirty="0"/>
           </a:p>
           <a:p>
-            <a:pPr indent="0" marL="0">
+            <a:pPr marL="0" indent="0">
               <a:buNone/>
             </a:pPr>
             <a:r>
@@ -10963,6 +11313,13 @@
           </a:solidFill>
           <a:ln/>
         </p:spPr>
+        <p:txBody>
+          <a:bodyPr/>
+          <a:lstStyle/>
+          <a:p>
+            <a:endParaRPr lang="es-CO"/>
+          </a:p>
+        </p:txBody>
       </p:sp>
       <p:sp>
         <p:nvSpPr>
@@ -10985,7 +11342,7 @@
           <a:bodyPr wrap="square" lIns="0" tIns="0" rIns="0" bIns="0" rtlCol="0" anchor="ctr"/>
           <a:lstStyle/>
           <a:p>
-            <a:pPr indent="0" marL="0">
+            <a:pPr marL="0" indent="0">
               <a:buNone/>
             </a:pPr>
             <a:r>
@@ -11024,7 +11381,7 @@
           <a:bodyPr wrap="square" lIns="0" tIns="0" rIns="0" bIns="0" rtlCol="0" anchor="t"/>
           <a:lstStyle/>
           <a:p>
-            <a:pPr indent="0" marL="0">
+            <a:pPr marL="0" indent="0">
               <a:buNone/>
             </a:pPr>
             <a:r>
@@ -11041,7 +11398,7 @@
             <a:endParaRPr lang="en-US" sz="1250" dirty="0"/>
           </a:p>
           <a:p>
-            <a:pPr indent="0" marL="0">
+            <a:pPr marL="0" indent="0">
               <a:buNone/>
             </a:pPr>
             <a:r>
@@ -11080,7 +11437,7 @@
           <a:bodyPr wrap="square" lIns="0" tIns="0" rIns="0" bIns="0" rtlCol="0" anchor="t"/>
           <a:lstStyle/>
           <a:p>
-            <a:pPr indent="0" marL="0">
+            <a:pPr marL="0" indent="0">
               <a:buNone/>
             </a:pPr>
             <a:r>
@@ -11097,7 +11454,7 @@
             <a:endParaRPr lang="en-US" sz="950" dirty="0"/>
           </a:p>
           <a:p>
-            <a:pPr indent="0" marL="0">
+            <a:pPr marL="0" indent="0">
               <a:buNone/>
             </a:pPr>
             <a:r>
@@ -11136,6 +11493,13 @@
           </a:solidFill>
           <a:ln/>
         </p:spPr>
+        <p:txBody>
+          <a:bodyPr/>
+          <a:lstStyle/>
+          <a:p>
+            <a:endParaRPr lang="es-CO"/>
+          </a:p>
+        </p:txBody>
       </p:sp>
       <p:sp>
         <p:nvSpPr>
@@ -11158,7 +11522,7 @@
           <a:bodyPr wrap="square" lIns="0" tIns="0" rIns="0" bIns="0" rtlCol="0" anchor="ctr"/>
           <a:lstStyle/>
           <a:p>
-            <a:pPr indent="0" marL="0">
+            <a:pPr marL="0" indent="0">
               <a:buNone/>
             </a:pPr>
             <a:r>
@@ -11197,7 +11561,7 @@
           <a:bodyPr wrap="square" lIns="0" tIns="0" rIns="0" bIns="0" rtlCol="0" anchor="t"/>
           <a:lstStyle/>
           <a:p>
-            <a:pPr indent="0" marL="0">
+            <a:pPr marL="0" indent="0">
               <a:buNone/>
             </a:pPr>
             <a:r>
@@ -11214,7 +11578,7 @@
             <a:endParaRPr lang="en-US" sz="1250" dirty="0"/>
           </a:p>
           <a:p>
-            <a:pPr indent="0" marL="0">
+            <a:pPr marL="0" indent="0">
               <a:buNone/>
             </a:pPr>
             <a:r>
@@ -11253,7 +11617,7 @@
           <a:bodyPr wrap="square" lIns="0" tIns="0" rIns="0" bIns="0" rtlCol="0" anchor="t"/>
           <a:lstStyle/>
           <a:p>
-            <a:pPr indent="0" marL="0">
+            <a:pPr marL="0" indent="0">
               <a:buNone/>
             </a:pPr>
             <a:r>
@@ -11270,7 +11634,7 @@
             <a:endParaRPr lang="en-US" sz="950" dirty="0"/>
           </a:p>
           <a:p>
-            <a:pPr indent="0" marL="0">
+            <a:pPr marL="0" indent="0">
               <a:buNone/>
             </a:pPr>
             <a:r>
@@ -11309,6 +11673,13 @@
           </a:solidFill>
           <a:ln/>
         </p:spPr>
+        <p:txBody>
+          <a:bodyPr/>
+          <a:lstStyle/>
+          <a:p>
+            <a:endParaRPr lang="es-CO"/>
+          </a:p>
+        </p:txBody>
       </p:sp>
       <p:sp>
         <p:nvSpPr>
@@ -11331,7 +11702,7 @@
           <a:bodyPr wrap="square" lIns="0" tIns="0" rIns="0" bIns="0" rtlCol="0" anchor="ctr"/>
           <a:lstStyle/>
           <a:p>
-            <a:pPr indent="0" marL="0">
+            <a:pPr marL="0" indent="0">
               <a:buNone/>
             </a:pPr>
             <a:r>
@@ -11370,7 +11741,7 @@
           <a:bodyPr wrap="square" lIns="0" tIns="0" rIns="0" bIns="0" rtlCol="0" anchor="t"/>
           <a:lstStyle/>
           <a:p>
-            <a:pPr indent="0" marL="0">
+            <a:pPr marL="0" indent="0">
               <a:buNone/>
             </a:pPr>
             <a:r>
@@ -11409,7 +11780,7 @@
           <a:bodyPr wrap="square" lIns="0" tIns="0" rIns="0" bIns="0" rtlCol="0" anchor="t"/>
           <a:lstStyle/>
           <a:p>
-            <a:pPr indent="0" marL="0">
+            <a:pPr marL="0" indent="0">
               <a:buNone/>
             </a:pPr>
             <a:r>
@@ -11448,7 +11819,7 @@
           <a:bodyPr wrap="square" lIns="0" tIns="0" rIns="0" bIns="0" rtlCol="0" anchor="ctr"/>
           <a:lstStyle/>
           <a:p>
-            <a:pPr indent="0" marL="0">
+            <a:pPr marL="0" indent="0">
               <a:buNone/>
             </a:pPr>
             <a:r>
@@ -11474,7 +11845,7 @@
         </p:nvSpPr>
         <p:spPr>
           <a:xfrm>
-            <a:off x="548640" y="4663440"/>
+            <a:off x="548640" y="4640113"/>
             <a:ext cx="11064240" cy="1051560"/>
           </a:xfrm>
           <a:prstGeom prst="roundRect">
@@ -11487,6 +11858,13 @@
           </a:solidFill>
           <a:ln/>
         </p:spPr>
+        <p:txBody>
+          <a:bodyPr/>
+          <a:lstStyle/>
+          <a:p>
+            <a:endParaRPr lang="es-CO"/>
+          </a:p>
+        </p:txBody>
       </p:sp>
       <p:sp>
         <p:nvSpPr>
@@ -11509,7 +11887,7 @@
           <a:bodyPr wrap="square" lIns="0" tIns="0" rIns="0" bIns="0" rtlCol="0" anchor="ctr"/>
           <a:lstStyle/>
           <a:p>
-            <a:pPr indent="0" marL="0">
+            <a:pPr marL="0" indent="0">
               <a:lnSpc>
                 <a:spcPct val="120000"/>
               </a:lnSpc>
@@ -11526,90 +11904,29 @@
               </a:rPr>
               <a:t>Marco legal aplicado: </a:t>
             </a:r>
-            <a:pPr indent="0" marL="0">
-              <a:lnSpc>
-                <a:spcPct val="120000"/>
-              </a:lnSpc>
-              <a:buNone/>
-            </a:pPr>
             <a:r>
               <a:rPr lang="en-US" sz="1200" dirty="0">
-                <a:solidFill>
-                  <a:srgbClr val="5A5F73"/>
-                </a:solidFill>
-                <a:latin typeface="Calibri" pitchFamily="34" charset="0"/>
-                <a:ea typeface="Calibri" pitchFamily="34" charset="-122"/>
-                <a:cs typeface="Calibri" pitchFamily="34" charset="-120"/>
-              </a:rPr>
-              <a:t>bajo Ley 1266 de 2008 todas las variables son </a:t>
-            </a:r>
-            <a:pPr indent="0" marL="0">
-              <a:lnSpc>
-                <a:spcPct val="120000"/>
-              </a:lnSpc>
-              <a:buNone/>
-            </a:pPr>
+                <a:latin typeface="Calibri" pitchFamily="34" charset="0"/>
+                <a:ea typeface="Calibri" pitchFamily="34" charset="-122"/>
+                <a:cs typeface="Calibri" pitchFamily="34" charset="-120"/>
+              </a:rPr>
+              <a:t>bajo Ley 1266 de 2008 todas las variables son (dato financiero y crediticio). Ninguna es </a:t>
+            </a:r>
             <a:r>
               <a:rPr lang="en-US" sz="1200" b="1" dirty="0">
-                <a:solidFill>
-                  <a:srgbClr val="B33A3A"/>
-                </a:solidFill>
-                <a:latin typeface="Calibri" pitchFamily="34" charset="0"/>
-                <a:ea typeface="Calibri" pitchFamily="34" charset="-122"/>
-                <a:cs typeface="Calibri" pitchFamily="34" charset="-120"/>
-              </a:rPr>
-              <a:t>semiprivadas</a:t>
-            </a:r>
-            <a:pPr indent="0" marL="0">
-              <a:lnSpc>
-                <a:spcPct val="120000"/>
-              </a:lnSpc>
-              <a:buNone/>
-            </a:pPr>
+                <a:latin typeface="Calibri" pitchFamily="34" charset="0"/>
+                <a:ea typeface="Calibri" pitchFamily="34" charset="-122"/>
+                <a:cs typeface="Calibri" pitchFamily="34" charset="-120"/>
+              </a:rPr>
+              <a:t>sensible</a:t>
+            </a:r>
             <a:r>
               <a:rPr lang="en-US" sz="1200" dirty="0">
-                <a:solidFill>
-                  <a:srgbClr val="5A5F73"/>
-                </a:solidFill>
-                <a:latin typeface="Calibri" pitchFamily="34" charset="0"/>
-                <a:ea typeface="Calibri" pitchFamily="34" charset="-122"/>
-                <a:cs typeface="Calibri" pitchFamily="34" charset="-120"/>
-              </a:rPr>
-              <a:t> (dato financiero y crediticio). Ninguna es </a:t>
-            </a:r>
-            <a:pPr indent="0" marL="0">
-              <a:lnSpc>
-                <a:spcPct val="120000"/>
-              </a:lnSpc>
-              <a:buNone/>
-            </a:pPr>
-            <a:r>
-              <a:rPr lang="en-US" sz="1200" b="1" dirty="0">
-                <a:solidFill>
-                  <a:srgbClr val="B33A3A"/>
-                </a:solidFill>
-                <a:latin typeface="Calibri" pitchFamily="34" charset="0"/>
-                <a:ea typeface="Calibri" pitchFamily="34" charset="-122"/>
-                <a:cs typeface="Calibri" pitchFamily="34" charset="-120"/>
-              </a:rPr>
-              <a:t>sensible</a:t>
-            </a:r>
-            <a:pPr indent="0" marL="0">
-              <a:lnSpc>
-                <a:spcPct val="120000"/>
-              </a:lnSpc>
-              <a:buNone/>
-            </a:pPr>
-            <a:r>
-              <a:rPr lang="en-US" sz="1200" dirty="0">
-                <a:solidFill>
-                  <a:srgbClr val="5A5F73"/>
-                </a:solidFill>
-                <a:latin typeface="Calibri" pitchFamily="34" charset="0"/>
-                <a:ea typeface="Calibri" pitchFamily="34" charset="-122"/>
-                <a:cs typeface="Calibri" pitchFamily="34" charset="-120"/>
-              </a:rPr>
-              <a:t> en el sentido de la Ley 1581 art. 5 (origen racial, salud, biometría).</a:t>
+                <a:latin typeface="Calibri" pitchFamily="34" charset="0"/>
+                <a:ea typeface="Calibri" pitchFamily="34" charset="-122"/>
+                <a:cs typeface="Calibri" pitchFamily="34" charset="-120"/>
+              </a:rPr>
+              <a:t> en el sentido de la Ley 1581 art. 5</a:t>
             </a:r>
             <a:endParaRPr lang="en-US" sz="1200" dirty="0"/>
           </a:p>
@@ -11636,7 +11953,7 @@
           <a:bodyPr wrap="square" lIns="0" tIns="0" rIns="0" bIns="0" rtlCol="0" anchor="ctr"/>
           <a:lstStyle/>
           <a:p>
-            <a:pPr indent="0" marL="0">
+            <a:pPr marL="0" indent="0">
               <a:buNone/>
             </a:pPr>
             <a:r>
@@ -11675,7 +11992,7 @@
           <a:bodyPr wrap="square" lIns="0" tIns="0" rIns="0" bIns="0" rtlCol="0" anchor="ctr"/>
           <a:lstStyle/>
           <a:p>
-            <a:pPr algn="r" indent="0" marL="0">
+            <a:pPr marL="0" indent="0" algn="r">
               <a:buNone/>
             </a:pPr>
             <a:r>
@@ -11739,11 +12056,11 @@
           <a:bodyPr wrap="square" lIns="0" tIns="0" rIns="0" bIns="0" rtlCol="0" anchor="ctr"/>
           <a:lstStyle/>
           <a:p>
-            <a:pPr indent="0" marL="0">
-              <a:buNone/>
-            </a:pPr>
-            <a:r>
-              <a:rPr lang="en-US" sz="1300" b="1" spc="200" kern="0" dirty="0">
+            <a:pPr marL="0" indent="0">
+              <a:buNone/>
+            </a:pPr>
+            <a:r>
+              <a:rPr lang="en-US" sz="1300" b="1" kern="0" spc="200" dirty="0">
                 <a:solidFill>
                   <a:srgbClr val="B33A3A"/>
                 </a:solidFill>
@@ -11778,7 +12095,7 @@
           <a:bodyPr wrap="square" lIns="0" tIns="0" rIns="0" bIns="0" rtlCol="0" anchor="ctr"/>
           <a:lstStyle/>
           <a:p>
-            <a:pPr indent="0" marL="0">
+            <a:pPr marL="0" indent="0">
               <a:buNone/>
             </a:pPr>
             <a:r>
@@ -11790,7 +12107,40 @@
                 <a:ea typeface="Cambria" pitchFamily="34" charset="-122"/>
                 <a:cs typeface="Cambria" pitchFamily="34" charset="-120"/>
               </a:rPr>
-              <a:t>Tres errores que el diccionario destapó</a:t>
+              <a:t>Tres errores que el diccionario </a:t>
+            </a:r>
+            <a:r>
+              <a:rPr lang="en-US" sz="3000" b="1" dirty="0" err="1">
+                <a:solidFill>
+                  <a:srgbClr val="1E2761"/>
+                </a:solidFill>
+                <a:latin typeface="Cambria" pitchFamily="34" charset="0"/>
+                <a:ea typeface="Cambria" pitchFamily="34" charset="-122"/>
+                <a:cs typeface="Cambria" pitchFamily="34" charset="-120"/>
+              </a:rPr>
+              <a:t>permitió</a:t>
+            </a:r>
+            <a:r>
+              <a:rPr lang="en-US" sz="3000" b="1" dirty="0">
+                <a:solidFill>
+                  <a:srgbClr val="1E2761"/>
+                </a:solidFill>
+                <a:latin typeface="Cambria" pitchFamily="34" charset="0"/>
+                <a:ea typeface="Cambria" pitchFamily="34" charset="-122"/>
+                <a:cs typeface="Cambria" pitchFamily="34" charset="-120"/>
+              </a:rPr>
+              <a:t> </a:t>
+            </a:r>
+            <a:r>
+              <a:rPr lang="en-US" sz="3000" b="1" dirty="0" err="1">
+                <a:solidFill>
+                  <a:srgbClr val="1E2761"/>
+                </a:solidFill>
+                <a:latin typeface="Cambria" pitchFamily="34" charset="0"/>
+                <a:ea typeface="Cambria" pitchFamily="34" charset="-122"/>
+                <a:cs typeface="Cambria" pitchFamily="34" charset="-120"/>
+              </a:rPr>
+              <a:t>conocer</a:t>
             </a:r>
             <a:endParaRPr lang="en-US" sz="3000" dirty="0"/>
           </a:p>
@@ -11817,6 +12167,13 @@
           </a:solidFill>
           <a:ln/>
         </p:spPr>
+        <p:txBody>
+          <a:bodyPr/>
+          <a:lstStyle/>
+          <a:p>
+            <a:endParaRPr lang="es-CO"/>
+          </a:p>
+        </p:txBody>
       </p:sp>
       <p:sp>
         <p:nvSpPr>
@@ -11837,6 +12194,13 @@
           </a:solidFill>
           <a:ln/>
         </p:spPr>
+        <p:txBody>
+          <a:bodyPr/>
+          <a:lstStyle/>
+          <a:p>
+            <a:endParaRPr lang="es-CO"/>
+          </a:p>
+        </p:txBody>
       </p:sp>
       <p:sp>
         <p:nvSpPr>
@@ -11859,7 +12223,7 @@
           <a:bodyPr wrap="square" lIns="0" tIns="0" rIns="0" bIns="0" rtlCol="0" anchor="ctr"/>
           <a:lstStyle/>
           <a:p>
-            <a:pPr indent="0" marL="0">
+            <a:pPr marL="0" indent="0">
               <a:buNone/>
             </a:pPr>
             <a:r>
@@ -11898,7 +12262,7 @@
           <a:bodyPr wrap="square" lIns="0" tIns="0" rIns="0" bIns="0" rtlCol="0" anchor="ctr"/>
           <a:lstStyle/>
           <a:p>
-            <a:pPr indent="0" marL="0">
+            <a:pPr marL="0" indent="0">
               <a:lnSpc>
                 <a:spcPct val="115000"/>
               </a:lnSpc>
@@ -11941,6 +12305,13 @@
             <a:prstDash val="solid"/>
           </a:ln>
         </p:spPr>
+        <p:txBody>
+          <a:bodyPr/>
+          <a:lstStyle/>
+          <a:p>
+            <a:endParaRPr lang="es-CO"/>
+          </a:p>
+        </p:txBody>
       </p:sp>
       <p:sp>
         <p:nvSpPr>
@@ -11963,7 +12334,7 @@
           <a:bodyPr wrap="square" lIns="0" tIns="0" rIns="0" bIns="0" rtlCol="0" anchor="ctr"/>
           <a:lstStyle/>
           <a:p>
-            <a:pPr indent="0" marL="0">
+            <a:pPr marL="0" indent="0">
               <a:lnSpc>
                 <a:spcPct val="115000"/>
               </a:lnSpc>
@@ -12005,6 +12376,13 @@
           </a:solidFill>
           <a:ln/>
         </p:spPr>
+        <p:txBody>
+          <a:bodyPr/>
+          <a:lstStyle/>
+          <a:p>
+            <a:endParaRPr lang="es-CO"/>
+          </a:p>
+        </p:txBody>
       </p:sp>
       <p:sp>
         <p:nvSpPr>
@@ -12025,6 +12403,13 @@
           </a:solidFill>
           <a:ln/>
         </p:spPr>
+        <p:txBody>
+          <a:bodyPr/>
+          <a:lstStyle/>
+          <a:p>
+            <a:endParaRPr lang="es-CO"/>
+          </a:p>
+        </p:txBody>
       </p:sp>
       <p:sp>
         <p:nvSpPr>
@@ -12047,7 +12432,7 @@
           <a:bodyPr wrap="square" lIns="0" tIns="0" rIns="0" bIns="0" rtlCol="0" anchor="ctr"/>
           <a:lstStyle/>
           <a:p>
-            <a:pPr indent="0" marL="0">
+            <a:pPr marL="0" indent="0">
               <a:buNone/>
             </a:pPr>
             <a:r>
@@ -12086,7 +12471,7 @@
           <a:bodyPr wrap="square" lIns="0" tIns="0" rIns="0" bIns="0" rtlCol="0" anchor="ctr"/>
           <a:lstStyle/>
           <a:p>
-            <a:pPr indent="0" marL="0">
+            <a:pPr marL="0" indent="0">
               <a:lnSpc>
                 <a:spcPct val="115000"/>
               </a:lnSpc>
@@ -12129,6 +12514,13 @@
             <a:prstDash val="solid"/>
           </a:ln>
         </p:spPr>
+        <p:txBody>
+          <a:bodyPr/>
+          <a:lstStyle/>
+          <a:p>
+            <a:endParaRPr lang="es-CO"/>
+          </a:p>
+        </p:txBody>
       </p:sp>
       <p:sp>
         <p:nvSpPr>
@@ -12151,7 +12543,7 @@
           <a:bodyPr wrap="square" lIns="0" tIns="0" rIns="0" bIns="0" rtlCol="0" anchor="ctr"/>
           <a:lstStyle/>
           <a:p>
-            <a:pPr indent="0" marL="0">
+            <a:pPr marL="0" indent="0">
               <a:lnSpc>
                 <a:spcPct val="115000"/>
               </a:lnSpc>
@@ -12193,6 +12585,13 @@
           </a:solidFill>
           <a:ln/>
         </p:spPr>
+        <p:txBody>
+          <a:bodyPr/>
+          <a:lstStyle/>
+          <a:p>
+            <a:endParaRPr lang="es-CO"/>
+          </a:p>
+        </p:txBody>
       </p:sp>
       <p:sp>
         <p:nvSpPr>
@@ -12213,6 +12612,13 @@
           </a:solidFill>
           <a:ln/>
         </p:spPr>
+        <p:txBody>
+          <a:bodyPr/>
+          <a:lstStyle/>
+          <a:p>
+            <a:endParaRPr lang="es-CO"/>
+          </a:p>
+        </p:txBody>
       </p:sp>
       <p:sp>
         <p:nvSpPr>
@@ -12235,7 +12641,7 @@
           <a:bodyPr wrap="square" lIns="0" tIns="0" rIns="0" bIns="0" rtlCol="0" anchor="ctr"/>
           <a:lstStyle/>
           <a:p>
-            <a:pPr indent="0" marL="0">
+            <a:pPr marL="0" indent="0">
               <a:buNone/>
             </a:pPr>
             <a:r>
@@ -12274,7 +12680,7 @@
           <a:bodyPr wrap="square" lIns="0" tIns="0" rIns="0" bIns="0" rtlCol="0" anchor="ctr"/>
           <a:lstStyle/>
           <a:p>
-            <a:pPr indent="0" marL="0">
+            <a:pPr marL="0" indent="0">
               <a:lnSpc>
                 <a:spcPct val="115000"/>
               </a:lnSpc>
@@ -12317,6 +12723,13 @@
             <a:prstDash val="solid"/>
           </a:ln>
         </p:spPr>
+        <p:txBody>
+          <a:bodyPr/>
+          <a:lstStyle/>
+          <a:p>
+            <a:endParaRPr lang="es-CO"/>
+          </a:p>
+        </p:txBody>
       </p:sp>
       <p:sp>
         <p:nvSpPr>
@@ -12339,7 +12752,7 @@
           <a:bodyPr wrap="square" lIns="0" tIns="0" rIns="0" bIns="0" rtlCol="0" anchor="ctr"/>
           <a:lstStyle/>
           <a:p>
-            <a:pPr indent="0" marL="0">
+            <a:pPr marL="0" indent="0">
               <a:lnSpc>
                 <a:spcPct val="115000"/>
               </a:lnSpc>
@@ -12381,11 +12794,11 @@
           <a:bodyPr wrap="square" lIns="0" tIns="0" rIns="0" bIns="0" rtlCol="0" anchor="ctr"/>
           <a:lstStyle/>
           <a:p>
-            <a:pPr indent="0" marL="0">
-              <a:buNone/>
-            </a:pPr>
-            <a:r>
-              <a:rPr lang="en-US" sz="1000" b="1" spc="100" kern="0" dirty="0">
+            <a:pPr marL="0" indent="0">
+              <a:buNone/>
+            </a:pPr>
+            <a:r>
+              <a:rPr lang="en-US" sz="1000" b="1" kern="0" spc="100" dirty="0">
                 <a:solidFill>
                   <a:srgbClr val="5A5F73"/>
                 </a:solidFill>
@@ -12420,11 +12833,11 @@
           <a:bodyPr wrap="square" lIns="0" tIns="0" rIns="0" bIns="0" rtlCol="0" anchor="ctr"/>
           <a:lstStyle/>
           <a:p>
-            <a:pPr indent="0" marL="0">
-              <a:buNone/>
-            </a:pPr>
-            <a:r>
-              <a:rPr lang="en-US" sz="1000" b="1" spc="100" kern="0" dirty="0">
+            <a:pPr marL="0" indent="0">
+              <a:buNone/>
+            </a:pPr>
+            <a:r>
+              <a:rPr lang="en-US" sz="1000" b="1" kern="0" spc="100" dirty="0">
                 <a:solidFill>
                   <a:srgbClr val="B33A3A"/>
                 </a:solidFill>
@@ -12459,7 +12872,7 @@
           <a:bodyPr wrap="square" lIns="0" tIns="0" rIns="0" bIns="0" rtlCol="0" anchor="ctr"/>
           <a:lstStyle/>
           <a:p>
-            <a:pPr indent="0" marL="0">
+            <a:pPr marL="0" indent="0">
               <a:buNone/>
             </a:pPr>
             <a:r>
@@ -12498,7 +12911,7 @@
           <a:bodyPr wrap="square" lIns="0" tIns="0" rIns="0" bIns="0" rtlCol="0" anchor="ctr"/>
           <a:lstStyle/>
           <a:p>
-            <a:pPr algn="r" indent="0" marL="0">
+            <a:pPr marL="0" indent="0" algn="r">
               <a:buNone/>
             </a:pPr>
             <a:r>
@@ -12562,11 +12975,11 @@
           <a:bodyPr wrap="square" lIns="0" tIns="0" rIns="0" bIns="0" rtlCol="0" anchor="ctr"/>
           <a:lstStyle/>
           <a:p>
-            <a:pPr indent="0" marL="0">
-              <a:buNone/>
-            </a:pPr>
-            <a:r>
-              <a:rPr lang="en-US" sz="1300" b="1" spc="200" kern="0" dirty="0">
+            <a:pPr marL="0" indent="0">
+              <a:buNone/>
+            </a:pPr>
+            <a:r>
+              <a:rPr lang="en-US" sz="1300" b="1" kern="0" spc="200" dirty="0">
                 <a:solidFill>
                   <a:srgbClr val="B33A3A"/>
                 </a:solidFill>
@@ -12601,7 +13014,7 @@
           <a:bodyPr wrap="square" lIns="0" tIns="0" rIns="0" bIns="0" rtlCol="0" anchor="ctr"/>
           <a:lstStyle/>
           <a:p>
-            <a:pPr indent="0" marL="0">
+            <a:pPr marL="0" indent="0">
               <a:buNone/>
             </a:pPr>
             <a:r>
@@ -12638,6 +13051,13 @@
           </a:solidFill>
           <a:ln/>
         </p:spPr>
+        <p:txBody>
+          <a:bodyPr/>
+          <a:lstStyle/>
+          <a:p>
+            <a:endParaRPr lang="es-CO"/>
+          </a:p>
+        </p:txBody>
       </p:sp>
       <p:sp>
         <p:nvSpPr>
@@ -12660,7 +13080,7 @@
           <a:bodyPr wrap="square" lIns="0" tIns="0" rIns="0" bIns="0" rtlCol="0" anchor="ctr"/>
           <a:lstStyle/>
           <a:p>
-            <a:pPr algn="ctr" indent="0" marL="0">
+            <a:pPr marL="0" indent="0" algn="ctr">
               <a:buNone/>
             </a:pPr>
             <a:r>
@@ -12699,7 +13119,7 @@
           <a:bodyPr wrap="square" lIns="0" tIns="0" rIns="0" bIns="0" rtlCol="0" anchor="t"/>
           <a:lstStyle/>
           <a:p>
-            <a:pPr indent="0" marL="0">
+            <a:pPr marL="0" indent="0">
               <a:buNone/>
             </a:pPr>
             <a:r>
@@ -12738,7 +13158,7 @@
           <a:bodyPr wrap="square" lIns="0" tIns="0" rIns="0" bIns="0" rtlCol="0" anchor="t"/>
           <a:lstStyle/>
           <a:p>
-            <a:pPr indent="0" marL="0">
+            <a:pPr marL="0" indent="0">
               <a:lnSpc>
                 <a:spcPct val="120000"/>
               </a:lnSpc>
@@ -12781,6 +13201,13 @@
             <a:prstDash val="solid"/>
           </a:ln>
         </p:spPr>
+        <p:txBody>
+          <a:bodyPr/>
+          <a:lstStyle/>
+          <a:p>
+            <a:endParaRPr lang="es-CO"/>
+          </a:p>
+        </p:txBody>
       </p:sp>
       <p:sp>
         <p:nvSpPr>
@@ -12801,6 +13228,13 @@
           </a:solidFill>
           <a:ln/>
         </p:spPr>
+        <p:txBody>
+          <a:bodyPr/>
+          <a:lstStyle/>
+          <a:p>
+            <a:endParaRPr lang="es-CO"/>
+          </a:p>
+        </p:txBody>
       </p:sp>
       <p:sp>
         <p:nvSpPr>
@@ -12823,7 +13257,7 @@
           <a:bodyPr wrap="square" lIns="0" tIns="0" rIns="0" bIns="0" rtlCol="0" anchor="ctr"/>
           <a:lstStyle/>
           <a:p>
-            <a:pPr algn="ctr" indent="0" marL="0">
+            <a:pPr marL="0" indent="0" algn="ctr">
               <a:buNone/>
             </a:pPr>
             <a:r>
@@ -12862,7 +13296,7 @@
           <a:bodyPr wrap="square" lIns="0" tIns="0" rIns="0" bIns="0" rtlCol="0" anchor="t"/>
           <a:lstStyle/>
           <a:p>
-            <a:pPr indent="0" marL="0">
+            <a:pPr marL="0" indent="0">
               <a:buNone/>
             </a:pPr>
             <a:r>
@@ -12901,7 +13335,7 @@
           <a:bodyPr wrap="square" lIns="0" tIns="0" rIns="0" bIns="0" rtlCol="0" anchor="t"/>
           <a:lstStyle/>
           <a:p>
-            <a:pPr indent="0" marL="0">
+            <a:pPr marL="0" indent="0">
               <a:lnSpc>
                 <a:spcPct val="120000"/>
               </a:lnSpc>
@@ -12944,6 +13378,13 @@
             <a:prstDash val="solid"/>
           </a:ln>
         </p:spPr>
+        <p:txBody>
+          <a:bodyPr/>
+          <a:lstStyle/>
+          <a:p>
+            <a:endParaRPr lang="es-CO"/>
+          </a:p>
+        </p:txBody>
       </p:sp>
       <p:sp>
         <p:nvSpPr>
@@ -12964,6 +13405,13 @@
           </a:solidFill>
           <a:ln/>
         </p:spPr>
+        <p:txBody>
+          <a:bodyPr/>
+          <a:lstStyle/>
+          <a:p>
+            <a:endParaRPr lang="es-CO"/>
+          </a:p>
+        </p:txBody>
       </p:sp>
       <p:sp>
         <p:nvSpPr>
@@ -12986,7 +13434,7 @@
           <a:bodyPr wrap="square" lIns="0" tIns="0" rIns="0" bIns="0" rtlCol="0" anchor="ctr"/>
           <a:lstStyle/>
           <a:p>
-            <a:pPr algn="ctr" indent="0" marL="0">
+            <a:pPr marL="0" indent="0" algn="ctr">
               <a:buNone/>
             </a:pPr>
             <a:r>
@@ -13025,7 +13473,7 @@
           <a:bodyPr wrap="square" lIns="0" tIns="0" rIns="0" bIns="0" rtlCol="0" anchor="t"/>
           <a:lstStyle/>
           <a:p>
-            <a:pPr indent="0" marL="0">
+            <a:pPr marL="0" indent="0">
               <a:buNone/>
             </a:pPr>
             <a:r>
@@ -13064,7 +13512,7 @@
           <a:bodyPr wrap="square" lIns="0" tIns="0" rIns="0" bIns="0" rtlCol="0" anchor="t"/>
           <a:lstStyle/>
           <a:p>
-            <a:pPr indent="0" marL="0">
+            <a:pPr marL="0" indent="0">
               <a:lnSpc>
                 <a:spcPct val="120000"/>
               </a:lnSpc>
@@ -13107,6 +13555,13 @@
             <a:prstDash val="solid"/>
           </a:ln>
         </p:spPr>
+        <p:txBody>
+          <a:bodyPr/>
+          <a:lstStyle/>
+          <a:p>
+            <a:endParaRPr lang="es-CO"/>
+          </a:p>
+        </p:txBody>
       </p:sp>
       <p:sp>
         <p:nvSpPr>
@@ -13127,6 +13582,13 @@
           </a:solidFill>
           <a:ln/>
         </p:spPr>
+        <p:txBody>
+          <a:bodyPr/>
+          <a:lstStyle/>
+          <a:p>
+            <a:endParaRPr lang="es-CO"/>
+          </a:p>
+        </p:txBody>
       </p:sp>
       <p:sp>
         <p:nvSpPr>
@@ -13149,7 +13611,7 @@
           <a:bodyPr wrap="square" lIns="0" tIns="0" rIns="0" bIns="0" rtlCol="0" anchor="ctr"/>
           <a:lstStyle/>
           <a:p>
-            <a:pPr algn="ctr" indent="0" marL="0">
+            <a:pPr marL="0" indent="0" algn="ctr">
               <a:buNone/>
             </a:pPr>
             <a:r>
@@ -13188,7 +13650,7 @@
           <a:bodyPr wrap="square" lIns="0" tIns="0" rIns="0" bIns="0" rtlCol="0" anchor="t"/>
           <a:lstStyle/>
           <a:p>
-            <a:pPr indent="0" marL="0">
+            <a:pPr marL="0" indent="0">
               <a:buNone/>
             </a:pPr>
             <a:r>
@@ -13227,7 +13689,7 @@
           <a:bodyPr wrap="square" lIns="0" tIns="0" rIns="0" bIns="0" rtlCol="0" anchor="t"/>
           <a:lstStyle/>
           <a:p>
-            <a:pPr indent="0" marL="0">
+            <a:pPr marL="0" indent="0">
               <a:lnSpc>
                 <a:spcPct val="120000"/>
               </a:lnSpc>
@@ -13269,7 +13731,7 @@
           <a:bodyPr wrap="square" lIns="0" tIns="0" rIns="0" bIns="0" rtlCol="0" anchor="ctr"/>
           <a:lstStyle/>
           <a:p>
-            <a:pPr indent="0" marL="0">
+            <a:pPr marL="0" indent="0">
               <a:buNone/>
             </a:pPr>
             <a:r>
@@ -13308,7 +13770,7 @@
           <a:bodyPr wrap="square" lIns="0" tIns="0" rIns="0" bIns="0" rtlCol="0" anchor="ctr"/>
           <a:lstStyle/>
           <a:p>
-            <a:pPr algn="r" indent="0" marL="0">
+            <a:pPr marL="0" indent="0" algn="r">
               <a:buNone/>
             </a:pPr>
             <a:r>
@@ -13372,11 +13834,11 @@
           <a:bodyPr wrap="square" lIns="0" tIns="0" rIns="0" bIns="0" rtlCol="0" anchor="ctr"/>
           <a:lstStyle/>
           <a:p>
-            <a:pPr indent="0" marL="0">
-              <a:buNone/>
-            </a:pPr>
-            <a:r>
-              <a:rPr lang="en-US" sz="1300" b="1" spc="200" kern="0" dirty="0">
+            <a:pPr marL="0" indent="0">
+              <a:buNone/>
+            </a:pPr>
+            <a:r>
+              <a:rPr lang="en-US" sz="1300" b="1" kern="0" spc="200" dirty="0">
                 <a:solidFill>
                   <a:srgbClr val="B33A3A"/>
                 </a:solidFill>
@@ -13411,7 +13873,7 @@
           <a:bodyPr wrap="square" lIns="0" tIns="0" rIns="0" bIns="0" rtlCol="0" anchor="ctr"/>
           <a:lstStyle/>
           <a:p>
-            <a:pPr indent="0" marL="0">
+            <a:pPr marL="0" indent="0">
               <a:buNone/>
             </a:pPr>
             <a:r>
@@ -13450,6 +13912,13 @@
           </a:solidFill>
           <a:ln/>
         </p:spPr>
+        <p:txBody>
+          <a:bodyPr/>
+          <a:lstStyle/>
+          <a:p>
+            <a:endParaRPr lang="es-CO"/>
+          </a:p>
+        </p:txBody>
       </p:sp>
       <p:sp>
         <p:nvSpPr>
@@ -13470,6 +13939,13 @@
           </a:solidFill>
           <a:ln/>
         </p:spPr>
+        <p:txBody>
+          <a:bodyPr/>
+          <a:lstStyle/>
+          <a:p>
+            <a:endParaRPr lang="es-CO"/>
+          </a:p>
+        </p:txBody>
       </p:sp>
       <p:sp>
         <p:nvSpPr>
@@ -13492,7 +13968,7 @@
           <a:bodyPr wrap="square" lIns="0" tIns="0" rIns="0" bIns="0" rtlCol="0" anchor="ctr"/>
           <a:lstStyle/>
           <a:p>
-            <a:pPr indent="0" marL="0">
+            <a:pPr marL="0" indent="0">
               <a:buNone/>
             </a:pPr>
             <a:r>
@@ -13531,7 +14007,7 @@
           <a:bodyPr wrap="square" lIns="0" tIns="0" rIns="0" bIns="0" rtlCol="0" anchor="ctr"/>
           <a:lstStyle/>
           <a:p>
-            <a:pPr indent="0" marL="0">
+            <a:pPr marL="0" indent="0">
               <a:lnSpc>
                 <a:spcPct val="120000"/>
               </a:lnSpc>
@@ -13573,6 +14049,13 @@
           </a:solidFill>
           <a:ln/>
         </p:spPr>
+        <p:txBody>
+          <a:bodyPr/>
+          <a:lstStyle/>
+          <a:p>
+            <a:endParaRPr lang="es-CO"/>
+          </a:p>
+        </p:txBody>
       </p:sp>
       <p:sp>
         <p:nvSpPr>
@@ -13593,6 +14076,13 @@
           </a:solidFill>
           <a:ln/>
         </p:spPr>
+        <p:txBody>
+          <a:bodyPr/>
+          <a:lstStyle/>
+          <a:p>
+            <a:endParaRPr lang="es-CO"/>
+          </a:p>
+        </p:txBody>
       </p:sp>
       <p:sp>
         <p:nvSpPr>
@@ -13615,7 +14105,7 @@
           <a:bodyPr wrap="square" lIns="0" tIns="0" rIns="0" bIns="0" rtlCol="0" anchor="ctr"/>
           <a:lstStyle/>
           <a:p>
-            <a:pPr indent="0" marL="0">
+            <a:pPr marL="0" indent="0">
               <a:buNone/>
             </a:pPr>
             <a:r>
@@ -13654,7 +14144,7 @@
           <a:bodyPr wrap="square" lIns="0" tIns="0" rIns="0" bIns="0" rtlCol="0" anchor="ctr"/>
           <a:lstStyle/>
           <a:p>
-            <a:pPr indent="0" marL="0">
+            <a:pPr marL="0" indent="0">
               <a:lnSpc>
                 <a:spcPct val="120000"/>
               </a:lnSpc>
@@ -13696,6 +14186,13 @@
           </a:solidFill>
           <a:ln/>
         </p:spPr>
+        <p:txBody>
+          <a:bodyPr/>
+          <a:lstStyle/>
+          <a:p>
+            <a:endParaRPr lang="es-CO"/>
+          </a:p>
+        </p:txBody>
       </p:sp>
       <p:sp>
         <p:nvSpPr>
@@ -13716,6 +14213,13 @@
           </a:solidFill>
           <a:ln/>
         </p:spPr>
+        <p:txBody>
+          <a:bodyPr/>
+          <a:lstStyle/>
+          <a:p>
+            <a:endParaRPr lang="es-CO"/>
+          </a:p>
+        </p:txBody>
       </p:sp>
       <p:sp>
         <p:nvSpPr>
@@ -13738,7 +14242,7 @@
           <a:bodyPr wrap="square" lIns="0" tIns="0" rIns="0" bIns="0" rtlCol="0" anchor="ctr"/>
           <a:lstStyle/>
           <a:p>
-            <a:pPr indent="0" marL="0">
+            <a:pPr marL="0" indent="0">
               <a:buNone/>
             </a:pPr>
             <a:r>
@@ -13777,7 +14281,7 @@
           <a:bodyPr wrap="square" lIns="0" tIns="0" rIns="0" bIns="0" rtlCol="0" anchor="ctr"/>
           <a:lstStyle/>
           <a:p>
-            <a:pPr indent="0" marL="0">
+            <a:pPr marL="0" indent="0">
               <a:lnSpc>
                 <a:spcPct val="120000"/>
               </a:lnSpc>
@@ -13819,6 +14323,13 @@
           </a:solidFill>
           <a:ln/>
         </p:spPr>
+        <p:txBody>
+          <a:bodyPr/>
+          <a:lstStyle/>
+          <a:p>
+            <a:endParaRPr lang="es-CO"/>
+          </a:p>
+        </p:txBody>
       </p:sp>
       <p:sp>
         <p:nvSpPr>
@@ -13839,6 +14350,13 @@
           </a:solidFill>
           <a:ln/>
         </p:spPr>
+        <p:txBody>
+          <a:bodyPr/>
+          <a:lstStyle/>
+          <a:p>
+            <a:endParaRPr lang="es-CO"/>
+          </a:p>
+        </p:txBody>
       </p:sp>
       <p:sp>
         <p:nvSpPr>
@@ -13861,7 +14379,7 @@
           <a:bodyPr wrap="square" lIns="0" tIns="0" rIns="0" bIns="0" rtlCol="0" anchor="ctr"/>
           <a:lstStyle/>
           <a:p>
-            <a:pPr indent="0" marL="0">
+            <a:pPr marL="0" indent="0">
               <a:buNone/>
             </a:pPr>
             <a:r>
@@ -13900,7 +14418,7 @@
           <a:bodyPr wrap="square" lIns="0" tIns="0" rIns="0" bIns="0" rtlCol="0" anchor="ctr"/>
           <a:lstStyle/>
           <a:p>
-            <a:pPr indent="0" marL="0">
+            <a:pPr marL="0" indent="0">
               <a:lnSpc>
                 <a:spcPct val="120000"/>
               </a:lnSpc>
@@ -13942,7 +14460,7 @@
           <a:bodyPr wrap="square" lIns="0" tIns="0" rIns="0" bIns="0" rtlCol="0" anchor="ctr"/>
           <a:lstStyle/>
           <a:p>
-            <a:pPr indent="0" marL="0">
+            <a:pPr marL="0" indent="0">
               <a:buNone/>
             </a:pPr>
             <a:r>
@@ -13981,7 +14499,7 @@
           <a:bodyPr wrap="square" lIns="0" tIns="0" rIns="0" bIns="0" rtlCol="0" anchor="ctr"/>
           <a:lstStyle/>
           <a:p>
-            <a:pPr algn="r" indent="0" marL="0">
+            <a:pPr marL="0" indent="0" algn="r">
               <a:buNone/>
             </a:pPr>
             <a:r>
@@ -14045,11 +14563,11 @@
           <a:bodyPr wrap="square" lIns="0" tIns="0" rIns="0" bIns="0" rtlCol="0" anchor="ctr"/>
           <a:lstStyle/>
           <a:p>
-            <a:pPr indent="0" marL="0">
-              <a:buNone/>
-            </a:pPr>
-            <a:r>
-              <a:rPr lang="en-US" sz="1300" b="1" spc="200" kern="0" dirty="0">
+            <a:pPr marL="0" indent="0">
+              <a:buNone/>
+            </a:pPr>
+            <a:r>
+              <a:rPr lang="en-US" sz="1300" b="1" kern="0" spc="200" dirty="0">
                 <a:solidFill>
                   <a:srgbClr val="B33A3A"/>
                 </a:solidFill>
@@ -14084,7 +14602,7 @@
           <a:bodyPr wrap="square" lIns="0" tIns="0" rIns="0" bIns="0" rtlCol="0" anchor="ctr"/>
           <a:lstStyle/>
           <a:p>
-            <a:pPr indent="0" marL="0">
+            <a:pPr marL="0" indent="0">
               <a:buNone/>
             </a:pPr>
             <a:r>
@@ -14104,7 +14622,7 @@
       </p:sp>
       <p:graphicFrame>
         <p:nvGraphicFramePr>
-          <p:cNvPr id="4" name="Chart 0" descr=""/>
+          <p:cNvPr id="4" name="Chart 0"/>
           <p:cNvGraphicFramePr/>
           <p:nvPr/>
         </p:nvGraphicFramePr>
@@ -14112,9 +14630,9 @@
           <a:off x="548640" y="1874520"/>
           <a:ext cx="4937760" cy="4206240"/>
         </p:xfrm>
-        <a:graphic xmlns:a="http://schemas.openxmlformats.org/drawingml/2006/main">
+        <a:graphic>
           <a:graphicData uri="http://schemas.openxmlformats.org/drawingml/2006/chart">
-            <c:chart xmlns:c="http://schemas.openxmlformats.org/drawingml/2006/chart" r:id="rId1"/>
+            <c:chart xmlns:c="http://schemas.openxmlformats.org/drawingml/2006/chart" xmlns:r="http://schemas.openxmlformats.org/officeDocument/2006/relationships" r:id="rId3"/>
           </a:graphicData>
         </a:graphic>
       </p:graphicFrame>
@@ -14139,7 +14657,7 @@
           <a:bodyPr wrap="square" lIns="0" tIns="0" rIns="0" bIns="0" rtlCol="0" anchor="ctr"/>
           <a:lstStyle/>
           <a:p>
-            <a:pPr indent="0" marL="0">
+            <a:pPr marL="0" indent="0">
               <a:buNone/>
             </a:pPr>
             <a:r>
@@ -14178,7 +14696,7 @@
           <a:bodyPr wrap="square" lIns="0" tIns="0" rIns="0" bIns="0" rtlCol="0" anchor="ctr"/>
           <a:lstStyle/>
           <a:p>
-            <a:pPr indent="0" marL="0">
+            <a:pPr marL="0" indent="0">
               <a:buNone/>
             </a:pPr>
             <a:r>
@@ -14217,7 +14735,7 @@
           <a:bodyPr wrap="square" lIns="0" tIns="0" rIns="0" bIns="0" rtlCol="0" anchor="ctr"/>
           <a:lstStyle/>
           <a:p>
-            <a:pPr indent="0" marL="0">
+            <a:pPr marL="0" indent="0">
               <a:lnSpc>
                 <a:spcPct val="125000"/>
               </a:lnSpc>
@@ -14259,6 +14777,13 @@
           </a:solidFill>
           <a:ln/>
         </p:spPr>
+        <p:txBody>
+          <a:bodyPr/>
+          <a:lstStyle/>
+          <a:p>
+            <a:endParaRPr lang="es-CO"/>
+          </a:p>
+        </p:txBody>
       </p:sp>
       <p:sp>
         <p:nvSpPr>
@@ -14281,7 +14806,7 @@
           <a:bodyPr wrap="square" lIns="0" tIns="0" rIns="0" bIns="0" rtlCol="0" anchor="ctr"/>
           <a:lstStyle/>
           <a:p>
-            <a:pPr indent="0" marL="0">
+            <a:pPr marL="0" indent="0">
               <a:lnSpc>
                 <a:spcPct val="120000"/>
               </a:lnSpc>
@@ -14298,12 +14823,6 @@
               </a:rPr>
               <a:t>Implicación: </a:t>
             </a:r>
-            <a:pPr indent="0" marL="0">
-              <a:lnSpc>
-                <a:spcPct val="120000"/>
-              </a:lnSpc>
-              <a:buNone/>
-            </a:pPr>
             <a:r>
               <a:rPr lang="en-US" sz="1250" dirty="0">
                 <a:solidFill>
@@ -14340,7 +14859,7 @@
           <a:bodyPr wrap="square" lIns="0" tIns="0" rIns="0" bIns="0" rtlCol="0" anchor="ctr"/>
           <a:lstStyle/>
           <a:p>
-            <a:pPr indent="0" marL="0">
+            <a:pPr marL="0" indent="0">
               <a:buNone/>
             </a:pPr>
             <a:r>
@@ -14379,7 +14898,7 @@
           <a:bodyPr wrap="square" lIns="0" tIns="0" rIns="0" bIns="0" rtlCol="0" anchor="ctr"/>
           <a:lstStyle/>
           <a:p>
-            <a:pPr algn="r" indent="0" marL="0">
+            <a:pPr marL="0" indent="0" algn="r">
               <a:buNone/>
             </a:pPr>
             <a:r>
@@ -14443,11 +14962,11 @@
           <a:bodyPr wrap="square" lIns="0" tIns="0" rIns="0" bIns="0" rtlCol="0" anchor="ctr"/>
           <a:lstStyle/>
           <a:p>
-            <a:pPr indent="0" marL="0">
-              <a:buNone/>
-            </a:pPr>
-            <a:r>
-              <a:rPr lang="en-US" sz="1300" b="1" spc="200" kern="0" dirty="0">
+            <a:pPr marL="0" indent="0">
+              <a:buNone/>
+            </a:pPr>
+            <a:r>
+              <a:rPr lang="en-US" sz="1300" b="1" kern="0" spc="200" dirty="0">
                 <a:solidFill>
                   <a:srgbClr val="B33A3A"/>
                 </a:solidFill>
@@ -14482,7 +15001,7 @@
           <a:bodyPr wrap="square" lIns="0" tIns="0" rIns="0" bIns="0" rtlCol="0" anchor="ctr"/>
           <a:lstStyle/>
           <a:p>
-            <a:pPr indent="0" marL="0">
+            <a:pPr marL="0" indent="0">
               <a:buNone/>
             </a:pPr>
             <a:r>
@@ -14502,7 +15021,7 @@
       </p:sp>
       <p:graphicFrame>
         <p:nvGraphicFramePr>
-          <p:cNvPr id="4" name="Chart 0" descr=""/>
+          <p:cNvPr id="4" name="Chart 0"/>
           <p:cNvGraphicFramePr/>
           <p:nvPr/>
         </p:nvGraphicFramePr>
@@ -14510,9 +15029,9 @@
           <a:off x="548640" y="1920240"/>
           <a:ext cx="5760720" cy="4023360"/>
         </p:xfrm>
-        <a:graphic xmlns:a="http://schemas.openxmlformats.org/drawingml/2006/main">
+        <a:graphic>
           <a:graphicData uri="http://schemas.openxmlformats.org/drawingml/2006/chart">
-            <c:chart xmlns:c="http://schemas.openxmlformats.org/drawingml/2006/chart" r:id="rId1"/>
+            <c:chart xmlns:c="http://schemas.openxmlformats.org/drawingml/2006/chart" xmlns:r="http://schemas.openxmlformats.org/officeDocument/2006/relationships" r:id="rId3"/>
           </a:graphicData>
         </a:graphic>
       </p:graphicFrame>
@@ -14537,7 +15056,7 @@
           <a:bodyPr wrap="square" lIns="0" tIns="0" rIns="0" bIns="0" rtlCol="0" anchor="ctr"/>
           <a:lstStyle/>
           <a:p>
-            <a:pPr indent="0" marL="0">
+            <a:pPr marL="0" indent="0">
               <a:buNone/>
             </a:pPr>
             <a:r>
@@ -14576,7 +15095,7 @@
           <a:bodyPr wrap="square" lIns="0" tIns="0" rIns="0" bIns="0" rtlCol="0" anchor="ctr"/>
           <a:lstStyle/>
           <a:p>
-            <a:pPr indent="0" marL="0">
+            <a:pPr marL="0" indent="0">
               <a:lnSpc>
                 <a:spcPct val="120000"/>
               </a:lnSpc>
@@ -14618,6 +15137,13 @@
           </a:solidFill>
           <a:ln/>
         </p:spPr>
+        <p:txBody>
+          <a:bodyPr/>
+          <a:lstStyle/>
+          <a:p>
+            <a:endParaRPr lang="es-CO"/>
+          </a:p>
+        </p:txBody>
       </p:sp>
       <p:sp>
         <p:nvSpPr>
@@ -14640,7 +15166,7 @@
           <a:bodyPr wrap="square" lIns="0" tIns="0" rIns="0" bIns="0" rtlCol="0" anchor="t"/>
           <a:lstStyle/>
           <a:p>
-            <a:pPr indent="0" marL="0">
+            <a:pPr marL="0" indent="0">
               <a:lnSpc>
                 <a:spcPct val="120000"/>
               </a:lnSpc>
@@ -14657,34 +15183,28 @@
               </a:rPr>
               <a:t>Correlación más alta de todo el análisis </a:t>
             </a:r>
-            <a:pPr indent="0" marL="0">
+            <a:r>
+              <a:rPr lang="en-US" sz="1200" dirty="0">
+                <a:solidFill>
+                  <a:srgbClr val="5A5F73"/>
+                </a:solidFill>
+                <a:latin typeface="Calibri" pitchFamily="34" charset="0"/>
+                <a:ea typeface="Calibri" pitchFamily="34" charset="-122"/>
+                <a:cs typeface="Calibri" pitchFamily="34" charset="-120"/>
+              </a:rPr>
+              <a:t>(r = 0.107), por encima de cualquier variable original del dataset.
+</a:t>
+            </a:r>
+            <a:endParaRPr lang="en-US" sz="1200" dirty="0"/>
+          </a:p>
+          <a:p>
+            <a:pPr marL="0" indent="0">
               <a:lnSpc>
                 <a:spcPct val="120000"/>
               </a:lnSpc>
               <a:buNone/>
             </a:pPr>
             <a:r>
-              <a:rPr lang="en-US" sz="1200" dirty="0">
-                <a:solidFill>
-                  <a:srgbClr val="5A5F73"/>
-                </a:solidFill>
-                <a:latin typeface="Calibri" pitchFamily="34" charset="0"/>
-                <a:ea typeface="Calibri" pitchFamily="34" charset="-122"/>
-                <a:cs typeface="Calibri" pitchFamily="34" charset="-120"/>
-              </a:rPr>
-              <a:t>(r = 0.107), por encima de cualquier variable original del dataset.
-</a:t>
-            </a:r>
-            <a:endParaRPr lang="en-US" sz="1200" dirty="0"/>
-          </a:p>
-          <a:p>
-            <a:pPr indent="0" marL="0">
-              <a:lnSpc>
-                <a:spcPct val="120000"/>
-              </a:lnSpc>
-              <a:buNone/>
-            </a:pPr>
-            <a:r>
               <a:rPr lang="en-US" sz="1200" b="1" dirty="0">
                 <a:solidFill>
                   <a:srgbClr val="B33A3A"/>
@@ -14695,12 +15215,6 @@
               </a:rPr>
               <a:t>Con cautela: </a:t>
             </a:r>
-            <a:pPr indent="0" marL="0">
-              <a:lnSpc>
-                <a:spcPct val="120000"/>
-              </a:lnSpc>
-              <a:buNone/>
-            </a:pPr>
             <a:r>
               <a:rPr lang="en-US" sz="1200" dirty="0">
                 <a:solidFill>
@@ -14737,7 +15251,7 @@
           <a:bodyPr wrap="square" lIns="0" tIns="0" rIns="0" bIns="0" rtlCol="0" anchor="ctr"/>
           <a:lstStyle/>
           <a:p>
-            <a:pPr indent="0" marL="0">
+            <a:pPr marL="0" indent="0">
               <a:buNone/>
             </a:pPr>
             <a:r>
@@ -14776,7 +15290,7 @@
           <a:bodyPr wrap="square" lIns="0" tIns="0" rIns="0" bIns="0" rtlCol="0" anchor="ctr"/>
           <a:lstStyle/>
           <a:p>
-            <a:pPr algn="r" indent="0" marL="0">
+            <a:pPr marL="0" indent="0" algn="r">
               <a:buNone/>
             </a:pPr>
             <a:r>
@@ -15095,4 +15609,319 @@
     </a:ext>
   </a:extLst>
 </a:theme>
+</file>
+
+<file path=ppt/theme/theme2.xml><?xml version="1.0" encoding="utf-8"?>
+<a:theme xmlns:a="http://schemas.openxmlformats.org/drawingml/2006/main" name="Tema de Office">
+  <a:themeElements>
+    <a:clrScheme name="Office">
+      <a:dk1>
+        <a:sysClr val="windowText" lastClr="000000"/>
+      </a:dk1>
+      <a:lt1>
+        <a:sysClr val="window" lastClr="FFFFFF"/>
+      </a:lt1>
+      <a:dk2>
+        <a:srgbClr val="0E2841"/>
+      </a:dk2>
+      <a:lt2>
+        <a:srgbClr val="E8E8E8"/>
+      </a:lt2>
+      <a:accent1>
+        <a:srgbClr val="156082"/>
+      </a:accent1>
+      <a:accent2>
+        <a:srgbClr val="E97132"/>
+      </a:accent2>
+      <a:accent3>
+        <a:srgbClr val="196B24"/>
+      </a:accent3>
+      <a:accent4>
+        <a:srgbClr val="0F9ED5"/>
+      </a:accent4>
+      <a:accent5>
+        <a:srgbClr val="A02B93"/>
+      </a:accent5>
+      <a:accent6>
+        <a:srgbClr val="4EA72E"/>
+      </a:accent6>
+      <a:hlink>
+        <a:srgbClr val="467886"/>
+      </a:hlink>
+      <a:folHlink>
+        <a:srgbClr val="96607D"/>
+      </a:folHlink>
+    </a:clrScheme>
+    <a:fontScheme name="Office">
+      <a:majorFont>
+        <a:latin typeface="Aptos Display" panose="02110004020202020204"/>
+        <a:ea typeface=""/>
+        <a:cs typeface=""/>
+        <a:font script="Jpan" typeface="游ゴシック Light"/>
+        <a:font script="Hang" typeface="맑은 고딕"/>
+        <a:font script="Hans" typeface="等线 Light"/>
+        <a:font script="Hant" typeface="新細明體"/>
+        <a:font script="Arab" typeface="Times New Roman"/>
+        <a:font script="Hebr" typeface="Times New Roman"/>
+        <a:font script="Thai" typeface="Angsana New"/>
+        <a:font script="Ethi" typeface="Nyala"/>
+        <a:font script="Beng" typeface="Vrinda"/>
+        <a:font script="Gujr" typeface="Shruti"/>
+        <a:font script="Khmr" typeface="MoolBoran"/>
+        <a:font script="Knda" typeface="Tunga"/>
+        <a:font script="Guru" typeface="Raavi"/>
+        <a:font script="Cans" typeface="Euphemia"/>
+        <a:font script="Cher" typeface="Plantagenet Cherokee"/>
+        <a:font script="Yiii" typeface="Microsoft Yi Baiti"/>
+        <a:font script="Tibt" typeface="Microsoft Himalaya"/>
+        <a:font script="Thaa" typeface="MV Boli"/>
+        <a:font script="Deva" typeface="Mangal"/>
+        <a:font script="Telu" typeface="Gautami"/>
+        <a:font script="Taml" typeface="Latha"/>
+        <a:font script="Syrc" typeface="Estrangelo Edessa"/>
+        <a:font script="Orya" typeface="Kalinga"/>
+        <a:font script="Mlym" typeface="Kartika"/>
+        <a:font script="Laoo" typeface="DokChampa"/>
+        <a:font script="Sinh" typeface="Iskoola Pota"/>
+        <a:font script="Mong" typeface="Mongolian Baiti"/>
+        <a:font script="Viet" typeface="Times New Roman"/>
+        <a:font script="Uigh" typeface="Microsoft Uighur"/>
+        <a:font script="Geor" typeface="Sylfaen"/>
+        <a:font script="Armn" typeface="Arial"/>
+        <a:font script="Bugi" typeface="Leelawadee UI"/>
+        <a:font script="Bopo" typeface="Microsoft JhengHei"/>
+        <a:font script="Java" typeface="Javanese Text"/>
+        <a:font script="Lisu" typeface="Segoe UI"/>
+        <a:font script="Mymr" typeface="Myanmar Text"/>
+        <a:font script="Nkoo" typeface="Ebrima"/>
+        <a:font script="Olck" typeface="Nirmala UI"/>
+        <a:font script="Osma" typeface="Ebrima"/>
+        <a:font script="Phag" typeface="Phagspa"/>
+        <a:font script="Syrn" typeface="Estrangelo Edessa"/>
+        <a:font script="Syrj" typeface="Estrangelo Edessa"/>
+        <a:font script="Syre" typeface="Estrangelo Edessa"/>
+        <a:font script="Sora" typeface="Nirmala UI"/>
+        <a:font script="Tale" typeface="Microsoft Tai Le"/>
+        <a:font script="Talu" typeface="Microsoft New Tai Lue"/>
+        <a:font script="Tfng" typeface="Ebrima"/>
+      </a:majorFont>
+      <a:minorFont>
+        <a:latin typeface="Aptos" panose="02110004020202020204"/>
+        <a:ea typeface=""/>
+        <a:cs typeface=""/>
+        <a:font script="Jpan" typeface="游ゴシック"/>
+        <a:font script="Hang" typeface="맑은 고딕"/>
+        <a:font script="Hans" typeface="等线"/>
+        <a:font script="Hant" typeface="新細明體"/>
+        <a:font script="Arab" typeface="Arial"/>
+        <a:font script="Hebr" typeface="Arial"/>
+        <a:font script="Thai" typeface="Cordia New"/>
+        <a:font script="Ethi" typeface="Nyala"/>
+        <a:font script="Beng" typeface="Vrinda"/>
+        <a:font script="Gujr" typeface="Shruti"/>
+        <a:font script="Khmr" typeface="DaunPenh"/>
+        <a:font script="Knda" typeface="Tunga"/>
+        <a:font script="Guru" typeface="Raavi"/>
+        <a:font script="Cans" typeface="Euphemia"/>
+        <a:font script="Cher" typeface="Plantagenet Cherokee"/>
+        <a:font script="Yiii" typeface="Microsoft Yi Baiti"/>
+        <a:font script="Tibt" typeface="Microsoft Himalaya"/>
+        <a:font script="Thaa" typeface="MV Boli"/>
+        <a:font script="Deva" typeface="Mangal"/>
+        <a:font script="Telu" typeface="Gautami"/>
+        <a:font script="Taml" typeface="Latha"/>
+        <a:font script="Syrc" typeface="Estrangelo Edessa"/>
+        <a:font script="Orya" typeface="Kalinga"/>
+        <a:font script="Mlym" typeface="Kartika"/>
+        <a:font script="Laoo" typeface="DokChampa"/>
+        <a:font script="Sinh" typeface="Iskoola Pota"/>
+        <a:font script="Mong" typeface="Mongolian Baiti"/>
+        <a:font script="Viet" typeface="Arial"/>
+        <a:font script="Uigh" typeface="Microsoft Uighur"/>
+        <a:font script="Geor" typeface="Sylfaen"/>
+        <a:font script="Armn" typeface="Arial"/>
+        <a:font script="Bugi" typeface="Leelawadee UI"/>
+        <a:font script="Bopo" typeface="Microsoft JhengHei"/>
+        <a:font script="Java" typeface="Javanese Text"/>
+        <a:font script="Lisu" typeface="Segoe UI"/>
+        <a:font script="Mymr" typeface="Myanmar Text"/>
+        <a:font script="Nkoo" typeface="Ebrima"/>
+        <a:font script="Olck" typeface="Nirmala UI"/>
+        <a:font script="Osma" typeface="Ebrima"/>
+        <a:font script="Phag" typeface="Phagspa"/>
+        <a:font script="Syrn" typeface="Estrangelo Edessa"/>
+        <a:font script="Syrj" typeface="Estrangelo Edessa"/>
+        <a:font script="Syre" typeface="Estrangelo Edessa"/>
+        <a:font script="Sora" typeface="Nirmala UI"/>
+        <a:font script="Tale" typeface="Microsoft Tai Le"/>
+        <a:font script="Talu" typeface="Microsoft New Tai Lue"/>
+        <a:font script="Tfng" typeface="Ebrima"/>
+      </a:minorFont>
+    </a:fontScheme>
+    <a:fmtScheme name="Office">
+      <a:fillStyleLst>
+        <a:solidFill>
+          <a:schemeClr val="phClr"/>
+        </a:solidFill>
+        <a:gradFill rotWithShape="1">
+          <a:gsLst>
+            <a:gs pos="0">
+              <a:schemeClr val="phClr">
+                <a:lumMod val="110000"/>
+                <a:satMod val="105000"/>
+                <a:tint val="67000"/>
+              </a:schemeClr>
+            </a:gs>
+            <a:gs pos="50000">
+              <a:schemeClr val="phClr">
+                <a:lumMod val="105000"/>
+                <a:satMod val="103000"/>
+                <a:tint val="73000"/>
+              </a:schemeClr>
+            </a:gs>
+            <a:gs pos="100000">
+              <a:schemeClr val="phClr">
+                <a:lumMod val="105000"/>
+                <a:satMod val="109000"/>
+                <a:tint val="81000"/>
+              </a:schemeClr>
+            </a:gs>
+          </a:gsLst>
+          <a:lin ang="5400000" scaled="0"/>
+        </a:gradFill>
+        <a:gradFill rotWithShape="1">
+          <a:gsLst>
+            <a:gs pos="0">
+              <a:schemeClr val="phClr">
+                <a:satMod val="103000"/>
+                <a:lumMod val="102000"/>
+                <a:tint val="94000"/>
+              </a:schemeClr>
+            </a:gs>
+            <a:gs pos="50000">
+              <a:schemeClr val="phClr">
+                <a:satMod val="110000"/>
+                <a:lumMod val="100000"/>
+                <a:shade val="100000"/>
+              </a:schemeClr>
+            </a:gs>
+            <a:gs pos="100000">
+              <a:schemeClr val="phClr">
+                <a:lumMod val="99000"/>
+                <a:satMod val="120000"/>
+                <a:shade val="78000"/>
+              </a:schemeClr>
+            </a:gs>
+          </a:gsLst>
+          <a:lin ang="5400000" scaled="0"/>
+        </a:gradFill>
+      </a:fillStyleLst>
+      <a:lnStyleLst>
+        <a:ln w="12700" cap="flat" cmpd="sng" algn="ctr">
+          <a:solidFill>
+            <a:schemeClr val="phClr"/>
+          </a:solidFill>
+          <a:prstDash val="solid"/>
+          <a:miter lim="800000"/>
+        </a:ln>
+        <a:ln w="19050" cap="flat" cmpd="sng" algn="ctr">
+          <a:solidFill>
+            <a:schemeClr val="phClr"/>
+          </a:solidFill>
+          <a:prstDash val="solid"/>
+          <a:miter lim="800000"/>
+        </a:ln>
+        <a:ln w="25400" cap="flat" cmpd="sng" algn="ctr">
+          <a:solidFill>
+            <a:schemeClr val="phClr"/>
+          </a:solidFill>
+          <a:prstDash val="solid"/>
+          <a:miter lim="800000"/>
+        </a:ln>
+      </a:lnStyleLst>
+      <a:effectStyleLst>
+        <a:effectStyle>
+          <a:effectLst/>
+        </a:effectStyle>
+        <a:effectStyle>
+          <a:effectLst/>
+        </a:effectStyle>
+        <a:effectStyle>
+          <a:effectLst>
+            <a:outerShdw blurRad="57150" dist="19050" dir="5400000" algn="ctr" rotWithShape="0">
+              <a:srgbClr val="000000">
+                <a:alpha val="63000"/>
+              </a:srgbClr>
+            </a:outerShdw>
+          </a:effectLst>
+        </a:effectStyle>
+      </a:effectStyleLst>
+      <a:bgFillStyleLst>
+        <a:solidFill>
+          <a:schemeClr val="phClr"/>
+        </a:solidFill>
+        <a:solidFill>
+          <a:schemeClr val="phClr">
+            <a:tint val="95000"/>
+            <a:satMod val="170000"/>
+          </a:schemeClr>
+        </a:solidFill>
+        <a:gradFill rotWithShape="1">
+          <a:gsLst>
+            <a:gs pos="0">
+              <a:schemeClr val="phClr">
+                <a:tint val="93000"/>
+                <a:satMod val="150000"/>
+                <a:shade val="98000"/>
+                <a:lumMod val="102000"/>
+              </a:schemeClr>
+            </a:gs>
+            <a:gs pos="50000">
+              <a:schemeClr val="phClr">
+                <a:tint val="98000"/>
+                <a:satMod val="130000"/>
+                <a:shade val="90000"/>
+                <a:lumMod val="103000"/>
+              </a:schemeClr>
+            </a:gs>
+            <a:gs pos="100000">
+              <a:schemeClr val="phClr">
+                <a:shade val="63000"/>
+                <a:satMod val="120000"/>
+              </a:schemeClr>
+            </a:gs>
+          </a:gsLst>
+          <a:lin ang="5400000" scaled="0"/>
+        </a:gradFill>
+      </a:bgFillStyleLst>
+    </a:fmtScheme>
+  </a:themeElements>
+  <a:objectDefaults>
+    <a:lnDef>
+      <a:spPr/>
+      <a:bodyPr/>
+      <a:lstStyle/>
+      <a:style>
+        <a:lnRef idx="2">
+          <a:schemeClr val="accent1"/>
+        </a:lnRef>
+        <a:fillRef idx="0">
+          <a:schemeClr val="accent1"/>
+        </a:fillRef>
+        <a:effectRef idx="1">
+          <a:schemeClr val="accent1"/>
+        </a:effectRef>
+        <a:fontRef idx="minor">
+          <a:schemeClr val="tx1"/>
+        </a:fontRef>
+      </a:style>
+    </a:lnDef>
+  </a:objectDefaults>
+  <a:extraClrSchemeLst/>
+  <a:extLst>
+    <a:ext uri="{05A4C25C-085E-4340-85A3-A5531E510DB2}">
+      <thm15:themeFamily xmlns:thm15="http://schemas.microsoft.com/office/thememl/2012/main" name="Office Theme" id="{2E142A2C-CD16-42D6-873A-C26D2A0506FA}" vid="{1BDDFF52-6CD6-40A5-AB3C-68EB2F1E4D0A}"/>
+    </a:ext>
+  </a:extLst>
+</a:theme>
 </file>
--- a/PRESENTACION.pptx
+++ b/PRESENTACION.pptx
@@ -207,7 +207,7 @@
             </c:spPr>
             <c:extLst>
               <c:ext xmlns:c16="http://schemas.microsoft.com/office/drawing/2014/chart" uri="{C3380CC4-5D6E-409C-BE32-E72D297353CC}">
-                <c16:uniqueId val="{00000001-2A58-4B65-9023-DC9A707F2F27}"/>
+                <c16:uniqueId val="{00000001-D9A9-43B9-99B2-1E42F13B03AE}"/>
               </c:ext>
             </c:extLst>
           </c:dPt>
@@ -222,7 +222,7 @@
             </c:spPr>
             <c:extLst>
               <c:ext xmlns:c16="http://schemas.microsoft.com/office/drawing/2014/chart" uri="{C3380CC4-5D6E-409C-BE32-E72D297353CC}">
-                <c16:uniqueId val="{00000003-2A58-4B65-9023-DC9A707F2F27}"/>
+                <c16:uniqueId val="{00000003-D9A9-43B9-99B2-1E42F13B03AE}"/>
               </c:ext>
             </c:extLst>
           </c:dPt>
@@ -255,7 +255,7 @@
               <c:extLst>
                 <c:ext xmlns:c15="http://schemas.microsoft.com/office/drawing/2012/chart" uri="{CE6537A1-D6FC-4f65-9D91-7224C49458BB}"/>
                 <c:ext xmlns:c16="http://schemas.microsoft.com/office/drawing/2014/chart" uri="{C3380CC4-5D6E-409C-BE32-E72D297353CC}">
-                  <c16:uniqueId val="{00000001-2A58-4B65-9023-DC9A707F2F27}"/>
+                  <c16:uniqueId val="{00000001-D9A9-43B9-99B2-1E42F13B03AE}"/>
                 </c:ext>
               </c:extLst>
             </c:dLbl>
@@ -287,7 +287,7 @@
               <c:extLst>
                 <c:ext xmlns:c15="http://schemas.microsoft.com/office/drawing/2012/chart" uri="{CE6537A1-D6FC-4f65-9D91-7224C49458BB}"/>
                 <c:ext xmlns:c16="http://schemas.microsoft.com/office/drawing/2014/chart" uri="{C3380CC4-5D6E-409C-BE32-E72D297353CC}">
-                  <c16:uniqueId val="{00000003-2A58-4B65-9023-DC9A707F2F27}"/>
+                  <c16:uniqueId val="{00000003-D9A9-43B9-99B2-1E42F13B03AE}"/>
                 </c:ext>
               </c:extLst>
             </c:dLbl>
@@ -357,7 +357,7 @@
           </c:val>
           <c:extLst>
             <c:ext xmlns:c16="http://schemas.microsoft.com/office/drawing/2014/chart" uri="{C3380CC4-5D6E-409C-BE32-E72D297353CC}">
-              <c16:uniqueId val="{00000004-2A58-4B65-9023-DC9A707F2F27}"/>
+              <c16:uniqueId val="{00000004-D9A9-43B9-99B2-1E42F13B03AE}"/>
             </c:ext>
           </c:extLst>
         </c:ser>
@@ -455,7 +455,7 @@
             <c:bubble3D val="0"/>
             <c:extLst>
               <c:ext xmlns:c16="http://schemas.microsoft.com/office/drawing/2014/chart" uri="{C3380CC4-5D6E-409C-BE32-E72D297353CC}">
-                <c16:uniqueId val="{00000001-C7EA-4A60-8A44-719B1FCC74AD}"/>
+                <c16:uniqueId val="{00000001-6CFE-44F6-8626-33ADD0173059}"/>
               </c:ext>
             </c:extLst>
           </c:dPt>
@@ -471,7 +471,7 @@
             </c:spPr>
             <c:extLst>
               <c:ext xmlns:c16="http://schemas.microsoft.com/office/drawing/2014/chart" uri="{C3380CC4-5D6E-409C-BE32-E72D297353CC}">
-                <c16:uniqueId val="{00000003-C7EA-4A60-8A44-719B1FCC74AD}"/>
+                <c16:uniqueId val="{00000003-6CFE-44F6-8626-33ADD0173059}"/>
               </c:ext>
             </c:extLst>
           </c:dPt>
@@ -545,7 +545,7 @@
           </c:val>
           <c:extLst>
             <c:ext xmlns:c16="http://schemas.microsoft.com/office/drawing/2014/chart" uri="{C3380CC4-5D6E-409C-BE32-E72D297353CC}">
-              <c16:uniqueId val="{00000004-C7EA-4A60-8A44-719B1FCC74AD}"/>
+              <c16:uniqueId val="{00000004-6CFE-44F6-8626-33ADD0173059}"/>
             </c:ext>
           </c:extLst>
         </c:ser>
@@ -713,7 +713,7 @@
             <c:bubble3D val="0"/>
             <c:extLst>
               <c:ext xmlns:c16="http://schemas.microsoft.com/office/drawing/2014/chart" uri="{C3380CC4-5D6E-409C-BE32-E72D297353CC}">
-                <c16:uniqueId val="{00000001-1951-4F8A-9560-E27C3F002B3B}"/>
+                <c16:uniqueId val="{00000001-39F2-4A5A-92F3-5EC0E0FFBEAC}"/>
               </c:ext>
             </c:extLst>
           </c:dPt>
@@ -729,7 +729,7 @@
             </c:spPr>
             <c:extLst>
               <c:ext xmlns:c16="http://schemas.microsoft.com/office/drawing/2014/chart" uri="{C3380CC4-5D6E-409C-BE32-E72D297353CC}">
-                <c16:uniqueId val="{00000003-1951-4F8A-9560-E27C3F002B3B}"/>
+                <c16:uniqueId val="{00000003-39F2-4A5A-92F3-5EC0E0FFBEAC}"/>
               </c:ext>
             </c:extLst>
           </c:dPt>
@@ -745,7 +745,7 @@
             </c:spPr>
             <c:extLst>
               <c:ext xmlns:c16="http://schemas.microsoft.com/office/drawing/2014/chart" uri="{C3380CC4-5D6E-409C-BE32-E72D297353CC}">
-                <c16:uniqueId val="{00000005-1951-4F8A-9560-E27C3F002B3B}"/>
+                <c16:uniqueId val="{00000005-39F2-4A5A-92F3-5EC0E0FFBEAC}"/>
               </c:ext>
             </c:extLst>
           </c:dPt>
@@ -761,7 +761,7 @@
             </c:spPr>
             <c:extLst>
               <c:ext xmlns:c16="http://schemas.microsoft.com/office/drawing/2014/chart" uri="{C3380CC4-5D6E-409C-BE32-E72D297353CC}">
-                <c16:uniqueId val="{00000007-1951-4F8A-9560-E27C3F002B3B}"/>
+                <c16:uniqueId val="{00000007-39F2-4A5A-92F3-5EC0E0FFBEAC}"/>
               </c:ext>
             </c:extLst>
           </c:dPt>
@@ -849,7 +849,7 @@
           </c:val>
           <c:extLst>
             <c:ext xmlns:c16="http://schemas.microsoft.com/office/drawing/2014/chart" uri="{C3380CC4-5D6E-409C-BE32-E72D297353CC}">
-              <c16:uniqueId val="{00000008-1951-4F8A-9560-E27C3F002B3B}"/>
+              <c16:uniqueId val="{00000008-39F2-4A5A-92F3-5EC0E0FFBEAC}"/>
             </c:ext>
           </c:extLst>
         </c:ser>
@@ -988,7 +988,7 @@
             <c:bubble3D val="0"/>
             <c:extLst>
               <c:ext xmlns:c16="http://schemas.microsoft.com/office/drawing/2014/chart" uri="{C3380CC4-5D6E-409C-BE32-E72D297353CC}">
-                <c16:uniqueId val="{00000001-B85E-42BC-87A7-574C5FBD7F09}"/>
+                <c16:uniqueId val="{00000001-8CAB-4BDD-A07D-7DD100802456}"/>
               </c:ext>
             </c:extLst>
           </c:dPt>
@@ -998,7 +998,7 @@
             <c:bubble3D val="0"/>
             <c:extLst>
               <c:ext xmlns:c16="http://schemas.microsoft.com/office/drawing/2014/chart" uri="{C3380CC4-5D6E-409C-BE32-E72D297353CC}">
-                <c16:uniqueId val="{00000003-B85E-42BC-87A7-574C5FBD7F09}"/>
+                <c16:uniqueId val="{00000003-8CAB-4BDD-A07D-7DD100802456}"/>
               </c:ext>
             </c:extLst>
           </c:dPt>
@@ -1008,7 +1008,7 @@
             <c:bubble3D val="0"/>
             <c:extLst>
               <c:ext xmlns:c16="http://schemas.microsoft.com/office/drawing/2014/chart" uri="{C3380CC4-5D6E-409C-BE32-E72D297353CC}">
-                <c16:uniqueId val="{00000005-B85E-42BC-87A7-574C5FBD7F09}"/>
+                <c16:uniqueId val="{00000005-8CAB-4BDD-A07D-7DD100802456}"/>
               </c:ext>
             </c:extLst>
           </c:dPt>
@@ -1024,7 +1024,7 @@
             </c:spPr>
             <c:extLst>
               <c:ext xmlns:c16="http://schemas.microsoft.com/office/drawing/2014/chart" uri="{C3380CC4-5D6E-409C-BE32-E72D297353CC}">
-                <c16:uniqueId val="{00000007-B85E-42BC-87A7-574C5FBD7F09}"/>
+                <c16:uniqueId val="{00000007-8CAB-4BDD-A07D-7DD100802456}"/>
               </c:ext>
             </c:extLst>
           </c:dPt>
@@ -1040,7 +1040,7 @@
             </c:spPr>
             <c:extLst>
               <c:ext xmlns:c16="http://schemas.microsoft.com/office/drawing/2014/chart" uri="{C3380CC4-5D6E-409C-BE32-E72D297353CC}">
-                <c16:uniqueId val="{00000009-B85E-42BC-87A7-574C5FBD7F09}"/>
+                <c16:uniqueId val="{00000009-8CAB-4BDD-A07D-7DD100802456}"/>
               </c:ext>
             </c:extLst>
           </c:dPt>
@@ -1056,7 +1056,7 @@
             </c:spPr>
             <c:extLst>
               <c:ext xmlns:c16="http://schemas.microsoft.com/office/drawing/2014/chart" uri="{C3380CC4-5D6E-409C-BE32-E72D297353CC}">
-                <c16:uniqueId val="{0000000B-B85E-42BC-87A7-574C5FBD7F09}"/>
+                <c16:uniqueId val="{0000000B-8CAB-4BDD-A07D-7DD100802456}"/>
               </c:ext>
             </c:extLst>
           </c:dPt>
@@ -1072,7 +1072,7 @@
             </c:spPr>
             <c:extLst>
               <c:ext xmlns:c16="http://schemas.microsoft.com/office/drawing/2014/chart" uri="{C3380CC4-5D6E-409C-BE32-E72D297353CC}">
-                <c16:uniqueId val="{0000000D-B85E-42BC-87A7-574C5FBD7F09}"/>
+                <c16:uniqueId val="{0000000D-8CAB-4BDD-A07D-7DD100802456}"/>
               </c:ext>
             </c:extLst>
           </c:dPt>
@@ -1088,7 +1088,7 @@
             </c:spPr>
             <c:extLst>
               <c:ext xmlns:c16="http://schemas.microsoft.com/office/drawing/2014/chart" uri="{C3380CC4-5D6E-409C-BE32-E72D297353CC}">
-                <c16:uniqueId val="{0000000F-B85E-42BC-87A7-574C5FBD7F09}"/>
+                <c16:uniqueId val="{0000000F-8CAB-4BDD-A07D-7DD100802456}"/>
               </c:ext>
             </c:extLst>
           </c:dPt>
@@ -1196,7 +1196,7 @@
           </c:val>
           <c:extLst>
             <c:ext xmlns:c16="http://schemas.microsoft.com/office/drawing/2014/chart" uri="{C3380CC4-5D6E-409C-BE32-E72D297353CC}">
-              <c16:uniqueId val="{00000010-B85E-42BC-87A7-574C5FBD7F09}"/>
+              <c16:uniqueId val="{00000010-8CAB-4BDD-A07D-7DD100802456}"/>
             </c:ext>
           </c:extLst>
         </c:ser>
@@ -1295,304 +1295,6 @@
 </file>
 
 <file path=ppt/charts/chart5.xml><?xml version="1.0" encoding="utf-8"?>
-<c:chartSpace xmlns:c="http://schemas.openxmlformats.org/drawingml/2006/chart" xmlns:a="http://schemas.openxmlformats.org/drawingml/2006/main" xmlns:r="http://schemas.openxmlformats.org/officeDocument/2006/relationships" xmlns:c16r2="http://schemas.microsoft.com/office/drawing/2015/06/chart">
-  <c:date1904 val="0"/>
-  <c:lang val="es-ES"/>
-  <c:roundedCorners val="1"/>
-  <c:style val="2"/>
-  <c:chart>
-    <c:title>
-      <c:tx>
-        <c:rich>
-          <a:bodyPr/>
-          <a:lstStyle/>
-          <a:p>
-            <a:pPr>
-              <a:defRPr sz="1300" b="0" i="0" u="none" strike="noStrike">
-                <a:solidFill>
-                  <a:srgbClr val="1E2761"/>
-                </a:solidFill>
-                <a:latin typeface="Calibri"/>
-              </a:defRPr>
-            </a:pPr>
-            <a:r>
-              <a:rPr lang="es-CO" sz="1300" b="0" i="0" u="none" strike="noStrike">
-                <a:solidFill>
-                  <a:srgbClr val="1E2761"/>
-                </a:solidFill>
-                <a:latin typeface="Calibri"/>
-              </a:rPr>
-              <a:t>PCA — varianza acumulada por componente</a:t>
-            </a:r>
-          </a:p>
-        </c:rich>
-      </c:tx>
-      <c:overlay val="0"/>
-    </c:title>
-    <c:autoTitleDeleted val="0"/>
-    <c:plotArea>
-      <c:layout/>
-      <c:lineChart>
-        <c:grouping val="standard"/>
-        <c:varyColors val="0"/>
-        <c:ser>
-          <c:idx val="0"/>
-          <c:order val="0"/>
-          <c:tx>
-            <c:strRef>
-              <c:f>Sheet1!$B$1</c:f>
-              <c:strCache>
-                <c:ptCount val="1"/>
-                <c:pt idx="0">
-                  <c:v>Varianza acumulada (%)</c:v>
-                </c:pt>
-              </c:strCache>
-            </c:strRef>
-          </c:tx>
-          <c:spPr>
-            <a:ln w="38100" cap="flat">
-              <a:solidFill>
-                <a:srgbClr val="1E2761"/>
-              </a:solidFill>
-              <a:prstDash val="solid"/>
-              <a:round/>
-            </a:ln>
-            <a:effectLst/>
-          </c:spPr>
-          <c:marker>
-            <c:symbol val="circle"/>
-            <c:size val="6"/>
-            <c:spPr>
-              <a:solidFill>
-                <a:srgbClr val="1E2761"/>
-              </a:solidFill>
-              <a:ln w="9525" cap="flat">
-                <a:solidFill>
-                  <a:srgbClr val="1E2761"/>
-                </a:solidFill>
-                <a:prstDash val="solid"/>
-                <a:round/>
-              </a:ln>
-              <a:effectLst/>
-            </c:spPr>
-          </c:marker>
-          <c:cat>
-            <c:strRef>
-              <c:f>Sheet1!$A$2:$A$11</c:f>
-              <c:strCache>
-                <c:ptCount val="10"/>
-                <c:pt idx="0">
-                  <c:v>PC1</c:v>
-                </c:pt>
-                <c:pt idx="1">
-                  <c:v>PC2</c:v>
-                </c:pt>
-                <c:pt idx="2">
-                  <c:v>PC3</c:v>
-                </c:pt>
-                <c:pt idx="3">
-                  <c:v>PC4</c:v>
-                </c:pt>
-                <c:pt idx="4">
-                  <c:v>PC5</c:v>
-                </c:pt>
-                <c:pt idx="5">
-                  <c:v>PC6</c:v>
-                </c:pt>
-                <c:pt idx="6">
-                  <c:v>PC7</c:v>
-                </c:pt>
-                <c:pt idx="7">
-                  <c:v>PC8</c:v>
-                </c:pt>
-                <c:pt idx="8">
-                  <c:v>PC9</c:v>
-                </c:pt>
-                <c:pt idx="9">
-                  <c:v>PC10</c:v>
-                </c:pt>
-              </c:strCache>
-            </c:strRef>
-          </c:cat>
-          <c:val>
-            <c:numRef>
-              <c:f>Sheet1!$B$2:$B$11</c:f>
-              <c:numCache>
-                <c:formatCode>General</c:formatCode>
-                <c:ptCount val="10"/>
-                <c:pt idx="0">
-                  <c:v>20.100000000000001</c:v>
-                </c:pt>
-                <c:pt idx="1">
-                  <c:v>31.8</c:v>
-                </c:pt>
-                <c:pt idx="2">
-                  <c:v>41.1</c:v>
-                </c:pt>
-                <c:pt idx="3">
-                  <c:v>48</c:v>
-                </c:pt>
-                <c:pt idx="4">
-                  <c:v>54.7</c:v>
-                </c:pt>
-                <c:pt idx="5">
-                  <c:v>60.8</c:v>
-                </c:pt>
-                <c:pt idx="6">
-                  <c:v>66.7</c:v>
-                </c:pt>
-                <c:pt idx="7">
-                  <c:v>72.5</c:v>
-                </c:pt>
-                <c:pt idx="8">
-                  <c:v>77</c:v>
-                </c:pt>
-                <c:pt idx="9">
-                  <c:v>81.2</c:v>
-                </c:pt>
-              </c:numCache>
-            </c:numRef>
-          </c:val>
-          <c:smooth val="0"/>
-          <c:extLst>
-            <c:ext xmlns:c16="http://schemas.microsoft.com/office/drawing/2014/chart" uri="{C3380CC4-5D6E-409C-BE32-E72D297353CC}">
-              <c16:uniqueId val="{00000000-3E6D-4810-AA29-5FBBAB2CFD27}"/>
-            </c:ext>
-          </c:extLst>
-        </c:ser>
-        <c:dLbls>
-          <c:showLegendKey val="0"/>
-          <c:showVal val="0"/>
-          <c:showCatName val="0"/>
-          <c:showSerName val="0"/>
-          <c:showPercent val="0"/>
-          <c:showBubbleSize val="0"/>
-        </c:dLbls>
-        <c:marker val="1"/>
-        <c:smooth val="0"/>
-        <c:axId val="2094734554"/>
-        <c:axId val="2094734552"/>
-      </c:lineChart>
-      <c:catAx>
-        <c:axId val="2094734554"/>
-        <c:scaling>
-          <c:orientation val="minMax"/>
-        </c:scaling>
-        <c:delete val="0"/>
-        <c:axPos val="b"/>
-        <c:numFmt formatCode="General" sourceLinked="1"/>
-        <c:majorTickMark val="out"/>
-        <c:minorTickMark val="none"/>
-        <c:tickLblPos val="low"/>
-        <c:spPr>
-          <a:ln w="12700" cap="flat">
-            <a:solidFill>
-              <a:srgbClr val="888888"/>
-            </a:solidFill>
-            <a:prstDash val="solid"/>
-            <a:round/>
-          </a:ln>
-        </c:spPr>
-        <c:txPr>
-          <a:bodyPr/>
-          <a:lstStyle/>
-          <a:p>
-            <a:pPr>
-              <a:defRPr sz="1000" b="0" i="0" u="none" strike="noStrike">
-                <a:solidFill>
-                  <a:srgbClr val="5A5F73"/>
-                </a:solidFill>
-                <a:latin typeface="Calibri"/>
-              </a:defRPr>
-            </a:pPr>
-            <a:endParaRPr lang="en-US"/>
-          </a:p>
-        </c:txPr>
-        <c:crossAx val="2094734552"/>
-        <c:crosses val="autoZero"/>
-        <c:auto val="1"/>
-        <c:lblAlgn val="ctr"/>
-        <c:lblOffset val="100"/>
-        <c:noMultiLvlLbl val="1"/>
-      </c:catAx>
-      <c:valAx>
-        <c:axId val="2094734552"/>
-        <c:scaling>
-          <c:orientation val="minMax"/>
-          <c:max val="100"/>
-          <c:min val="0"/>
-        </c:scaling>
-        <c:delete val="0"/>
-        <c:axPos val="l"/>
-        <c:majorGridlines>
-          <c:spPr>
-            <a:ln w="12700" cap="flat">
-              <a:solidFill>
-                <a:srgbClr val="888888"/>
-              </a:solidFill>
-              <a:prstDash val="solid"/>
-              <a:round/>
-            </a:ln>
-          </c:spPr>
-        </c:majorGridlines>
-        <c:numFmt formatCode="General" sourceLinked="0"/>
-        <c:majorTickMark val="out"/>
-        <c:minorTickMark val="none"/>
-        <c:tickLblPos val="nextTo"/>
-        <c:spPr>
-          <a:ln w="12700" cap="flat">
-            <a:solidFill>
-              <a:srgbClr val="888888"/>
-            </a:solidFill>
-            <a:prstDash val="solid"/>
-            <a:round/>
-          </a:ln>
-        </c:spPr>
-        <c:txPr>
-          <a:bodyPr/>
-          <a:lstStyle/>
-          <a:p>
-            <a:pPr>
-              <a:defRPr sz="1000" b="0" i="0" u="none" strike="noStrike">
-                <a:solidFill>
-                  <a:srgbClr val="5A5F73"/>
-                </a:solidFill>
-                <a:latin typeface="Calibri"/>
-              </a:defRPr>
-            </a:pPr>
-            <a:endParaRPr lang="en-US"/>
-          </a:p>
-        </c:txPr>
-        <c:crossAx val="2094734554"/>
-        <c:crosses val="autoZero"/>
-        <c:crossBetween val="between"/>
-      </c:valAx>
-      <c:spPr>
-        <a:noFill/>
-        <a:ln>
-          <a:noFill/>
-        </a:ln>
-        <a:effectLst/>
-      </c:spPr>
-    </c:plotArea>
-    <c:plotVisOnly val="1"/>
-    <c:dispBlanksAs val="span"/>
-    <c:showDLblsOverMax val="1"/>
-  </c:chart>
-  <c:spPr>
-    <a:noFill/>
-    <a:ln>
-      <a:noFill/>
-    </a:ln>
-    <a:effectLst/>
-  </c:spPr>
-  <c:externalData r:id="rId1">
-    <c:autoUpdate val="0"/>
-  </c:externalData>
-</c:chartSpace>
-</file>
-
-<file path=ppt/charts/chart6.xml><?xml version="1.0" encoding="utf-8"?>
 <c:chartSpace xmlns:c="http://schemas.openxmlformats.org/drawingml/2006/chart" xmlns:a="http://schemas.openxmlformats.org/drawingml/2006/main" xmlns:r="http://schemas.openxmlformats.org/officeDocument/2006/relationships" xmlns:c16r2="http://schemas.microsoft.com/office/drawing/2015/06/chart">
   <c:date1904 val="0"/>
   <c:lang val="es-ES"/>
@@ -1661,7 +1363,7 @@
             <c:bubble3D val="0"/>
             <c:extLst>
               <c:ext xmlns:c16="http://schemas.microsoft.com/office/drawing/2014/chart" uri="{C3380CC4-5D6E-409C-BE32-E72D297353CC}">
-                <c16:uniqueId val="{00000001-8200-4837-83A0-E49E9D63A97E}"/>
+                <c16:uniqueId val="{00000001-02EC-40B8-A8D6-5D239C87059B}"/>
               </c:ext>
             </c:extLst>
           </c:dPt>
@@ -1677,7 +1379,7 @@
             </c:spPr>
             <c:extLst>
               <c:ext xmlns:c16="http://schemas.microsoft.com/office/drawing/2014/chart" uri="{C3380CC4-5D6E-409C-BE32-E72D297353CC}">
-                <c16:uniqueId val="{00000003-8200-4837-83A0-E49E9D63A97E}"/>
+                <c16:uniqueId val="{00000003-02EC-40B8-A8D6-5D239C87059B}"/>
               </c:ext>
             </c:extLst>
           </c:dPt>
@@ -1749,7 +1451,7 @@
           </c:val>
           <c:extLst>
             <c:ext xmlns:c16="http://schemas.microsoft.com/office/drawing/2014/chart" uri="{C3380CC4-5D6E-409C-BE32-E72D297353CC}">
-              <c16:uniqueId val="{00000004-8200-4837-83A0-E49E9D63A97E}"/>
+              <c16:uniqueId val="{00000004-02EC-40B8-A8D6-5D239C87059B}"/>
             </c:ext>
           </c:extLst>
         </c:ser>
@@ -1872,7 +1574,7 @@
     </p:spTree>
     <p:extLst>
       <p:ext uri="{BB962C8B-B14F-4D97-AF65-F5344CB8AC3E}">
-        <p14:creationId xmlns:p14="http://schemas.microsoft.com/office/powerpoint/2010/main" val="3400754728"/>
+        <p14:creationId xmlns:p14="http://schemas.microsoft.com/office/powerpoint/2010/main" val="4157034081"/>
       </p:ext>
     </p:extLst>
   </p:cSld>
@@ -2000,13 +1702,6 @@
           </p:nvPr>
         </p:nvSpPr>
         <p:spPr/>
-        <p:txBody>
-          <a:bodyPr/>
-          <a:lstStyle/>
-          <a:p>
-            <a:endParaRPr lang="es-CO"/>
-          </a:p>
-        </p:txBody>
       </p:sp>
       <p:sp>
         <p:nvSpPr>
@@ -2094,13 +1789,6 @@
           </p:nvPr>
         </p:nvSpPr>
         <p:spPr/>
-        <p:txBody>
-          <a:bodyPr/>
-          <a:lstStyle/>
-          <a:p>
-            <a:endParaRPr lang="es-CO"/>
-          </a:p>
-        </p:txBody>
       </p:sp>
       <p:sp>
         <p:nvSpPr>
@@ -2188,13 +1876,6 @@
           </p:nvPr>
         </p:nvSpPr>
         <p:spPr/>
-        <p:txBody>
-          <a:bodyPr/>
-          <a:lstStyle/>
-          <a:p>
-            <a:endParaRPr lang="es-CO"/>
-          </a:p>
-        </p:txBody>
       </p:sp>
       <p:sp>
         <p:nvSpPr>
@@ -2282,13 +1963,6 @@
           </p:nvPr>
         </p:nvSpPr>
         <p:spPr/>
-        <p:txBody>
-          <a:bodyPr/>
-          <a:lstStyle/>
-          <a:p>
-            <a:endParaRPr lang="es-CO"/>
-          </a:p>
-        </p:txBody>
       </p:sp>
       <p:sp>
         <p:nvSpPr>
@@ -2376,13 +2050,6 @@
           </p:nvPr>
         </p:nvSpPr>
         <p:spPr/>
-        <p:txBody>
-          <a:bodyPr/>
-          <a:lstStyle/>
-          <a:p>
-            <a:endParaRPr lang="es-CO"/>
-          </a:p>
-        </p:txBody>
       </p:sp>
       <p:sp>
         <p:nvSpPr>
@@ -2401,7 +2068,7 @@
           <a:p>
             <a:r>
               <a:rPr lang="en-US" dirty="0"/>
-              <a:t>El PCA aquí tiene valor diagnóstico, no operativo: confirma que no existe estructura lineal simple que separe a los clientes en mora.</a:t>
+              <a:t>El análisis multivariado usa las técnicas pedidas: matriz de correlación, pairplot con hue, dispersión entre numéricas y tablas cruzadas. No se aplicó reducción de dimensionalidad porque corresponde a la fase de Feature Engineering.</a:t>
             </a:r>
           </a:p>
         </p:txBody>
@@ -2470,13 +2137,6 @@
           </p:nvPr>
         </p:nvSpPr>
         <p:spPr/>
-        <p:txBody>
-          <a:bodyPr/>
-          <a:lstStyle/>
-          <a:p>
-            <a:endParaRPr lang="es-CO"/>
-          </a:p>
-        </p:txBody>
       </p:sp>
       <p:sp>
         <p:nvSpPr>
@@ -2564,13 +2224,6 @@
           </p:nvPr>
         </p:nvSpPr>
         <p:spPr/>
-        <p:txBody>
-          <a:bodyPr/>
-          <a:lstStyle/>
-          <a:p>
-            <a:endParaRPr lang="es-CO"/>
-          </a:p>
-        </p:txBody>
       </p:sp>
       <p:sp>
         <p:nvSpPr>
@@ -2658,13 +2311,6 @@
           </p:nvPr>
         </p:nvSpPr>
         <p:spPr/>
-        <p:txBody>
-          <a:bodyPr/>
-          <a:lstStyle/>
-          <a:p>
-            <a:endParaRPr lang="es-CO"/>
-          </a:p>
-        </p:txBody>
       </p:sp>
       <p:sp>
         <p:nvSpPr>
@@ -2752,13 +2398,6 @@
           </p:nvPr>
         </p:nvSpPr>
         <p:spPr/>
-        <p:txBody>
-          <a:bodyPr/>
-          <a:lstStyle/>
-          <a:p>
-            <a:endParaRPr lang="es-CO"/>
-          </a:p>
-        </p:txBody>
       </p:sp>
       <p:sp>
         <p:nvSpPr>
@@ -2846,13 +2485,6 @@
           </p:nvPr>
         </p:nvSpPr>
         <p:spPr/>
-        <p:txBody>
-          <a:bodyPr/>
-          <a:lstStyle/>
-          <a:p>
-            <a:endParaRPr lang="es-CO"/>
-          </a:p>
-        </p:txBody>
       </p:sp>
       <p:sp>
         <p:nvSpPr>
@@ -2940,13 +2572,6 @@
           </p:nvPr>
         </p:nvSpPr>
         <p:spPr/>
-        <p:txBody>
-          <a:bodyPr/>
-          <a:lstStyle/>
-          <a:p>
-            <a:endParaRPr lang="es-CO"/>
-          </a:p>
-        </p:txBody>
       </p:sp>
       <p:sp>
         <p:nvSpPr>
@@ -3034,13 +2659,6 @@
           </p:nvPr>
         </p:nvSpPr>
         <p:spPr/>
-        <p:txBody>
-          <a:bodyPr/>
-          <a:lstStyle/>
-          <a:p>
-            <a:endParaRPr lang="es-CO"/>
-          </a:p>
-        </p:txBody>
       </p:sp>
       <p:sp>
         <p:nvSpPr>
@@ -3128,13 +2746,6 @@
           </p:nvPr>
         </p:nvSpPr>
         <p:spPr/>
-        <p:txBody>
-          <a:bodyPr/>
-          <a:lstStyle/>
-          <a:p>
-            <a:endParaRPr lang="es-CO"/>
-          </a:p>
-        </p:txBody>
       </p:sp>
       <p:sp>
         <p:nvSpPr>
@@ -3222,13 +2833,6 @@
           </p:nvPr>
         </p:nvSpPr>
         <p:spPr/>
-        <p:txBody>
-          <a:bodyPr/>
-          <a:lstStyle/>
-          <a:p>
-            <a:endParaRPr lang="es-CO"/>
-          </a:p>
-        </p:txBody>
       </p:sp>
       <p:sp>
         <p:nvSpPr>
@@ -3316,13 +2920,6 @@
           </p:nvPr>
         </p:nvSpPr>
         <p:spPr/>
-        <p:txBody>
-          <a:bodyPr/>
-          <a:lstStyle/>
-          <a:p>
-            <a:endParaRPr lang="es-CO"/>
-          </a:p>
-        </p:txBody>
       </p:sp>
       <p:sp>
         <p:nvSpPr>
@@ -3410,13 +3007,6 @@
           </p:nvPr>
         </p:nvSpPr>
         <p:spPr/>
-        <p:txBody>
-          <a:bodyPr/>
-          <a:lstStyle/>
-          <a:p>
-            <a:endParaRPr lang="es-CO"/>
-          </a:p>
-        </p:txBody>
       </p:sp>
       <p:sp>
         <p:nvSpPr>
@@ -3504,13 +3094,6 @@
           </p:nvPr>
         </p:nvSpPr>
         <p:spPr/>
-        <p:txBody>
-          <a:bodyPr/>
-          <a:lstStyle/>
-          <a:p>
-            <a:endParaRPr lang="es-CO"/>
-          </a:p>
-        </p:txBody>
       </p:sp>
       <p:sp>
         <p:nvSpPr>
@@ -3598,13 +3181,6 @@
           </p:nvPr>
         </p:nvSpPr>
         <p:spPr/>
-        <p:txBody>
-          <a:bodyPr/>
-          <a:lstStyle/>
-          <a:p>
-            <a:endParaRPr lang="es-CO"/>
-          </a:p>
-        </p:txBody>
       </p:sp>
       <p:sp>
         <p:nvSpPr>
@@ -4156,7 +3732,7 @@
         </p:nvSpPr>
         <p:spPr>
           <a:xfrm>
-            <a:off x="735874" y="4343400"/>
+            <a:off x="822960" y="4343401"/>
             <a:ext cx="8229600" cy="365760"/>
           </a:xfrm>
           <a:prstGeom prst="rect">
@@ -4953,7 +4529,7 @@
                 <a:ea typeface="Cambria" pitchFamily="34" charset="-122"/>
                 <a:cs typeface="Cambria" pitchFamily="34" charset="-120"/>
               </a:rPr>
-              <a:t>Los atributos derivados superan a los originales</a:t>
+              <a:t>Atributos derivados: propuestas de alto valor</a:t>
             </a:r>
             <a:endParaRPr lang="en-US" sz="3000" dirty="0"/>
           </a:p>
@@ -5714,7 +5290,7 @@
               <a:buNone/>
             </a:pPr>
             <a:r>
-              <a:rPr lang="en-US" sz="2600" b="1" dirty="0">
+              <a:rPr lang="en-US" sz="2300" b="1" dirty="0">
                 <a:solidFill>
                   <a:srgbClr val="FFFFFF"/>
                 </a:solidFill>
@@ -5722,9 +5298,9 @@
                 <a:ea typeface="Cambria" pitchFamily="34" charset="-122"/>
                 <a:cs typeface="Cambria" pitchFamily="34" charset="-120"/>
               </a:rPr>
-              <a:t>2 de 2</a:t>
-            </a:r>
-            <a:endParaRPr lang="en-US" sz="2600" dirty="0"/>
+              <a:t>Propuestas</a:t>
+            </a:r>
+            <a:endParaRPr lang="en-US" sz="2300" dirty="0"/>
           </a:p>
         </p:txBody>
       </p:sp>
@@ -5736,8 +5312,8 @@
         </p:nvSpPr>
         <p:spPr>
           <a:xfrm>
-            <a:off x="7863840" y="2880360"/>
-            <a:ext cx="3474720" cy="914400"/>
+            <a:off x="7863840" y="2834640"/>
+            <a:ext cx="3474720" cy="1143000"/>
           </a:xfrm>
           <a:prstGeom prst="rect">
             <a:avLst/>
@@ -5756,7 +5332,7 @@
               <a:buNone/>
             </a:pPr>
             <a:r>
-              <a:rPr lang="en-US" sz="1300" dirty="0">
+              <a:rPr lang="en-US" sz="1200" dirty="0">
                 <a:solidFill>
                   <a:srgbClr val="CADCFC"/>
                 </a:solidFill>
@@ -5764,9 +5340,9 @@
                 <a:ea typeface="Calibri" pitchFamily="34" charset="-122"/>
                 <a:cs typeface="Calibri" pitchFamily="34" charset="-120"/>
               </a:rPr>
-              <a:t>los dos mejores predictores del dataset son variables construidas, no originales</a:t>
-            </a:r>
-            <a:endParaRPr lang="en-US" sz="1300" dirty="0"/>
+              <a:t>Identificadas y evaluadas durante el EDA. Se implementarán en la Fase 2; ninguna se incorporó al dataset limpio.</a:t>
+            </a:r>
+            <a:endParaRPr lang="en-US" sz="1200" dirty="0"/>
           </a:p>
         </p:txBody>
       </p:sp>
@@ -5778,8 +5354,8 @@
         </p:nvSpPr>
         <p:spPr>
           <a:xfrm>
-            <a:off x="7863840" y="3977640"/>
-            <a:ext cx="3474720" cy="2011680"/>
+            <a:off x="7863840" y="4069080"/>
+            <a:ext cx="3474720" cy="1874520"/>
           </a:xfrm>
           <a:prstGeom prst="rect">
             <a:avLst/>
@@ -5987,86 +5563,99 @@
                 <a:ea typeface="Cambria" pitchFamily="34" charset="-122"/>
                 <a:cs typeface="Cambria" pitchFamily="34" charset="-120"/>
               </a:rPr>
-              <a:t>¿Se separan las clases en el espacio multivariado?</a:t>
+              <a:t>Relaciones entre variables</a:t>
             </a:r>
             <a:endParaRPr lang="en-US" sz="3000" dirty="0"/>
           </a:p>
         </p:txBody>
       </p:sp>
-      <p:graphicFrame>
-        <p:nvGraphicFramePr>
-          <p:cNvPr id="4" name="Chart 0"/>
-          <p:cNvGraphicFramePr/>
-          <p:nvPr/>
-        </p:nvGraphicFramePr>
-        <p:xfrm>
-          <a:off x="548640" y="1920240"/>
-          <a:ext cx="6035040" cy="4023360"/>
-        </p:xfrm>
-        <a:graphic>
-          <a:graphicData uri="http://schemas.openxmlformats.org/drawingml/2006/chart">
-            <c:chart xmlns:c="http://schemas.openxmlformats.org/drawingml/2006/chart" xmlns:r="http://schemas.openxmlformats.org/officeDocument/2006/relationships" r:id="rId3"/>
-          </a:graphicData>
-        </a:graphic>
-      </p:graphicFrame>
-      <p:sp>
-        <p:nvSpPr>
-          <p:cNvPr id="5" name="Text 2"/>
-          <p:cNvSpPr/>
-          <p:nvPr/>
-        </p:nvSpPr>
-        <p:spPr>
-          <a:xfrm>
-            <a:off x="6949440" y="2103120"/>
-            <a:ext cx="4663440" cy="822960"/>
-          </a:xfrm>
-          <a:prstGeom prst="rect">
-            <a:avLst/>
-          </a:prstGeom>
-          <a:noFill/>
-          <a:ln/>
-        </p:spPr>
-        <p:txBody>
-          <a:bodyPr wrap="square" lIns="0" tIns="0" rIns="0" bIns="0" rtlCol="0" anchor="ctr"/>
-          <a:lstStyle/>
-          <a:p>
-            <a:pPr marL="0" indent="0">
-              <a:buNone/>
-            </a:pPr>
-            <a:r>
-              <a:rPr lang="en-US" sz="4000" b="1" dirty="0">
-                <a:solidFill>
-                  <a:srgbClr val="1E2761"/>
-                </a:solidFill>
-                <a:latin typeface="Cambria" pitchFamily="34" charset="0"/>
-                <a:ea typeface="Cambria" pitchFamily="34" charset="-122"/>
-                <a:cs typeface="Cambria" pitchFamily="34" charset="-120"/>
-              </a:rPr>
-              <a:t>10 de 17</a:t>
-            </a:r>
-            <a:endParaRPr lang="en-US" sz="4000" dirty="0"/>
-          </a:p>
-        </p:txBody>
-      </p:sp>
-      <p:sp>
-        <p:nvSpPr>
-          <p:cNvPr id="6" name="Text 3"/>
-          <p:cNvSpPr/>
-          <p:nvPr/>
-        </p:nvSpPr>
-        <p:spPr>
-          <a:xfrm>
-            <a:off x="6949440" y="2926080"/>
-            <a:ext cx="4663440" cy="731520"/>
-          </a:xfrm>
-          <a:prstGeom prst="rect">
-            <a:avLst/>
-          </a:prstGeom>
-          <a:noFill/>
-          <a:ln/>
-        </p:spPr>
-        <p:txBody>
-          <a:bodyPr wrap="square" lIns="0" tIns="0" rIns="0" bIns="0" rtlCol="0" anchor="ctr"/>
+      <p:sp>
+        <p:nvSpPr>
+          <p:cNvPr id="4" name="Shape 2"/>
+          <p:cNvSpPr/>
+          <p:nvPr/>
+        </p:nvSpPr>
+        <p:spPr>
+          <a:xfrm>
+            <a:off x="548640" y="1965960"/>
+            <a:ext cx="2670048" cy="1920240"/>
+          </a:xfrm>
+          <a:prstGeom prst="roundRect">
+            <a:avLst>
+              <a:gd name="adj" fmla="val 3810"/>
+            </a:avLst>
+          </a:prstGeom>
+          <a:solidFill>
+            <a:srgbClr val="1E2761"/>
+          </a:solidFill>
+          <a:ln/>
+        </p:spPr>
+        <p:txBody>
+          <a:bodyPr/>
+          <a:lstStyle/>
+          <a:p>
+            <a:endParaRPr lang="es-CO"/>
+          </a:p>
+        </p:txBody>
+      </p:sp>
+      <p:sp>
+        <p:nvSpPr>
+          <p:cNvPr id="5" name="Text 3"/>
+          <p:cNvSpPr/>
+          <p:nvPr/>
+        </p:nvSpPr>
+        <p:spPr>
+          <a:xfrm>
+            <a:off x="804672" y="2221992"/>
+            <a:ext cx="2157984" cy="685800"/>
+          </a:xfrm>
+          <a:prstGeom prst="rect">
+            <a:avLst/>
+          </a:prstGeom>
+          <a:noFill/>
+          <a:ln/>
+        </p:spPr>
+        <p:txBody>
+          <a:bodyPr wrap="square" lIns="0" tIns="0" rIns="0" bIns="0" rtlCol="0" anchor="t"/>
+          <a:lstStyle/>
+          <a:p>
+            <a:pPr marL="0" indent="0">
+              <a:buNone/>
+            </a:pPr>
+            <a:r>
+              <a:rPr lang="en-US" sz="1400" b="1" dirty="0">
+                <a:solidFill>
+                  <a:srgbClr val="FFFFFF"/>
+                </a:solidFill>
+                <a:latin typeface="Calibri" pitchFamily="34" charset="0"/>
+                <a:ea typeface="Calibri" pitchFamily="34" charset="-122"/>
+                <a:cs typeface="Calibri" pitchFamily="34" charset="-120"/>
+              </a:rPr>
+              <a:t>Matriz de correlación</a:t>
+            </a:r>
+            <a:endParaRPr lang="en-US" sz="1400" dirty="0"/>
+          </a:p>
+        </p:txBody>
+      </p:sp>
+      <p:sp>
+        <p:nvSpPr>
+          <p:cNvPr id="6" name="Text 4"/>
+          <p:cNvSpPr/>
+          <p:nvPr/>
+        </p:nvSpPr>
+        <p:spPr>
+          <a:xfrm>
+            <a:off x="804672" y="2880360"/>
+            <a:ext cx="2157984" cy="914400"/>
+          </a:xfrm>
+          <a:prstGeom prst="rect">
+            <a:avLst/>
+          </a:prstGeom>
+          <a:noFill/>
+          <a:ln/>
+        </p:spPr>
+        <p:txBody>
+          <a:bodyPr wrap="square" lIns="0" tIns="0" rIns="0" bIns="0" rtlCol="0" anchor="t"/>
           <a:lstStyle/>
           <a:p>
             <a:pPr marL="0" indent="0">
@@ -6076,34 +5665,74 @@
               <a:buNone/>
             </a:pPr>
             <a:r>
-              <a:rPr lang="en-US" sz="1350" dirty="0">
-                <a:solidFill>
-                  <a:srgbClr val="5A5F73"/>
-                </a:solidFill>
-                <a:latin typeface="Calibri" pitchFamily="34" charset="0"/>
-                <a:ea typeface="Calibri" pitchFamily="34" charset="-122"/>
-                <a:cs typeface="Calibri" pitchFamily="34" charset="-120"/>
-              </a:rPr>
-              <a:t>componentes hacen falta para explicar el 80% de la varianza</a:t>
-            </a:r>
-            <a:endParaRPr lang="en-US" sz="1350" dirty="0"/>
-          </a:p>
-        </p:txBody>
-      </p:sp>
-      <p:sp>
-        <p:nvSpPr>
-          <p:cNvPr id="7" name="Shape 4"/>
-          <p:cNvSpPr/>
-          <p:nvPr/>
-        </p:nvSpPr>
-        <p:spPr>
-          <a:xfrm>
-            <a:off x="6949440" y="3794760"/>
-            <a:ext cx="4663440" cy="2148840"/>
+              <a:rPr lang="en-US" sz="1100" dirty="0">
+                <a:solidFill>
+                  <a:srgbClr val="CADCFC"/>
+                </a:solidFill>
+                <a:latin typeface="Calibri" pitchFamily="34" charset="0"/>
+                <a:ea typeface="Calibri" pitchFamily="34" charset="-122"/>
+                <a:cs typeface="Calibri" pitchFamily="34" charset="-120"/>
+              </a:rPr>
+              <a:t>Sobre variables cuantitativas.</a:t>
+            </a:r>
+            <a:endParaRPr lang="en-US" sz="1100" dirty="0"/>
+          </a:p>
+          <a:p>
+            <a:pPr marL="0" indent="0">
+              <a:lnSpc>
+                <a:spcPct val="120000"/>
+              </a:lnSpc>
+              <a:buNone/>
+            </a:pPr>
+            <a:r>
+              <a:rPr lang="en-US" sz="1100" dirty="0">
+                <a:solidFill>
+                  <a:srgbClr val="CADCFC"/>
+                </a:solidFill>
+                <a:latin typeface="Calibri" pitchFamily="34" charset="0"/>
+                <a:ea typeface="Calibri" pitchFamily="34" charset="-122"/>
+                <a:cs typeface="Calibri" pitchFamily="34" charset="-120"/>
+              </a:rPr>
+              <a:t>Detecta multicolinealidad:</a:t>
+            </a:r>
+            <a:endParaRPr lang="en-US" sz="1100" dirty="0"/>
+          </a:p>
+          <a:p>
+            <a:pPr marL="0" indent="0">
+              <a:lnSpc>
+                <a:spcPct val="120000"/>
+              </a:lnSpc>
+              <a:buNone/>
+            </a:pPr>
+            <a:r>
+              <a:rPr lang="en-US" sz="1100" dirty="0">
+                <a:solidFill>
+                  <a:srgbClr val="CADCFC"/>
+                </a:solidFill>
+                <a:latin typeface="Calibri" pitchFamily="34" charset="0"/>
+                <a:ea typeface="Calibri" pitchFamily="34" charset="-122"/>
+                <a:cs typeface="Calibri" pitchFamily="34" charset="-120"/>
+              </a:rPr>
+              <a:t>capital vs cuota (r = 0.764)</a:t>
+            </a:r>
+            <a:endParaRPr lang="en-US" sz="1100" dirty="0"/>
+          </a:p>
+        </p:txBody>
+      </p:sp>
+      <p:sp>
+        <p:nvSpPr>
+          <p:cNvPr id="7" name="Shape 5"/>
+          <p:cNvSpPr/>
+          <p:nvPr/>
+        </p:nvSpPr>
+        <p:spPr>
+          <a:xfrm>
+            <a:off x="3438144" y="1965960"/>
+            <a:ext cx="2670048" cy="1920240"/>
           </a:xfrm>
           <a:prstGeom prst="roundRect">
             <a:avLst>
-              <a:gd name="adj" fmla="val 3404"/>
+              <a:gd name="adj" fmla="val 3810"/>
             </a:avLst>
           </a:prstGeom>
           <a:solidFill>
@@ -6121,14 +5750,53 @@
       </p:sp>
       <p:sp>
         <p:nvSpPr>
-          <p:cNvPr id="8" name="Text 5"/>
-          <p:cNvSpPr/>
-          <p:nvPr/>
-        </p:nvSpPr>
-        <p:spPr>
-          <a:xfrm>
-            <a:off x="7178040" y="3931920"/>
-            <a:ext cx="4206240" cy="1874520"/>
+          <p:cNvPr id="8" name="Text 6"/>
+          <p:cNvSpPr/>
+          <p:nvPr/>
+        </p:nvSpPr>
+        <p:spPr>
+          <a:xfrm>
+            <a:off x="3694176" y="2221992"/>
+            <a:ext cx="2157984" cy="685800"/>
+          </a:xfrm>
+          <a:prstGeom prst="rect">
+            <a:avLst/>
+          </a:prstGeom>
+          <a:noFill/>
+          <a:ln/>
+        </p:spPr>
+        <p:txBody>
+          <a:bodyPr wrap="square" lIns="0" tIns="0" rIns="0" bIns="0" rtlCol="0" anchor="t"/>
+          <a:lstStyle/>
+          <a:p>
+            <a:pPr marL="0" indent="0">
+              <a:buNone/>
+            </a:pPr>
+            <a:r>
+              <a:rPr lang="en-US" sz="1400" b="1" dirty="0">
+                <a:solidFill>
+                  <a:srgbClr val="1E2761"/>
+                </a:solidFill>
+                <a:latin typeface="Calibri" pitchFamily="34" charset="0"/>
+                <a:ea typeface="Calibri" pitchFamily="34" charset="-122"/>
+                <a:cs typeface="Calibri" pitchFamily="34" charset="-120"/>
+              </a:rPr>
+              <a:t>Pairplot con hue</a:t>
+            </a:r>
+            <a:endParaRPr lang="en-US" sz="1400" dirty="0"/>
+          </a:p>
+        </p:txBody>
+      </p:sp>
+      <p:sp>
+        <p:nvSpPr>
+          <p:cNvPr id="9" name="Text 7"/>
+          <p:cNvSpPr/>
+          <p:nvPr/>
+        </p:nvSpPr>
+        <p:spPr>
+          <a:xfrm>
+            <a:off x="3694176" y="2880360"/>
+            <a:ext cx="2157984" cy="914400"/>
           </a:xfrm>
           <a:prstGeom prst="rect">
             <a:avLst/>
@@ -6147,18 +5815,17 @@
               <a:buNone/>
             </a:pPr>
             <a:r>
-              <a:rPr lang="en-US" sz="1150" b="1" dirty="0">
-                <a:solidFill>
-                  <a:srgbClr val="1E2761"/>
-                </a:solidFill>
-                <a:latin typeface="Calibri" pitchFamily="34" charset="0"/>
-                <a:ea typeface="Calibri" pitchFamily="34" charset="-122"/>
-                <a:cs typeface="Calibri" pitchFamily="34" charset="-120"/>
-              </a:rPr>
-              <a:t>No hay redundancia aprovechable.
-</a:t>
-            </a:r>
-            <a:endParaRPr lang="en-US" sz="1150" dirty="0"/>
+              <a:rPr lang="en-US" sz="1100" dirty="0">
+                <a:solidFill>
+                  <a:srgbClr val="5A5F73"/>
+                </a:solidFill>
+                <a:latin typeface="Calibri" pitchFamily="34" charset="0"/>
+                <a:ea typeface="Calibri" pitchFamily="34" charset="-122"/>
+                <a:cs typeface="Calibri" pitchFamily="34" charset="-120"/>
+              </a:rPr>
+              <a:t>Muestra de 1.500 registros</a:t>
+            </a:r>
+            <a:endParaRPr lang="en-US" sz="1100" dirty="0"/>
           </a:p>
           <a:p>
             <a:pPr marL="0" indent="0">
@@ -6168,7 +5835,7 @@
               <a:buNone/>
             </a:pPr>
             <a:r>
-              <a:rPr lang="en-US" sz="1150" dirty="0">
+              <a:rPr lang="en-US" sz="1100" dirty="0">
                 <a:solidFill>
                   <a:srgbClr val="5A5F73"/>
                 </a:solidFill>
@@ -6176,11 +5843,100 @@
                 <a:ea typeface="Calibri" pitchFamily="34" charset="-122"/>
                 <a:cs typeface="Calibri" pitchFamily="34" charset="-120"/>
               </a:rPr>
-              <a:t>La proyección sobre PC1-PC2 no separa clientes en mora de los que pagan.
-</a:t>
-            </a:r>
-            <a:endParaRPr lang="en-US" sz="1150" dirty="0"/>
-          </a:p>
+              <a:t>coloreada por resultado de pago</a:t>
+            </a:r>
+            <a:endParaRPr lang="en-US" sz="1100" dirty="0"/>
+          </a:p>
+        </p:txBody>
+      </p:sp>
+      <p:sp>
+        <p:nvSpPr>
+          <p:cNvPr id="10" name="Shape 8"/>
+          <p:cNvSpPr/>
+          <p:nvPr/>
+        </p:nvSpPr>
+        <p:spPr>
+          <a:xfrm>
+            <a:off x="6327648" y="1965960"/>
+            <a:ext cx="2670048" cy="1920240"/>
+          </a:xfrm>
+          <a:prstGeom prst="roundRect">
+            <a:avLst>
+              <a:gd name="adj" fmla="val 3810"/>
+            </a:avLst>
+          </a:prstGeom>
+          <a:solidFill>
+            <a:srgbClr val="F4F7FC"/>
+          </a:solidFill>
+          <a:ln/>
+        </p:spPr>
+        <p:txBody>
+          <a:bodyPr/>
+          <a:lstStyle/>
+          <a:p>
+            <a:endParaRPr lang="es-CO"/>
+          </a:p>
+        </p:txBody>
+      </p:sp>
+      <p:sp>
+        <p:nvSpPr>
+          <p:cNvPr id="11" name="Text 9"/>
+          <p:cNvSpPr/>
+          <p:nvPr/>
+        </p:nvSpPr>
+        <p:spPr>
+          <a:xfrm>
+            <a:off x="6583680" y="2221992"/>
+            <a:ext cx="2157984" cy="685800"/>
+          </a:xfrm>
+          <a:prstGeom prst="rect">
+            <a:avLst/>
+          </a:prstGeom>
+          <a:noFill/>
+          <a:ln/>
+        </p:spPr>
+        <p:txBody>
+          <a:bodyPr wrap="square" lIns="0" tIns="0" rIns="0" bIns="0" rtlCol="0" anchor="t"/>
+          <a:lstStyle/>
+          <a:p>
+            <a:pPr marL="0" indent="0">
+              <a:buNone/>
+            </a:pPr>
+            <a:r>
+              <a:rPr lang="en-US" sz="1400" b="1" dirty="0">
+                <a:solidFill>
+                  <a:srgbClr val="1E2761"/>
+                </a:solidFill>
+                <a:latin typeface="Calibri" pitchFamily="34" charset="0"/>
+                <a:ea typeface="Calibri" pitchFamily="34" charset="-122"/>
+                <a:cs typeface="Calibri" pitchFamily="34" charset="-120"/>
+              </a:rPr>
+              <a:t>Dispersión entre numéricas</a:t>
+            </a:r>
+            <a:endParaRPr lang="en-US" sz="1400" dirty="0"/>
+          </a:p>
+        </p:txBody>
+      </p:sp>
+      <p:sp>
+        <p:nvSpPr>
+          <p:cNvPr id="12" name="Text 10"/>
+          <p:cNvSpPr/>
+          <p:nvPr/>
+        </p:nvSpPr>
+        <p:spPr>
+          <a:xfrm>
+            <a:off x="6583680" y="2880360"/>
+            <a:ext cx="2157984" cy="914400"/>
+          </a:xfrm>
+          <a:prstGeom prst="rect">
+            <a:avLst/>
+          </a:prstGeom>
+          <a:noFill/>
+          <a:ln/>
+        </p:spPr>
+        <p:txBody>
+          <a:bodyPr wrap="square" lIns="0" tIns="0" rIns="0" bIns="0" rtlCol="0" anchor="t"/>
+          <a:lstStyle/>
           <a:p>
             <a:pPr marL="0" indent="0">
               <a:lnSpc>
@@ -6189,18 +5945,7 @@
               <a:buNone/>
             </a:pPr>
             <a:r>
-              <a:rPr lang="en-US" sz="1150" b="1" dirty="0">
-                <a:solidFill>
-                  <a:srgbClr val="B33A3A"/>
-                </a:solidFill>
-                <a:latin typeface="Calibri" pitchFamily="34" charset="0"/>
-                <a:ea typeface="Calibri" pitchFamily="34" charset="-122"/>
-                <a:cs typeface="Calibri" pitchFamily="34" charset="-120"/>
-              </a:rPr>
-              <a:t>Decisión: </a:t>
-            </a:r>
-            <a:r>
-              <a:rPr lang="en-US" sz="1150" dirty="0">
+              <a:rPr lang="en-US" sz="1100" dirty="0">
                 <a:solidFill>
                   <a:srgbClr val="5A5F73"/>
                 </a:solidFill>
@@ -6208,15 +5953,257 @@
                 <a:ea typeface="Calibri" pitchFamily="34" charset="-122"/>
                 <a:cs typeface="Calibri" pitchFamily="34" charset="-120"/>
               </a:rPr>
-              <a:t>no usar PCA en el modelado. Reduciría la interpretabilidad — crítica para explicar por qué se niega un crédito — sin aportar separabilidad.</a:t>
-            </a:r>
-            <a:endParaRPr lang="en-US" sz="1150" dirty="0"/>
-          </a:p>
-        </p:txBody>
-      </p:sp>
-      <p:sp>
-        <p:nvSpPr>
-          <p:cNvPr id="9" name="Text 6"/>
+              <a:t>Cuatro pares clave,</a:t>
+            </a:r>
+            <a:endParaRPr lang="en-US" sz="1100" dirty="0"/>
+          </a:p>
+          <a:p>
+            <a:pPr marL="0" indent="0">
+              <a:lnSpc>
+                <a:spcPct val="120000"/>
+              </a:lnSpc>
+              <a:buNone/>
+            </a:pPr>
+            <a:r>
+              <a:rPr lang="en-US" sz="1100" dirty="0">
+                <a:solidFill>
+                  <a:srgbClr val="5A5F73"/>
+                </a:solidFill>
+                <a:latin typeface="Calibri" pitchFamily="34" charset="0"/>
+                <a:ea typeface="Calibri" pitchFamily="34" charset="-122"/>
+                <a:cs typeface="Calibri" pitchFamily="34" charset="-120"/>
+              </a:rPr>
+              <a:t>diferenciando mora y al día</a:t>
+            </a:r>
+            <a:endParaRPr lang="en-US" sz="1100" dirty="0"/>
+          </a:p>
+        </p:txBody>
+      </p:sp>
+      <p:sp>
+        <p:nvSpPr>
+          <p:cNvPr id="13" name="Shape 11"/>
+          <p:cNvSpPr/>
+          <p:nvPr/>
+        </p:nvSpPr>
+        <p:spPr>
+          <a:xfrm>
+            <a:off x="9217152" y="1965960"/>
+            <a:ext cx="2670048" cy="1920240"/>
+          </a:xfrm>
+          <a:prstGeom prst="roundRect">
+            <a:avLst>
+              <a:gd name="adj" fmla="val 3810"/>
+            </a:avLst>
+          </a:prstGeom>
+          <a:solidFill>
+            <a:srgbClr val="F4F7FC"/>
+          </a:solidFill>
+          <a:ln/>
+        </p:spPr>
+        <p:txBody>
+          <a:bodyPr/>
+          <a:lstStyle/>
+          <a:p>
+            <a:endParaRPr lang="es-CO"/>
+          </a:p>
+        </p:txBody>
+      </p:sp>
+      <p:sp>
+        <p:nvSpPr>
+          <p:cNvPr id="14" name="Text 12"/>
+          <p:cNvSpPr/>
+          <p:nvPr/>
+        </p:nvSpPr>
+        <p:spPr>
+          <a:xfrm>
+            <a:off x="9473184" y="2221992"/>
+            <a:ext cx="2157984" cy="685800"/>
+          </a:xfrm>
+          <a:prstGeom prst="rect">
+            <a:avLst/>
+          </a:prstGeom>
+          <a:noFill/>
+          <a:ln/>
+        </p:spPr>
+        <p:txBody>
+          <a:bodyPr wrap="square" lIns="0" tIns="0" rIns="0" bIns="0" rtlCol="0" anchor="t"/>
+          <a:lstStyle/>
+          <a:p>
+            <a:pPr marL="0" indent="0">
+              <a:buNone/>
+            </a:pPr>
+            <a:r>
+              <a:rPr lang="en-US" sz="1400" b="1" dirty="0">
+                <a:solidFill>
+                  <a:srgbClr val="1E2761"/>
+                </a:solidFill>
+                <a:latin typeface="Calibri" pitchFamily="34" charset="0"/>
+                <a:ea typeface="Calibri" pitchFamily="34" charset="-122"/>
+                <a:cs typeface="Calibri" pitchFamily="34" charset="-120"/>
+              </a:rPr>
+              <a:t>Tablas de contingencia</a:t>
+            </a:r>
+            <a:endParaRPr lang="en-US" sz="1400" dirty="0"/>
+          </a:p>
+        </p:txBody>
+      </p:sp>
+      <p:sp>
+        <p:nvSpPr>
+          <p:cNvPr id="15" name="Text 13"/>
+          <p:cNvSpPr/>
+          <p:nvPr/>
+        </p:nvSpPr>
+        <p:spPr>
+          <a:xfrm>
+            <a:off x="9473184" y="2880360"/>
+            <a:ext cx="2157984" cy="914400"/>
+          </a:xfrm>
+          <a:prstGeom prst="rect">
+            <a:avLst/>
+          </a:prstGeom>
+          <a:noFill/>
+          <a:ln/>
+        </p:spPr>
+        <p:txBody>
+          <a:bodyPr wrap="square" lIns="0" tIns="0" rIns="0" bIns="0" rtlCol="0" anchor="t"/>
+          <a:lstStyle/>
+          <a:p>
+            <a:pPr marL="0" indent="0">
+              <a:lnSpc>
+                <a:spcPct val="120000"/>
+              </a:lnSpc>
+              <a:buNone/>
+            </a:pPr>
+            <a:r>
+              <a:rPr lang="en-US" sz="1100" dirty="0">
+                <a:solidFill>
+                  <a:srgbClr val="5A5F73"/>
+                </a:solidFill>
+                <a:latin typeface="Calibri" pitchFamily="34" charset="0"/>
+                <a:ea typeface="Calibri" pitchFamily="34" charset="-122"/>
+                <a:cs typeface="Calibri" pitchFamily="34" charset="-120"/>
+              </a:rPr>
+              <a:t>Cruces entre variables</a:t>
+            </a:r>
+            <a:endParaRPr lang="en-US" sz="1100" dirty="0"/>
+          </a:p>
+          <a:p>
+            <a:pPr marL="0" indent="0">
+              <a:lnSpc>
+                <a:spcPct val="120000"/>
+              </a:lnSpc>
+              <a:buNone/>
+            </a:pPr>
+            <a:r>
+              <a:rPr lang="en-US" sz="1100" dirty="0">
+                <a:solidFill>
+                  <a:srgbClr val="5A5F73"/>
+                </a:solidFill>
+                <a:latin typeface="Calibri" pitchFamily="34" charset="0"/>
+                <a:ea typeface="Calibri" pitchFamily="34" charset="-122"/>
+                <a:cs typeface="Calibri" pitchFamily="34" charset="-120"/>
+              </a:rPr>
+              <a:t>categóricas y el objetivo</a:t>
+            </a:r>
+            <a:endParaRPr lang="en-US" sz="1100" dirty="0"/>
+          </a:p>
+        </p:txBody>
+      </p:sp>
+      <p:sp>
+        <p:nvSpPr>
+          <p:cNvPr id="16" name="Shape 14"/>
+          <p:cNvSpPr/>
+          <p:nvPr/>
+        </p:nvSpPr>
+        <p:spPr>
+          <a:xfrm>
+            <a:off x="548640" y="4206240"/>
+            <a:ext cx="11064240" cy="1600200"/>
+          </a:xfrm>
+          <a:prstGeom prst="roundRect">
+            <a:avLst>
+              <a:gd name="adj" fmla="val 4571"/>
+            </a:avLst>
+          </a:prstGeom>
+          <a:solidFill>
+            <a:srgbClr val="FBEAEA"/>
+          </a:solidFill>
+          <a:ln/>
+        </p:spPr>
+        <p:txBody>
+          <a:bodyPr/>
+          <a:lstStyle/>
+          <a:p>
+            <a:endParaRPr lang="es-CO"/>
+          </a:p>
+        </p:txBody>
+      </p:sp>
+      <p:sp>
+        <p:nvSpPr>
+          <p:cNvPr id="17" name="Text 15"/>
+          <p:cNvSpPr/>
+          <p:nvPr/>
+        </p:nvSpPr>
+        <p:spPr>
+          <a:xfrm>
+            <a:off x="822960" y="4389120"/>
+            <a:ext cx="10515600" cy="1280160"/>
+          </a:xfrm>
+          <a:prstGeom prst="rect">
+            <a:avLst/>
+          </a:prstGeom>
+          <a:noFill/>
+          <a:ln/>
+        </p:spPr>
+        <p:txBody>
+          <a:bodyPr wrap="square" lIns="0" tIns="0" rIns="0" bIns="0" rtlCol="0" anchor="t"/>
+          <a:lstStyle/>
+          <a:p>
+            <a:pPr marL="0" indent="0">
+              <a:lnSpc>
+                <a:spcPct val="125000"/>
+              </a:lnSpc>
+              <a:buNone/>
+            </a:pPr>
+            <a:r>
+              <a:rPr lang="en-US" sz="1400" b="1" dirty="0">
+                <a:solidFill>
+                  <a:srgbClr val="1E2761"/>
+                </a:solidFill>
+                <a:latin typeface="Calibri" pitchFamily="34" charset="0"/>
+                <a:ea typeface="Calibri" pitchFamily="34" charset="-122"/>
+                <a:cs typeface="Calibri" pitchFamily="34" charset="-120"/>
+              </a:rPr>
+              <a:t>Conclusión del multivariado:
+</a:t>
+            </a:r>
+            <a:endParaRPr lang="en-US" sz="1400" dirty="0"/>
+          </a:p>
+          <a:p>
+            <a:pPr marL="0" indent="0">
+              <a:lnSpc>
+                <a:spcPct val="125000"/>
+              </a:lnSpc>
+              <a:buNone/>
+            </a:pPr>
+            <a:r>
+              <a:rPr lang="en-US" sz="1250" dirty="0">
+                <a:solidFill>
+                  <a:srgbClr val="5A5F73"/>
+                </a:solidFill>
+                <a:latin typeface="Calibri" pitchFamily="34" charset="0"/>
+                <a:ea typeface="Calibri" pitchFamily="34" charset="-122"/>
+                <a:cs typeface="Calibri" pitchFamily="34" charset="-120"/>
+              </a:rPr>
+              <a:t>ninguna combinación de dos variables separa a los clientes en mora. Las nubes de puntos se superponen ampliamente en todos los gráficos. Esto confirma que el riesgo depende de múltiples factores simultáneos y justifica un modelo multivariado en la siguiente fase.</a:t>
+            </a:r>
+            <a:endParaRPr lang="en-US" sz="1400" dirty="0"/>
+          </a:p>
+        </p:txBody>
+      </p:sp>
+      <p:sp>
+        <p:nvSpPr>
+          <p:cNvPr id="18" name="Text 16"/>
           <p:cNvSpPr/>
           <p:nvPr/>
         </p:nvSpPr>
@@ -6255,7 +6242,7 @@
       </p:sp>
       <p:sp>
         <p:nvSpPr>
-          <p:cNvPr id="10" name="Text 7"/>
+          <p:cNvPr id="19" name="Text 17"/>
           <p:cNvSpPr/>
           <p:nvPr/>
         </p:nvSpPr>
@@ -7700,45 +7687,6 @@
       </p:sp>
       <p:sp>
         <p:nvSpPr>
-          <p:cNvPr id="11" name="Text 9"/>
-          <p:cNvSpPr/>
-          <p:nvPr/>
-        </p:nvSpPr>
-        <p:spPr>
-          <a:xfrm>
-            <a:off x="4663440" y="2286000"/>
-            <a:ext cx="548640" cy="548640"/>
-          </a:xfrm>
-          <a:prstGeom prst="rect">
-            <a:avLst/>
-          </a:prstGeom>
-          <a:noFill/>
-          <a:ln/>
-        </p:spPr>
-        <p:txBody>
-          <a:bodyPr wrap="square" lIns="0" tIns="0" rIns="0" bIns="0" rtlCol="0" anchor="ctr"/>
-          <a:lstStyle/>
-          <a:p>
-            <a:pPr marL="0" indent="0" algn="ctr">
-              <a:buNone/>
-            </a:pPr>
-            <a:r>
-              <a:rPr lang="en-US" sz="2000" b="1" dirty="0">
-                <a:solidFill>
-                  <a:srgbClr val="FFFFFF"/>
-                </a:solidFill>
-                <a:latin typeface="Calibri" pitchFamily="34" charset="0"/>
-                <a:ea typeface="Calibri" pitchFamily="34" charset="-122"/>
-                <a:cs typeface="Calibri" pitchFamily="34" charset="-120"/>
-              </a:rPr>
-              <a:t>2</a:t>
-            </a:r>
-            <a:endParaRPr lang="en-US" sz="2000" dirty="0"/>
-          </a:p>
-        </p:txBody>
-      </p:sp>
-      <p:sp>
-        <p:nvSpPr>
           <p:cNvPr id="14" name="Shape 12"/>
           <p:cNvSpPr/>
           <p:nvPr/>
@@ -7789,7 +7737,7 @@
           <a:bodyPr/>
           <a:lstStyle/>
           <a:p>
-            <a:endParaRPr lang="es-CO"/>
+            <a:endParaRPr lang="es-CO" dirty="0"/>
           </a:p>
         </p:txBody>
       </p:sp>
@@ -7826,7 +7774,7 @@
                 <a:ea typeface="Calibri" pitchFamily="34" charset="-122"/>
                 <a:cs typeface="Calibri" pitchFamily="34" charset="-120"/>
               </a:rPr>
-              <a:t>3</a:t>
+              <a:t>2</a:t>
             </a:r>
             <a:endParaRPr lang="en-US" sz="2000" dirty="0"/>
           </a:p>
@@ -8086,8 +8034,9 @@
                 </a:solidFill>
                 <a:latin typeface="Cambria" pitchFamily="34" charset="0"/>
                 <a:ea typeface="Cambria" pitchFamily="34" charset="-122"/>
-              </a:rPr>
-              <a:t>Proyecto </a:t>
+                <a:cs typeface="Cambria" pitchFamily="34" charset="-120"/>
+              </a:rPr>
+              <a:t>Un pipeline a </a:t>
             </a:r>
             <a:r>
               <a:rPr lang="en-US" sz="3000" b="1" dirty="0" err="1">
@@ -8096,8 +8045,9 @@
                 </a:solidFill>
                 <a:latin typeface="Cambria" pitchFamily="34" charset="0"/>
                 <a:ea typeface="Cambria" pitchFamily="34" charset="-122"/>
-              </a:rPr>
-              <a:t>durante</a:t>
+                <a:cs typeface="Cambria" pitchFamily="34" charset="-120"/>
+              </a:rPr>
+              <a:t>desarrollar</a:t>
             </a:r>
             <a:r>
               <a:rPr lang="en-US" sz="3000" b="1" dirty="0">
@@ -8106,8 +8056,9 @@
                 </a:solidFill>
                 <a:latin typeface="Cambria" pitchFamily="34" charset="0"/>
                 <a:ea typeface="Cambria" pitchFamily="34" charset="-122"/>
-              </a:rPr>
-              <a:t> el </a:t>
+                <a:cs typeface="Cambria" pitchFamily="34" charset="-120"/>
+              </a:rPr>
+              <a:t> </a:t>
             </a:r>
             <a:r>
               <a:rPr lang="en-US" sz="3000" b="1" dirty="0" err="1">
@@ -8116,6 +8067,29 @@
                 </a:solidFill>
                 <a:latin typeface="Cambria" pitchFamily="34" charset="0"/>
                 <a:ea typeface="Cambria" pitchFamily="34" charset="-122"/>
+                <a:cs typeface="Cambria" pitchFamily="34" charset="-120"/>
+              </a:rPr>
+              <a:t>durante</a:t>
+            </a:r>
+            <a:r>
+              <a:rPr lang="en-US" sz="3000" b="1" dirty="0">
+                <a:solidFill>
+                  <a:srgbClr val="1E2761"/>
+                </a:solidFill>
+                <a:latin typeface="Cambria" pitchFamily="34" charset="0"/>
+                <a:ea typeface="Cambria" pitchFamily="34" charset="-122"/>
+                <a:cs typeface="Cambria" pitchFamily="34" charset="-120"/>
+              </a:rPr>
+              <a:t> el </a:t>
+            </a:r>
+            <a:r>
+              <a:rPr lang="en-US" sz="3000" b="1" dirty="0" err="1">
+                <a:solidFill>
+                  <a:srgbClr val="1E2761"/>
+                </a:solidFill>
+                <a:latin typeface="Cambria" pitchFamily="34" charset="0"/>
+                <a:ea typeface="Cambria" pitchFamily="34" charset="-122"/>
+                <a:cs typeface="Cambria" pitchFamily="34" charset="-120"/>
               </a:rPr>
               <a:t>semestre</a:t>
             </a:r>
@@ -9458,6 +9432,45 @@
       </p:grpSpPr>
       <p:sp>
         <p:nvSpPr>
+          <p:cNvPr id="2" name="Text 0"/>
+          <p:cNvSpPr/>
+          <p:nvPr/>
+        </p:nvSpPr>
+        <p:spPr>
+          <a:xfrm>
+            <a:off x="548640" y="411480"/>
+            <a:ext cx="9144000" cy="320040"/>
+          </a:xfrm>
+          <a:prstGeom prst="rect">
+            <a:avLst/>
+          </a:prstGeom>
+          <a:noFill/>
+          <a:ln/>
+        </p:spPr>
+        <p:txBody>
+          <a:bodyPr wrap="square" lIns="0" tIns="0" rIns="0" bIns="0" rtlCol="0" anchor="ctr"/>
+          <a:lstStyle/>
+          <a:p>
+            <a:pPr marL="0" indent="0">
+              <a:buNone/>
+            </a:pPr>
+            <a:r>
+              <a:rPr lang="en-US" sz="1300" b="1" kern="0" spc="200" dirty="0">
+                <a:solidFill>
+                  <a:srgbClr val="B33A3A"/>
+                </a:solidFill>
+                <a:latin typeface="Calibri" pitchFamily="34" charset="0"/>
+                <a:ea typeface="Calibri" pitchFamily="34" charset="-122"/>
+                <a:cs typeface="Calibri" pitchFamily="34" charset="-120"/>
+              </a:rPr>
+              <a:t>E</a:t>
+            </a:r>
+            <a:endParaRPr lang="en-US" sz="1300" dirty="0"/>
+          </a:p>
+        </p:txBody>
+      </p:sp>
+      <p:sp>
+        <p:nvSpPr>
           <p:cNvPr id="3" name="Text 1"/>
           <p:cNvSpPr/>
           <p:nvPr/>
@@ -9500,18 +9513,7 @@
                 <a:ea typeface="Cambria" pitchFamily="34" charset="-122"/>
                 <a:cs typeface="Cambria" pitchFamily="34" charset="-120"/>
               </a:rPr>
-              <a:t> </a:t>
-            </a:r>
-            <a:r>
-              <a:rPr lang="en-US" sz="3000" b="1" dirty="0" err="1">
-                <a:solidFill>
-                  <a:srgbClr val="1E2761"/>
-                </a:solidFill>
-                <a:latin typeface="Cambria" pitchFamily="34" charset="0"/>
-                <a:ea typeface="Cambria" pitchFamily="34" charset="-122"/>
-                <a:cs typeface="Cambria" pitchFamily="34" charset="-120"/>
-              </a:rPr>
-              <a:t>Obtenido</a:t>
+              <a:t> general</a:t>
             </a:r>
             <a:endParaRPr lang="en-US" sz="3000" dirty="0"/>
           </a:p>
@@ -10189,7 +10191,7 @@
                 <a:ea typeface="Calibri" pitchFamily="34" charset="-122"/>
                 <a:cs typeface="Calibri" pitchFamily="34" charset="-120"/>
               </a:rPr>
-              <a:t> para la </a:t>
+              <a:t>  para la </a:t>
             </a:r>
             <a:r>
               <a:rPr lang="en-US" sz="1600" dirty="0" err="1">
@@ -10211,16 +10213,19 @@
                 <a:ea typeface="Calibri" pitchFamily="34" charset="-122"/>
                 <a:cs typeface="Calibri" pitchFamily="34" charset="-120"/>
               </a:rPr>
-              <a:t> de decisiones</a:t>
-            </a:r>
-          </a:p>
-          <a:p>
-            <a:pPr marL="0" indent="0">
-              <a:lnSpc>
-                <a:spcPct val="125000"/>
-              </a:lnSpc>
-              <a:buNone/>
-            </a:pPr>
+              <a:t> de </a:t>
+            </a:r>
+            <a:r>
+              <a:rPr lang="en-US" sz="1600" dirty="0" err="1">
+                <a:solidFill>
+                  <a:srgbClr val="5A5F73"/>
+                </a:solidFill>
+                <a:latin typeface="Calibri" pitchFamily="34" charset="0"/>
+                <a:ea typeface="Calibri" pitchFamily="34" charset="-122"/>
+                <a:cs typeface="Calibri" pitchFamily="34" charset="-120"/>
+              </a:rPr>
+              <a:t>decisiones</a:t>
+            </a:r>
             <a:endParaRPr lang="en-US" sz="1600" dirty="0">
               <a:solidFill>
                 <a:srgbClr val="5A5F73"/>
@@ -10237,135 +10242,6 @@
               </a:lnSpc>
               <a:buNone/>
             </a:pPr>
-            <a:r>
-              <a:rPr lang="en-US" sz="1600" dirty="0">
-                <a:solidFill>
-                  <a:srgbClr val="5A5F73"/>
-                </a:solidFill>
-                <a:latin typeface="Calibri" pitchFamily="34" charset="0"/>
-                <a:ea typeface="Calibri" pitchFamily="34" charset="-122"/>
-                <a:cs typeface="Calibri" pitchFamily="34" charset="-120"/>
-              </a:rPr>
-              <a:t>Los </a:t>
-            </a:r>
-            <a:r>
-              <a:rPr lang="en-US" sz="1600" dirty="0" err="1">
-                <a:solidFill>
-                  <a:srgbClr val="5A5F73"/>
-                </a:solidFill>
-                <a:latin typeface="Calibri" pitchFamily="34" charset="0"/>
-                <a:ea typeface="Calibri" pitchFamily="34" charset="-122"/>
-                <a:cs typeface="Calibri" pitchFamily="34" charset="-120"/>
-              </a:rPr>
-              <a:t>datos</a:t>
-            </a:r>
-            <a:r>
-              <a:rPr lang="en-US" sz="1600" dirty="0">
-                <a:solidFill>
-                  <a:srgbClr val="5A5F73"/>
-                </a:solidFill>
-                <a:latin typeface="Calibri" pitchFamily="34" charset="0"/>
-                <a:ea typeface="Calibri" pitchFamily="34" charset="-122"/>
-                <a:cs typeface="Calibri" pitchFamily="34" charset="-120"/>
-              </a:rPr>
-              <a:t> </a:t>
-            </a:r>
-            <a:r>
-              <a:rPr lang="en-US" sz="1600" dirty="0" err="1">
-                <a:solidFill>
-                  <a:srgbClr val="5A5F73"/>
-                </a:solidFill>
-                <a:latin typeface="Calibri" pitchFamily="34" charset="0"/>
-                <a:ea typeface="Calibri" pitchFamily="34" charset="-122"/>
-                <a:cs typeface="Calibri" pitchFamily="34" charset="-120"/>
-              </a:rPr>
-              <a:t>crediticios</a:t>
-            </a:r>
-            <a:r>
-              <a:rPr lang="en-US" sz="1600" dirty="0">
-                <a:solidFill>
-                  <a:srgbClr val="5A5F73"/>
-                </a:solidFill>
-                <a:latin typeface="Calibri" pitchFamily="34" charset="0"/>
-                <a:ea typeface="Calibri" pitchFamily="34" charset="-122"/>
-                <a:cs typeface="Calibri" pitchFamily="34" charset="-120"/>
-              </a:rPr>
-              <a:t> van </a:t>
-            </a:r>
-            <a:r>
-              <a:rPr lang="en-US" sz="1600" dirty="0" err="1">
-                <a:solidFill>
-                  <a:srgbClr val="5A5F73"/>
-                </a:solidFill>
-                <a:latin typeface="Calibri" pitchFamily="34" charset="0"/>
-                <a:ea typeface="Calibri" pitchFamily="34" charset="-122"/>
-                <a:cs typeface="Calibri" pitchFamily="34" charset="-120"/>
-              </a:rPr>
-              <a:t>desde</a:t>
-            </a:r>
-            <a:r>
-              <a:rPr lang="en-US" sz="1600" dirty="0">
-                <a:solidFill>
-                  <a:srgbClr val="5A5F73"/>
-                </a:solidFill>
-                <a:latin typeface="Calibri" pitchFamily="34" charset="0"/>
-                <a:ea typeface="Calibri" pitchFamily="34" charset="-122"/>
-                <a:cs typeface="Calibri" pitchFamily="34" charset="-120"/>
-              </a:rPr>
-              <a:t> </a:t>
-            </a:r>
-            <a:r>
-              <a:rPr lang="en-US" sz="1600" dirty="0" err="1">
-                <a:solidFill>
-                  <a:srgbClr val="5A5F73"/>
-                </a:solidFill>
-                <a:latin typeface="Calibri" pitchFamily="34" charset="0"/>
-                <a:ea typeface="Calibri" pitchFamily="34" charset="-122"/>
-                <a:cs typeface="Calibri" pitchFamily="34" charset="-120"/>
-              </a:rPr>
-              <a:t>noviembre</a:t>
-            </a:r>
-            <a:r>
-              <a:rPr lang="en-US" sz="1600" dirty="0">
-                <a:solidFill>
-                  <a:srgbClr val="5A5F73"/>
-                </a:solidFill>
-                <a:latin typeface="Calibri" pitchFamily="34" charset="0"/>
-                <a:ea typeface="Calibri" pitchFamily="34" charset="-122"/>
-                <a:cs typeface="Calibri" pitchFamily="34" charset="-120"/>
-              </a:rPr>
-              <a:t> del 2024 hasta </a:t>
-            </a:r>
-            <a:r>
-              <a:rPr lang="en-US" sz="1600" dirty="0" err="1">
-                <a:solidFill>
-                  <a:srgbClr val="5A5F73"/>
-                </a:solidFill>
-                <a:latin typeface="Calibri" pitchFamily="34" charset="0"/>
-                <a:ea typeface="Calibri" pitchFamily="34" charset="-122"/>
-                <a:cs typeface="Calibri" pitchFamily="34" charset="-120"/>
-              </a:rPr>
-              <a:t>abril</a:t>
-            </a:r>
-            <a:r>
-              <a:rPr lang="en-US" sz="1600" dirty="0">
-                <a:solidFill>
-                  <a:srgbClr val="5A5F73"/>
-                </a:solidFill>
-                <a:latin typeface="Calibri" pitchFamily="34" charset="0"/>
-                <a:ea typeface="Calibri" pitchFamily="34" charset="-122"/>
-                <a:cs typeface="Calibri" pitchFamily="34" charset="-120"/>
-              </a:rPr>
-              <a:t> 2026</a:t>
-            </a:r>
-          </a:p>
-          <a:p>
-            <a:pPr marL="0" indent="0">
-              <a:lnSpc>
-                <a:spcPct val="125000"/>
-              </a:lnSpc>
-              <a:buNone/>
-            </a:pPr>
             <a:endParaRPr lang="en-US" sz="1600" dirty="0">
               <a:solidFill>
                 <a:srgbClr val="5A5F73"/>
@@ -10383,6 +10259,17 @@
               <a:buNone/>
             </a:pPr>
             <a:r>
+              <a:rPr lang="en-US" sz="1600" dirty="0">
+                <a:solidFill>
+                  <a:srgbClr val="5A5F73"/>
+                </a:solidFill>
+                <a:latin typeface="Calibri" pitchFamily="34" charset="0"/>
+                <a:ea typeface="Calibri" pitchFamily="34" charset="-122"/>
+                <a:cs typeface="Calibri" pitchFamily="34" charset="-120"/>
+              </a:rPr>
+              <a:t>Los </a:t>
+            </a:r>
+            <a:r>
               <a:rPr lang="en-US" sz="1600" dirty="0" err="1">
                 <a:solidFill>
                   <a:srgbClr val="5A5F73"/>
@@ -10391,7 +10278,7 @@
                 <a:ea typeface="Calibri" pitchFamily="34" charset="-122"/>
                 <a:cs typeface="Calibri" pitchFamily="34" charset="-120"/>
               </a:rPr>
-              <a:t>Además</a:t>
+              <a:t>dato</a:t>
             </a:r>
             <a:r>
               <a:rPr lang="en-US" sz="1600" dirty="0">
@@ -10402,7 +10289,7 @@
                 <a:ea typeface="Calibri" pitchFamily="34" charset="-122"/>
                 <a:cs typeface="Calibri" pitchFamily="34" charset="-120"/>
               </a:rPr>
-              <a:t> se propone la </a:t>
+              <a:t> se dan </a:t>
             </a:r>
             <a:r>
               <a:rPr lang="en-US" sz="1600" dirty="0" err="1">
@@ -10413,7 +10300,7 @@
                 <a:ea typeface="Calibri" pitchFamily="34" charset="-122"/>
                 <a:cs typeface="Calibri" pitchFamily="34" charset="-120"/>
               </a:rPr>
-              <a:t>construcción</a:t>
+              <a:t>desde</a:t>
             </a:r>
             <a:r>
               <a:rPr lang="en-US" sz="1600" dirty="0">
@@ -10424,7 +10311,7 @@
                 <a:ea typeface="Calibri" pitchFamily="34" charset="-122"/>
                 <a:cs typeface="Calibri" pitchFamily="34" charset="-120"/>
               </a:rPr>
-              <a:t> de un diccionario de </a:t>
+              <a:t> </a:t>
             </a:r>
             <a:r>
               <a:rPr lang="en-US" sz="1600" dirty="0" err="1">
@@ -10435,40 +10322,41 @@
                 <a:ea typeface="Calibri" pitchFamily="34" charset="-122"/>
                 <a:cs typeface="Calibri" pitchFamily="34" charset="-120"/>
               </a:rPr>
-              <a:t>datos</a:t>
-            </a:r>
-            <a:endParaRPr lang="en-US" sz="1600" dirty="0">
-              <a:solidFill>
-                <a:srgbClr val="5A5F73"/>
-              </a:solidFill>
-              <a:latin typeface="Calibri" pitchFamily="34" charset="0"/>
-              <a:ea typeface="Calibri" pitchFamily="34" charset="-122"/>
-              <a:cs typeface="Calibri" pitchFamily="34" charset="-120"/>
-            </a:endParaRPr>
-          </a:p>
-          <a:p>
-            <a:pPr marL="0" indent="0">
-              <a:lnSpc>
-                <a:spcPct val="125000"/>
-              </a:lnSpc>
-              <a:buNone/>
-            </a:pPr>
-            <a:endParaRPr lang="en-US" sz="1600" dirty="0">
-              <a:solidFill>
-                <a:srgbClr val="5A5F73"/>
-              </a:solidFill>
-              <a:latin typeface="Calibri" pitchFamily="34" charset="0"/>
-              <a:ea typeface="Calibri" pitchFamily="34" charset="-122"/>
-              <a:cs typeface="Calibri" pitchFamily="34" charset="-120"/>
-            </a:endParaRPr>
-          </a:p>
-          <a:p>
-            <a:pPr marL="0" indent="0">
-              <a:lnSpc>
-                <a:spcPct val="125000"/>
-              </a:lnSpc>
-              <a:buNone/>
-            </a:pPr>
+              <a:t>noviembre</a:t>
+            </a:r>
+            <a:r>
+              <a:rPr lang="en-US" sz="1600" dirty="0">
+                <a:solidFill>
+                  <a:srgbClr val="5A5F73"/>
+                </a:solidFill>
+                <a:latin typeface="Calibri" pitchFamily="34" charset="0"/>
+                <a:ea typeface="Calibri" pitchFamily="34" charset="-122"/>
+                <a:cs typeface="Calibri" pitchFamily="34" charset="-120"/>
+              </a:rPr>
+              <a:t> del 2024 hasta </a:t>
+            </a:r>
+            <a:r>
+              <a:rPr lang="en-US" sz="1600" dirty="0" err="1">
+                <a:solidFill>
+                  <a:srgbClr val="5A5F73"/>
+                </a:solidFill>
+                <a:latin typeface="Calibri" pitchFamily="34" charset="0"/>
+                <a:ea typeface="Calibri" pitchFamily="34" charset="-122"/>
+                <a:cs typeface="Calibri" pitchFamily="34" charset="-120"/>
+              </a:rPr>
+              <a:t>abril</a:t>
+            </a:r>
+            <a:r>
+              <a:rPr lang="en-US" sz="1600" dirty="0">
+                <a:solidFill>
+                  <a:srgbClr val="5A5F73"/>
+                </a:solidFill>
+                <a:latin typeface="Calibri" pitchFamily="34" charset="0"/>
+                <a:ea typeface="Calibri" pitchFamily="34" charset="-122"/>
+                <a:cs typeface="Calibri" pitchFamily="34" charset="-120"/>
+              </a:rPr>
+              <a:t> 2026</a:t>
+            </a:r>
             <a:endParaRPr lang="en-US" sz="1600" dirty="0"/>
           </a:p>
         </p:txBody>
@@ -10879,6 +10767,51 @@
               <a:t>3</a:t>
             </a:r>
             <a:endParaRPr lang="en-US" sz="1000" dirty="0"/>
+          </a:p>
+        </p:txBody>
+      </p:sp>
+      <p:sp>
+        <p:nvSpPr>
+          <p:cNvPr id="17" name="Shape 9">
+            <a:extLst>
+              <a:ext uri="{FF2B5EF4-FFF2-40B4-BE49-F238E27FC236}">
+                <a16:creationId xmlns:a16="http://schemas.microsoft.com/office/drawing/2014/main" id="{D525EDD1-6568-B6D4-8B70-CD8A670FC315}"/>
+              </a:ext>
+            </a:extLst>
+          </p:cNvPr>
+          <p:cNvSpPr/>
+          <p:nvPr/>
+        </p:nvSpPr>
+        <p:spPr>
+          <a:xfrm>
+            <a:off x="457200" y="4411980"/>
+            <a:ext cx="4206240" cy="1188720"/>
+          </a:xfrm>
+          <a:prstGeom prst="roundRect">
+            <a:avLst>
+              <a:gd name="adj" fmla="val 6154"/>
+            </a:avLst>
+          </a:prstGeom>
+          <a:solidFill>
+            <a:srgbClr val="F4F7FC"/>
+          </a:solidFill>
+          <a:ln/>
+          <a:effectLst>
+            <a:outerShdw blurRad="76200" dist="25400" dir="5400000" algn="bl" rotWithShape="0">
+              <a:srgbClr val="000000">
+                <a:alpha val="12000"/>
+              </a:srgbClr>
+            </a:outerShdw>
+          </a:effectLst>
+        </p:spPr>
+        <p:txBody>
+          <a:bodyPr/>
+          <a:lstStyle/>
+          <a:p>
+            <a:r>
+              <a:rPr lang="es-CO" dirty="0"/>
+              <a:t>TARGET : Pago a tiempo</a:t>
+            </a:r>
           </a:p>
         </p:txBody>
       </p:sp>
@@ -10915,7 +10848,7 @@
         </p:nvSpPr>
         <p:spPr>
           <a:xfrm>
-            <a:off x="548640" y="402336"/>
+            <a:off x="548640" y="411480"/>
             <a:ext cx="9144000" cy="320040"/>
           </a:xfrm>
           <a:prstGeom prst="rect">
@@ -10940,7 +10873,7 @@
                 <a:ea typeface="Calibri" pitchFamily="34" charset="-122"/>
                 <a:cs typeface="Calibri" pitchFamily="34" charset="-120"/>
               </a:rPr>
-              <a:t>INVESTIGACION SECTOR BANCARIO COLOMBIANO</a:t>
+              <a:t>INVESTIGACIÓN METODOLÓGICA BANCOS EN COLOMBIA</a:t>
             </a:r>
             <a:endParaRPr lang="en-US" sz="1300" dirty="0"/>
           </a:p>
@@ -11018,95 +10951,7 @@
                 <a:ea typeface="Calibri" pitchFamily="34" charset="-122"/>
                 <a:cs typeface="Calibri" pitchFamily="34" charset="-120"/>
               </a:rPr>
-              <a:t>No se </a:t>
-            </a:r>
-            <a:r>
-              <a:rPr lang="en-US" sz="1400" i="1" dirty="0" err="1">
-                <a:solidFill>
-                  <a:srgbClr val="5A5F73"/>
-                </a:solidFill>
-                <a:latin typeface="Calibri" pitchFamily="34" charset="0"/>
-                <a:ea typeface="Calibri" pitchFamily="34" charset="-122"/>
-                <a:cs typeface="Calibri" pitchFamily="34" charset="-120"/>
-              </a:rPr>
-              <a:t>entregó</a:t>
-            </a:r>
-            <a:r>
-              <a:rPr lang="en-US" sz="1400" i="1" dirty="0">
-                <a:solidFill>
-                  <a:srgbClr val="5A5F73"/>
-                </a:solidFill>
-                <a:latin typeface="Calibri" pitchFamily="34" charset="0"/>
-                <a:ea typeface="Calibri" pitchFamily="34" charset="-122"/>
-                <a:cs typeface="Calibri" pitchFamily="34" charset="-120"/>
-              </a:rPr>
-              <a:t> diccionario , </a:t>
-            </a:r>
-            <a:r>
-              <a:rPr lang="en-US" sz="1400" i="1" dirty="0" err="1">
-                <a:solidFill>
-                  <a:srgbClr val="5A5F73"/>
-                </a:solidFill>
-                <a:latin typeface="Calibri" pitchFamily="34" charset="0"/>
-                <a:ea typeface="Calibri" pitchFamily="34" charset="-122"/>
-                <a:cs typeface="Calibri" pitchFamily="34" charset="-120"/>
-              </a:rPr>
-              <a:t>entonces</a:t>
-            </a:r>
-            <a:r>
-              <a:rPr lang="en-US" sz="1400" i="1" dirty="0">
-                <a:solidFill>
-                  <a:srgbClr val="5A5F73"/>
-                </a:solidFill>
-                <a:latin typeface="Calibri" pitchFamily="34" charset="0"/>
-                <a:ea typeface="Calibri" pitchFamily="34" charset="-122"/>
-                <a:cs typeface="Calibri" pitchFamily="34" charset="-120"/>
-              </a:rPr>
-              <a:t> se </a:t>
-            </a:r>
-            <a:r>
-              <a:rPr lang="en-US" sz="1400" i="1" dirty="0" err="1">
-                <a:solidFill>
-                  <a:srgbClr val="5A5F73"/>
-                </a:solidFill>
-                <a:latin typeface="Calibri" pitchFamily="34" charset="0"/>
-                <a:ea typeface="Calibri" pitchFamily="34" charset="-122"/>
-                <a:cs typeface="Calibri" pitchFamily="34" charset="-120"/>
-              </a:rPr>
-              <a:t>implementa</a:t>
-            </a:r>
-            <a:r>
-              <a:rPr lang="en-US" sz="1400" i="1" dirty="0">
-                <a:solidFill>
-                  <a:srgbClr val="5A5F73"/>
-                </a:solidFill>
-                <a:latin typeface="Calibri" pitchFamily="34" charset="0"/>
-                <a:ea typeface="Calibri" pitchFamily="34" charset="-122"/>
-                <a:cs typeface="Calibri" pitchFamily="34" charset="-120"/>
-              </a:rPr>
-              <a:t> un diccionario de </a:t>
-            </a:r>
-            <a:r>
-              <a:rPr lang="en-US" sz="1400" i="1" dirty="0" err="1">
-                <a:solidFill>
-                  <a:srgbClr val="5A5F73"/>
-                </a:solidFill>
-                <a:latin typeface="Calibri" pitchFamily="34" charset="0"/>
-                <a:ea typeface="Calibri" pitchFamily="34" charset="-122"/>
-                <a:cs typeface="Calibri" pitchFamily="34" charset="-120"/>
-              </a:rPr>
-              <a:t>datos</a:t>
-            </a:r>
-            <a:r>
-              <a:rPr lang="en-US" sz="1400" i="1" dirty="0">
-                <a:solidFill>
-                  <a:srgbClr val="5A5F73"/>
-                </a:solidFill>
-                <a:latin typeface="Calibri" pitchFamily="34" charset="0"/>
-                <a:ea typeface="Calibri" pitchFamily="34" charset="-122"/>
-                <a:cs typeface="Calibri" pitchFamily="34" charset="-120"/>
-              </a:rPr>
-              <a:t>.</a:t>
+              <a:t>No se entregó diccionario. Construirlo reveló tres errores metodológicos reales.</a:t>
             </a:r>
             <a:endParaRPr lang="en-US" sz="1400" dirty="0"/>
           </a:p>
@@ -11845,7 +11690,7 @@
         </p:nvSpPr>
         <p:spPr>
           <a:xfrm>
-            <a:off x="548640" y="4640113"/>
+            <a:off x="548640" y="4663440"/>
             <a:ext cx="11064240" cy="1051560"/>
           </a:xfrm>
           <a:prstGeom prst="roundRect">
@@ -11895,9 +11740,6 @@
             </a:pPr>
             <a:r>
               <a:rPr lang="en-US" sz="1200" b="1" dirty="0">
-                <a:solidFill>
-                  <a:srgbClr val="1E2761"/>
-                </a:solidFill>
                 <a:latin typeface="Calibri" pitchFamily="34" charset="0"/>
                 <a:ea typeface="Calibri" pitchFamily="34" charset="-122"/>
                 <a:cs typeface="Calibri" pitchFamily="34" charset="-120"/>
@@ -11910,7 +11752,7 @@
                 <a:ea typeface="Calibri" pitchFamily="34" charset="-122"/>
                 <a:cs typeface="Calibri" pitchFamily="34" charset="-120"/>
               </a:rPr>
-              <a:t>bajo Ley 1266 de 2008 todas las variables son (dato financiero y crediticio). Ninguna es </a:t>
+              <a:t>bajo Ley 1266 de 2008 todas las variables son </a:t>
             </a:r>
             <a:r>
               <a:rPr lang="en-US" sz="1200" b="1" dirty="0">
@@ -11918,6 +11760,22 @@
                 <a:ea typeface="Calibri" pitchFamily="34" charset="-122"/>
                 <a:cs typeface="Calibri" pitchFamily="34" charset="-120"/>
               </a:rPr>
+              <a:t>semiprivadas</a:t>
+            </a:r>
+            <a:r>
+              <a:rPr lang="en-US" sz="1200" dirty="0">
+                <a:latin typeface="Calibri" pitchFamily="34" charset="0"/>
+                <a:ea typeface="Calibri" pitchFamily="34" charset="-122"/>
+                <a:cs typeface="Calibri" pitchFamily="34" charset="-120"/>
+              </a:rPr>
+              <a:t> (dato financiero y crediticio). Ninguna es </a:t>
+            </a:r>
+            <a:r>
+              <a:rPr lang="en-US" sz="1200" b="1" dirty="0">
+                <a:latin typeface="Calibri" pitchFamily="34" charset="0"/>
+                <a:ea typeface="Calibri" pitchFamily="34" charset="-122"/>
+                <a:cs typeface="Calibri" pitchFamily="34" charset="-120"/>
+              </a:rPr>
               <a:t>sensible</a:t>
             </a:r>
             <a:r>
@@ -11926,7 +11784,7 @@
                 <a:ea typeface="Calibri" pitchFamily="34" charset="-122"/>
                 <a:cs typeface="Calibri" pitchFamily="34" charset="-120"/>
               </a:rPr>
-              <a:t> en el sentido de la Ley 1581 art. 5</a:t>
+              <a:t> en el sentido de la Ley 1581 art. 5 (origen racial, salud, biometría).</a:t>
             </a:r>
             <a:endParaRPr lang="en-US" sz="1200" dirty="0"/>
           </a:p>
@@ -12107,7 +11965,7 @@
                 <a:ea typeface="Cambria" pitchFamily="34" charset="-122"/>
                 <a:cs typeface="Cambria" pitchFamily="34" charset="-120"/>
               </a:rPr>
-              <a:t>Tres errores que el diccionario </a:t>
+              <a:t>Tres errores que el </a:t>
             </a:r>
             <a:r>
               <a:rPr lang="en-US" sz="3000" b="1" dirty="0" err="1">
@@ -12118,7 +11976,7 @@
                 <a:ea typeface="Cambria" pitchFamily="34" charset="-122"/>
                 <a:cs typeface="Cambria" pitchFamily="34" charset="-120"/>
               </a:rPr>
-              <a:t>permitió</a:t>
+              <a:t>diccionario</a:t>
             </a:r>
             <a:r>
               <a:rPr lang="en-US" sz="3000" b="1" dirty="0">
@@ -12140,7 +11998,29 @@
                 <a:ea typeface="Cambria" pitchFamily="34" charset="-122"/>
                 <a:cs typeface="Cambria" pitchFamily="34" charset="-120"/>
               </a:rPr>
-              <a:t>conocer</a:t>
+              <a:t>permitió</a:t>
+            </a:r>
+            <a:r>
+              <a:rPr lang="en-US" sz="3000" b="1" dirty="0">
+                <a:solidFill>
+                  <a:srgbClr val="1E2761"/>
+                </a:solidFill>
+                <a:latin typeface="Cambria" pitchFamily="34" charset="0"/>
+                <a:ea typeface="Cambria" pitchFamily="34" charset="-122"/>
+                <a:cs typeface="Cambria" pitchFamily="34" charset="-120"/>
+              </a:rPr>
+              <a:t> </a:t>
+            </a:r>
+            <a:r>
+              <a:rPr lang="en-US" sz="3000" b="1" dirty="0" err="1">
+                <a:solidFill>
+                  <a:srgbClr val="1E2761"/>
+                </a:solidFill>
+                <a:latin typeface="Cambria" pitchFamily="34" charset="0"/>
+                <a:ea typeface="Cambria" pitchFamily="34" charset="-122"/>
+                <a:cs typeface="Cambria" pitchFamily="34" charset="-120"/>
+              </a:rPr>
+              <a:t>revelar</a:t>
             </a:r>
             <a:endParaRPr lang="en-US" sz="3000" dirty="0"/>
           </a:p>
@@ -13877,7 +13757,7 @@
               <a:buNone/>
             </a:pPr>
             <a:r>
-              <a:rPr lang="en-US" sz="3000" b="1" dirty="0">
+              <a:rPr lang="en-US" sz="3000" b="1" dirty="0" err="1">
                 <a:solidFill>
                   <a:srgbClr val="1E2761"/>
                 </a:solidFill>
@@ -13885,7 +13765,40 @@
                 <a:ea typeface="Cambria" pitchFamily="34" charset="-122"/>
                 <a:cs typeface="Cambria" pitchFamily="34" charset="-120"/>
               </a:rPr>
-              <a:t>Lo que encontramos antes de analizar</a:t>
+              <a:t>Información</a:t>
+            </a:r>
+            <a:r>
+              <a:rPr lang="en-US" sz="3000" b="1" dirty="0">
+                <a:solidFill>
+                  <a:srgbClr val="1E2761"/>
+                </a:solidFill>
+                <a:latin typeface="Cambria" pitchFamily="34" charset="0"/>
+                <a:ea typeface="Cambria" pitchFamily="34" charset="-122"/>
+                <a:cs typeface="Cambria" pitchFamily="34" charset="-120"/>
+              </a:rPr>
+              <a:t> </a:t>
+            </a:r>
+            <a:r>
+              <a:rPr lang="en-US" sz="3000" b="1" dirty="0" err="1">
+                <a:solidFill>
+                  <a:srgbClr val="1E2761"/>
+                </a:solidFill>
+                <a:latin typeface="Cambria" pitchFamily="34" charset="0"/>
+                <a:ea typeface="Cambria" pitchFamily="34" charset="-122"/>
+                <a:cs typeface="Cambria" pitchFamily="34" charset="-120"/>
+              </a:rPr>
+              <a:t>encontrada</a:t>
+            </a:r>
+            <a:r>
+              <a:rPr lang="en-US" sz="3000" b="1" dirty="0">
+                <a:solidFill>
+                  <a:srgbClr val="1E2761"/>
+                </a:solidFill>
+                <a:latin typeface="Cambria" pitchFamily="34" charset="0"/>
+                <a:ea typeface="Cambria" pitchFamily="34" charset="-122"/>
+                <a:cs typeface="Cambria" pitchFamily="34" charset="-120"/>
+              </a:rPr>
+              <a:t> antes de analizar</a:t>
             </a:r>
             <a:endParaRPr lang="en-US" sz="3000" dirty="0"/>
           </a:p>
@@ -14614,7 +14527,106 @@
                 <a:ea typeface="Cambria" pitchFamily="34" charset="-122"/>
                 <a:cs typeface="Cambria" pitchFamily="34" charset="-120"/>
               </a:rPr>
-              <a:t>Un desbalance que condiciona todo el análisis</a:t>
+              <a:t>Un </a:t>
+            </a:r>
+            <a:r>
+              <a:rPr lang="en-US" sz="3000" b="1" dirty="0" err="1">
+                <a:solidFill>
+                  <a:srgbClr val="1E2761"/>
+                </a:solidFill>
+                <a:latin typeface="Cambria" pitchFamily="34" charset="0"/>
+                <a:ea typeface="Cambria" pitchFamily="34" charset="-122"/>
+                <a:cs typeface="Cambria" pitchFamily="34" charset="-120"/>
+              </a:rPr>
+              <a:t>desbalance</a:t>
+            </a:r>
+            <a:r>
+              <a:rPr lang="en-US" sz="3000" b="1" dirty="0">
+                <a:solidFill>
+                  <a:srgbClr val="1E2761"/>
+                </a:solidFill>
+                <a:latin typeface="Cambria" pitchFamily="34" charset="0"/>
+                <a:ea typeface="Cambria" pitchFamily="34" charset="-122"/>
+                <a:cs typeface="Cambria" pitchFamily="34" charset="-120"/>
+              </a:rPr>
+              <a:t> </a:t>
+            </a:r>
+            <a:r>
+              <a:rPr lang="en-US" sz="3000" b="1" dirty="0" err="1">
+                <a:solidFill>
+                  <a:srgbClr val="1E2761"/>
+                </a:solidFill>
+                <a:latin typeface="Cambria" pitchFamily="34" charset="0"/>
+                <a:ea typeface="Cambria" pitchFamily="34" charset="-122"/>
+                <a:cs typeface="Cambria" pitchFamily="34" charset="-120"/>
+              </a:rPr>
+              <a:t>importante</a:t>
+            </a:r>
+            <a:r>
+              <a:rPr lang="en-US" sz="3000" b="1" dirty="0">
+                <a:solidFill>
+                  <a:srgbClr val="1E2761"/>
+                </a:solidFill>
+                <a:latin typeface="Cambria" pitchFamily="34" charset="0"/>
+                <a:ea typeface="Cambria" pitchFamily="34" charset="-122"/>
+                <a:cs typeface="Cambria" pitchFamily="34" charset="-120"/>
+              </a:rPr>
+              <a:t> a </a:t>
+            </a:r>
+            <a:r>
+              <a:rPr lang="en-US" sz="3000" b="1" dirty="0" err="1">
+                <a:solidFill>
+                  <a:srgbClr val="1E2761"/>
+                </a:solidFill>
+                <a:latin typeface="Cambria" pitchFamily="34" charset="0"/>
+                <a:ea typeface="Cambria" pitchFamily="34" charset="-122"/>
+                <a:cs typeface="Cambria" pitchFamily="34" charset="-120"/>
+              </a:rPr>
+              <a:t>tener</a:t>
+            </a:r>
+            <a:r>
+              <a:rPr lang="en-US" sz="3000" b="1" dirty="0">
+                <a:solidFill>
+                  <a:srgbClr val="1E2761"/>
+                </a:solidFill>
+                <a:latin typeface="Cambria" pitchFamily="34" charset="0"/>
+                <a:ea typeface="Cambria" pitchFamily="34" charset="-122"/>
+                <a:cs typeface="Cambria" pitchFamily="34" charset="-120"/>
+              </a:rPr>
+              <a:t> </a:t>
+            </a:r>
+            <a:r>
+              <a:rPr lang="en-US" sz="3000" b="1" dirty="0" err="1">
+                <a:solidFill>
+                  <a:srgbClr val="1E2761"/>
+                </a:solidFill>
+                <a:latin typeface="Cambria" pitchFamily="34" charset="0"/>
+                <a:ea typeface="Cambria" pitchFamily="34" charset="-122"/>
+                <a:cs typeface="Cambria" pitchFamily="34" charset="-120"/>
+              </a:rPr>
+              <a:t>en</a:t>
+            </a:r>
+            <a:r>
+              <a:rPr lang="en-US" sz="3000" b="1" dirty="0">
+                <a:solidFill>
+                  <a:srgbClr val="1E2761"/>
+                </a:solidFill>
+                <a:latin typeface="Cambria" pitchFamily="34" charset="0"/>
+                <a:ea typeface="Cambria" pitchFamily="34" charset="-122"/>
+                <a:cs typeface="Cambria" pitchFamily="34" charset="-120"/>
+              </a:rPr>
+              <a:t> </a:t>
+            </a:r>
+            <a:r>
+              <a:rPr lang="en-US" sz="3000" b="1" dirty="0" err="1">
+                <a:solidFill>
+                  <a:srgbClr val="1E2761"/>
+                </a:solidFill>
+                <a:latin typeface="Cambria" pitchFamily="34" charset="0"/>
+                <a:ea typeface="Cambria" pitchFamily="34" charset="-122"/>
+                <a:cs typeface="Cambria" pitchFamily="34" charset="-120"/>
+              </a:rPr>
+              <a:t>cuenta</a:t>
             </a:r>
             <a:endParaRPr lang="en-US" sz="3000" dirty="0"/>
           </a:p>

--- a/PRESENTACION.pptx
+++ b/PRESENTACION.pptx
@@ -5138,7 +5138,7 @@
                 <a:ea typeface="Calibri" pitchFamily="34" charset="-122"/>
                 <a:cs typeface="Calibri" pitchFamily="34" charset="-120"/>
               </a:rPr>
-              <a:t>Todos los valores están por debajo de 0,13 en una escala de 0 a 1: ninguna variable se relaciona de forma lineal fuerte con la mora por sí sola.</a:t>
+              <a:t>Ninguna variable supera 0,13: no hay relación lineal fuerte. Pero la correlación subestima el poder predictivo con un target al 4,75%. Por tramos, el score va de 64% a 2,9% de mora.</a:t>
             </a:r>
             <a:endParaRPr lang="en-US" sz="1150" dirty="0"/>
           </a:p>
@@ -6172,7 +6172,7 @@
                 <a:ea typeface="Calibri" pitchFamily="34" charset="-122"/>
                 <a:cs typeface="Calibri" pitchFamily="34" charset="-120"/>
               </a:rPr>
-              <a:t>Los ratios cuota/ingreso y deuda/ingreso dieron correlación cercana a 0. Causa: dividen por salario_cliente, variable con 250 valores imputados en la limpieza. Deben recalcularse en la Fase 2 excluyendo esos registros.</a:t>
+              <a:t>Los ratios cuota/ingreso y deuda/ingreso dieron correlación cercana a 0. Se comprobó que NO se debe a los salarios imputados: excluirlos no cambia el resultado. La causa es la métrica — por tramos sí muestran señal débil.</a:t>
             </a:r>
             <a:endParaRPr lang="en-US" sz="1200" dirty="0"/>
           </a:p>
@@ -7336,8 +7336,7 @@
                   <a:srgbClr val="1E2761"/>
                 </a:solidFill>
               </a:rPr>
-              <a:t>puntaje_datacredito es bimodal
-</a:t>
+              <a:t>El score discrimina, pero no linealmente</a:t>
             </a:r>
             <a:endParaRPr lang="en-US" sz="1500" dirty="0"/>
           </a:p>
@@ -7354,7 +7353,7 @@
                   <a:srgbClr val="5A5F73"/>
                 </a:solidFill>
               </a:rPr>
-              <a:t>Un grupo pequeño con score cercano a 0 y el resto concentrado entre 700–999: posiblemente dos poblaciones distintas (con y sin historial suficiente en la central de riesgo).</a:t>
+              <a:t>Por bandas, la tasa de mora va de 64,0% por debajo de 600 puntos a 2,9% por encima de 850. Su correlación de Pearson es solo 0,121.</a:t>
             </a:r>
             <a:endParaRPr lang="en-US" sz="1500" dirty="0"/>
           </a:p>
@@ -7904,7 +7903,7 @@
                 <a:ea typeface="Calibri" pitchFamily="34" charset="-122"/>
                 <a:cs typeface="Calibri" pitchFamily="34" charset="-120"/>
               </a:rPr>
-              <a:t>27% de nulos sin causa estructural</a:t>
+              <a:t>Etiqueta no homogénea en el tiempo</a:t>
             </a:r>
             <a:endParaRPr lang="en-US" sz="1350" dirty="0"/>
           </a:p>
@@ -7946,7 +7945,7 @@
                 <a:ea typeface="Calibri" pitchFamily="34" charset="-122"/>
                 <a:cs typeface="Calibri" pitchFamily="34" charset="-120"/>
               </a:rPr>
-              <a:t>En promedio_ingresos_datacredito, sin patrón identificado que justifique imputar con confianza.</a:t>
+              <a:t>El 19,9% de los créditos vence después del corte de datos: su resultado de pago aún no es definitivo (6,40% vs 4,34%).</a:t>
             </a:r>
             <a:endParaRPr lang="en-US" sz="1200" dirty="0"/>
           </a:p>
@@ -10615,7 +10614,7 @@
                 <a:ea typeface="Cambria" pitchFamily="34" charset="-122"/>
                 <a:cs typeface="Cambria" pitchFamily="34" charset="-120"/>
               </a:rPr>
-              <a:t>153</a:t>
+              <a:t>2.930</a:t>
             </a:r>
             <a:endParaRPr lang="en-US" sz="4000" dirty="0"/>
           </a:p>
@@ -10657,7 +10656,7 @@
                 <a:ea typeface="Calibri" pitchFamily="34" charset="-122"/>
                 <a:cs typeface="Calibri" pitchFamily="34" charset="-120"/>
               </a:rPr>
-              <a:t>clientes sin historial crediticio: 6,54% de mora frente a 4,72%</a:t>
+              <a:t>clientes sin reporte de ingresos en el buró: 5,73% de mora frente a 4,38%</a:t>
             </a:r>
             <a:endParaRPr lang="en-US" sz="1300" dirty="0"/>
           </a:p>
@@ -10739,7 +10738,7 @@
                 <a:ea typeface="Calibri" pitchFamily="34" charset="-122"/>
                 <a:cs typeface="Calibri" pitchFamily="34" charset="-120"/>
               </a:rPr>
-              <a:t>al depurar los 153 scores inválidos, la correlación de puntaje_datacredito con la mora pasó de 0,068 a 0,121 (+78%). Aun así ninguna variable individual supera 0,13 en una escala de 0 a 1.</a:t>
+              <a:t>al depurar los 153 scores inválidos, la correlación de puntaje_datacredito con la mora pasó de 0,068 a 0,121 (+78%). Y por bandas de score la tasa de mora va de 64% a 2,9%: la correlación lineal subestima la señal.</a:t>
             </a:r>
             <a:endParaRPr lang="en-US" sz="1300" dirty="0"/>
           </a:p>

--- a/PRESENTACION.pptx
+++ b/PRESENTACION.pptx
@@ -10380,7 +10380,7 @@
                 <a:ea typeface="Cambria" pitchFamily="34" charset="-122"/>
                 <a:cs typeface="Cambria" pitchFamily="34" charset="-120"/>
               </a:rPr>
-              <a:t>8x</a:t>
+              <a:t>3,2x</a:t>
             </a:r>
             <a:endParaRPr lang="en-US" sz="4000" dirty="0"/>
           </a:p>
@@ -10422,7 +10422,7 @@
                 <a:ea typeface="Calibri" pitchFamily="34" charset="-122"/>
                 <a:cs typeface="Calibri" pitchFamily="34" charset="-120"/>
               </a:rPr>
-              <a:t>más riesgo de mora si el cliente ya registraba saldo en mora (36,4% vs 4,6%)</a:t>
+              <a:t>más mora en créditos a 24–36 meses que a 6–12 meses (12,66% vs 3,91%)</a:t>
             </a:r>
             <a:endParaRPr lang="en-US" sz="1300" dirty="0"/>
           </a:p>
